--- a/public/downloads/Vela-OS-Demo-Deck.pptx
+++ b/public/downloads/Vela-OS-Demo-Deck.pptx
@@ -4219,7 +4219,7 @@
                 </a:solidFill>
                 <a:latin typeface="Arial"/>
               </a:rPr>
-              <a:t>vela-os-roai.emerge-digital.workers.dev</a:t>
+              <a:t>roai.emergedigital.ae</a:t>
             </a:r>
           </a:p>
         </p:txBody>
@@ -4868,7 +4868,7 @@
                 </a:solidFill>
                 <a:latin typeface="Arial"/>
               </a:rPr>
-              <a:t>vela-os-roai.emerge-digital.workers.dev</a:t>
+              <a:t>roai.emergedigital.ae</a:t>
             </a:r>
           </a:p>
         </p:txBody>
@@ -5955,7 +5955,7 @@
                 </a:solidFill>
                 <a:latin typeface="Arial"/>
               </a:rPr>
-              <a:t>vela-os-roai.emerge-digital.workers.dev</a:t>
+              <a:t>roai.emergedigital.ae</a:t>
             </a:r>
           </a:p>
         </p:txBody>
@@ -6462,7 +6462,7 @@
                 </a:solidFill>
                 <a:latin typeface="Arial"/>
               </a:rPr>
-              <a:t>vela-os-roai.emerge-digital.workers.dev</a:t>
+              <a:t>roai.emergedigital.ae</a:t>
             </a:r>
           </a:p>
         </p:txBody>
@@ -7072,7 +7072,7 @@
                 </a:solidFill>
                 <a:latin typeface="Arial"/>
               </a:rPr>
-              <a:t>vela-os-roai.emerge-digital.workers.dev</a:t>
+              <a:t>roai.emergedigital.ae</a:t>
             </a:r>
           </a:p>
         </p:txBody>
@@ -8194,7 +8194,7 @@
                 </a:solidFill>
                 <a:latin typeface="Arial"/>
               </a:rPr>
-              <a:t>vela-os-roai.emerge-digital.workers.dev</a:t>
+              <a:t>roai.emergedigital.ae</a:t>
             </a:r>
           </a:p>
         </p:txBody>
@@ -9509,7 +9509,7 @@
                 </a:solidFill>
                 <a:latin typeface="Arial"/>
               </a:rPr>
-              <a:t>https://vela-os-roai.emerge-digital.workers.dev/guide</a:t>
+              <a:t>https://roai.emergedigital.ae/guide</a:t>
             </a:r>
           </a:p>
         </p:txBody>
@@ -9596,7 +9596,7 @@
                 </a:solidFill>
                 <a:latin typeface="Arial"/>
               </a:rPr>
-              <a:t>vela-os-roai.emerge-digital.workers.dev</a:t>
+              <a:t>roai.emergedigital.ae</a:t>
             </a:r>
           </a:p>
         </p:txBody>
@@ -9913,7 +9913,7 @@
                 </a:solidFill>
                 <a:latin typeface="Arial"/>
               </a:rPr>
-              <a:t>vela-os-roai.emerge-digital.workers.dev</a:t>
+              <a:t>roai.emergedigital.ae</a:t>
             </a:r>
           </a:p>
         </p:txBody>
@@ -10007,7 +10007,7 @@
                 </a:solidFill>
                 <a:latin typeface="Arial"/>
               </a:rPr>
-              <a:t>vela-os-roai.emerge-digital.workers.dev/guide</a:t>
+              <a:t>roai.emergedigital.ae/guide</a:t>
             </a:r>
           </a:p>
         </p:txBody>

--- a/public/downloads/Vela-OS-Demo-Deck.pptx
+++ b/public/downloads/Vela-OS-Demo-Deck.pptx
@@ -3347,7 +3347,7 @@
                 </a:solidFill>
                 <a:latin typeface="Arial"/>
               </a:rPr>
-              <a:t>FPT CX Services  -  ROAI Analytics</a:t>
+              <a:t>ROAI Analytics  -  Emerge Digital</a:t>
             </a:r>
           </a:p>
         </p:txBody>
@@ -3441,7 +3441,7 @@
                 </a:solidFill>
                 <a:latin typeface="Arial"/>
               </a:rPr>
-              <a:t>Vela OS turns FPT's full CX offering into one measurable surface - a dual-mode agency command center and customer portal, where every AI engagement is priced, delivered, and proven in ROAI.</a:t>
+              <a:t>Vela OS turns a full enterprise CX offering into one measurable surface - a dual-mode agency command center and customer portal, where every AI engagement is priced, delivered, and proven in ROAI.</a:t>
             </a:r>
           </a:p>
         </p:txBody>
@@ -4180,7 +4180,7 @@
                 </a:solidFill>
                 <a:latin typeface="Arial"/>
               </a:rPr>
-              <a:t>Emerge Digital x FPT CX Services</a:t>
+              <a:t>ROAI Analytics  -  Emerge Digital</a:t>
             </a:r>
           </a:p>
         </p:txBody>
@@ -4829,7 +4829,7 @@
                 </a:solidFill>
                 <a:latin typeface="Arial"/>
               </a:rPr>
-              <a:t>Emerge Digital x FPT CX Services</a:t>
+              <a:t>ROAI Analytics  -  Emerge Digital</a:t>
             </a:r>
           </a:p>
         </p:txBody>
@@ -5916,7 +5916,7 @@
                 </a:solidFill>
                 <a:latin typeface="Arial"/>
               </a:rPr>
-              <a:t>Emerge Digital x FPT CX Services</a:t>
+              <a:t>ROAI Analytics  -  Emerge Digital</a:t>
             </a:r>
           </a:p>
         </p:txBody>
@@ -6375,7 +6375,7 @@
                 </a:solidFill>
                 <a:latin typeface="Arial"/>
               </a:rPr>
-              <a:t>FPT and the client always see the same source of truth - so renewals and expansion become a data conversation, not a debate.</a:t>
+              <a:t>The practice and the client always see the same source of truth - so renewals and expansion become a data conversation, not a debate.</a:t>
             </a:r>
           </a:p>
         </p:txBody>
@@ -6423,7 +6423,7 @@
                 </a:solidFill>
                 <a:latin typeface="Arial"/>
               </a:rPr>
-              <a:t>Emerge Digital x FPT CX Services</a:t>
+              <a:t>ROAI Analytics  -  Emerge Digital</a:t>
             </a:r>
           </a:p>
         </p:txBody>
@@ -7033,7 +7033,7 @@
                 </a:solidFill>
                 <a:latin typeface="Arial"/>
               </a:rPr>
-              <a:t>Emerge Digital x FPT CX Services</a:t>
+              <a:t>ROAI Analytics  -  Emerge Digital</a:t>
             </a:r>
           </a:p>
         </p:txBody>
@@ -8059,7 +8059,7 @@
                 </a:solidFill>
                 <a:latin typeface="Arial"/>
               </a:rPr>
-              <a:t>PARTNERS:  </a:t>
+              <a:t>FPT PARTNERS:  </a:t>
             </a:r>
             <a:r>
               <a:rPr sz="1100" b="0">
@@ -8109,6 +8109,15 @@
               </a:rPr>
               <a:t>1,000+ certified engineers      1,500+ platform certifications</a:t>
             </a:r>
+            <a:r>
+              <a:rPr sz="1000" b="0">
+                <a:solidFill>
+                  <a:srgbClr val="6B6B77"/>
+                </a:solidFill>
+                <a:latin typeface="Arial"/>
+              </a:rPr>
+              <a:t xml:space="preserve">      FPT Corporation's public figures</a:t>
+            </a:r>
           </a:p>
         </p:txBody>
       </p:sp>
@@ -8155,7 +8164,7 @@
                 </a:solidFill>
                 <a:latin typeface="Arial"/>
               </a:rPr>
-              <a:t>Emerge Digital x FPT CX Services</a:t>
+              <a:t>ROAI Analytics  -  Emerge Digital</a:t>
             </a:r>
           </a:p>
         </p:txBody>
@@ -9557,7 +9566,7 @@
                 </a:solidFill>
                 <a:latin typeface="Arial"/>
               </a:rPr>
-              <a:t>Emerge Digital x FPT CX Services</a:t>
+              <a:t>ROAI Analytics  -  Emerge Digital</a:t>
             </a:r>
           </a:p>
         </p:txBody>
@@ -10046,7 +10055,7 @@
                 </a:solidFill>
                 <a:latin typeface="Arial"/>
               </a:rPr>
-              <a:t>Built by Emerge Digital for FPT CX Services</a:t>
+              <a:t>Built by Emerge Digital for an AI-native enterprise CX practice</a:t>
             </a:r>
           </a:p>
         </p:txBody>

--- a/public/downloads/Vela-OS-Demo-Deck.pptx
+++ b/public/downloads/Vela-OS-Demo-Deck.pptx
@@ -5008,7 +5008,7 @@
                 </a:solidFill>
                 <a:latin typeface="Arial"/>
               </a:rPr>
-              <a:t>Six CX pillars, powered by the ON.Ecosystem.</a:t>
+              <a:t>Six CX pillars, powered by the Vela line.</a:t>
             </a:r>
           </a:p>
         </p:txBody>
@@ -5830,7 +5830,7 @@
                 </a:solidFill>
                 <a:latin typeface="Arial"/>
               </a:rPr>
-              <a:t>ON.Optima - Answer Engine Optimization        </a:t>
+              <a:t>Vela AEO - Answer Engine Optimization        </a:t>
             </a:r>
             <a:r>
               <a:rPr sz="1300" b="0">
@@ -5839,7 +5839,7 @@
                 </a:solidFill>
                 <a:latin typeface="Arial"/>
               </a:rPr>
-              <a:t>ON.X - Agentic Assistant
+              <a:t>Vela Assist - Governed Assistant
 </a:t>
             </a:r>
             <a:r>
@@ -5849,7 +5849,7 @@
                 </a:solidFill>
                 <a:latin typeface="Arial"/>
               </a:rPr>
-              <a:t>ON.E - Commerce Accelerator        </a:t>
+              <a:t>Vela Commerce - Feed Validation        </a:t>
             </a:r>
             <a:r>
               <a:rPr sz="1300" b="0">
@@ -5858,7 +5858,7 @@
                 </a:solidFill>
                 <a:latin typeface="Arial"/>
               </a:rPr>
-              <a:t>ON.Match - AI Recommendations
+              <a:t>Vela Recs - Recommendation Ranking
 </a:t>
             </a:r>
             <a:r>
@@ -5868,7 +5868,7 @@
                 </a:solidFill>
                 <a:latin typeface="Arial"/>
               </a:rPr>
-              <a:t>ON.Browser - Agentic Browser        </a:t>
+              <a:t>Vela Scan - Agent-Readiness Crawl        </a:t>
             </a:r>
           </a:p>
         </p:txBody>
@@ -7297,7 +7297,7 @@
                 </a:solidFill>
                 <a:latin typeface="Arial"/>
               </a:rPr>
-              <a:t>ON.Optima - AEO</a:t>
+              <a:t>Answer Engine Optimization</a:t>
             </a:r>
           </a:p>
         </p:txBody>
@@ -7499,7 +7499,7 @@
                 </a:solidFill>
                 <a:latin typeface="Arial"/>
               </a:rPr>
-              <a:t>ON.Optima - AEO</a:t>
+              <a:t>Answer Engine Optimization</a:t>
             </a:r>
           </a:p>
         </p:txBody>
@@ -7701,7 +7701,7 @@
                 </a:solidFill>
                 <a:latin typeface="Arial"/>
               </a:rPr>
-              <a:t>ON.E - Commerce</a:t>
+              <a:t>Commerce</a:t>
             </a:r>
           </a:p>
         </p:txBody>
@@ -8116,7 +8116,7 @@
                 </a:solidFill>
                 <a:latin typeface="Arial"/>
               </a:rPr>
-              <a:t xml:space="preserve">      FPT Corporation's public figures</a:t>
+              <a:t>      FPT Corporation's public figures</a:t>
             </a:r>
           </a:p>
         </p:txBody>
@@ -9309,7 +9309,7 @@
                 </a:solidFill>
                 <a:latin typeface="Arial"/>
               </a:rPr>
-              <a:t>Launch a new ON.Ecosystem agent in a click.</a:t>
+              <a:t>Launch a new Vela agent in a click.</a:t>
             </a:r>
           </a:p>
         </p:txBody>

--- a/public/downloads/Vela-OS-Demo-Deck.pptx
+++ b/public/downloads/Vela-OS-Demo-Deck.pptx
@@ -14,6 +14,7 @@
     <p:sldId id="262" r:id="rId13"/>
     <p:sldId id="263" r:id="rId14"/>
     <p:sldId id="264" r:id="rId15"/>
+    <p:sldId id="265" r:id="rId16"/>
   </p:sldIdLst>
   <p:sldSz cx="12191695" cy="6858000" type="screen4x3"/>
   <p:notesSz cx="6858000" cy="9144000"/>
@@ -3594,6 +3595,456 @@
 </p:sld>
 </file>
 
+<file path=ppt/slides/slide10.xml><?xml version="1.0" encoding="utf-8"?>
+<p:sld xmlns:a="http://schemas.openxmlformats.org/drawingml/2006/main" xmlns:p="http://schemas.openxmlformats.org/presentationml/2006/main" xmlns:r="http://schemas.openxmlformats.org/officeDocument/2006/relationships">
+  <p:cSld>
+    <p:spTree>
+      <p:nvGrpSpPr>
+        <p:cNvPr id="1" name=""/>
+        <p:cNvGrpSpPr/>
+        <p:nvPr/>
+      </p:nvGrpSpPr>
+      <p:grpSpPr/>
+      <p:sp>
+        <p:nvSpPr>
+          <p:cNvPr id="2" name="Rectangle 1"/>
+          <p:cNvSpPr/>
+          <p:nvPr/>
+        </p:nvSpPr>
+        <p:spPr>
+          <a:xfrm>
+            <a:off x="0" y="0"/>
+            <a:ext cx="12191695" cy="6858000"/>
+          </a:xfrm>
+          <a:prstGeom prst="rect">
+            <a:avLst/>
+          </a:prstGeom>
+          <a:solidFill>
+            <a:srgbClr val="0C0C13"/>
+          </a:solidFill>
+          <a:ln>
+            <a:noFill/>
+          </a:ln>
+          <a:effectLst/>
+        </p:spPr>
+        <p:style>
+          <a:lnRef idx="1">
+            <a:schemeClr val="accent1"/>
+          </a:lnRef>
+          <a:fillRef idx="3">
+            <a:schemeClr val="accent1"/>
+          </a:fillRef>
+          <a:effectRef idx="2">
+            <a:schemeClr val="accent1"/>
+          </a:effectRef>
+          <a:fontRef idx="minor">
+            <a:schemeClr val="lt1"/>
+          </a:fontRef>
+        </p:style>
+        <p:txBody>
+          <a:bodyPr rtlCol="0" anchor="ctr"/>
+          <a:lstStyle/>
+          <a:p>
+            <a:pPr algn="ctr"/>
+          </a:p>
+        </p:txBody>
+      </p:sp>
+      <p:sp>
+        <p:nvSpPr>
+          <p:cNvPr id="3" name="Rounded Rectangle 2"/>
+          <p:cNvSpPr/>
+          <p:nvPr/>
+        </p:nvSpPr>
+        <p:spPr>
+          <a:xfrm>
+            <a:off x="822960" y="2194560"/>
+            <a:ext cx="640080" cy="640080"/>
+          </a:xfrm>
+          <a:prstGeom prst="roundRect">
+            <a:avLst/>
+          </a:prstGeom>
+          <a:solidFill>
+            <a:srgbClr val="6366F1"/>
+          </a:solidFill>
+          <a:ln>
+            <a:noFill/>
+          </a:ln>
+          <a:effectLst/>
+        </p:spPr>
+        <p:style>
+          <a:lnRef idx="1">
+            <a:schemeClr val="accent1"/>
+          </a:lnRef>
+          <a:fillRef idx="3">
+            <a:schemeClr val="accent1"/>
+          </a:fillRef>
+          <a:effectRef idx="2">
+            <a:schemeClr val="accent1"/>
+          </a:effectRef>
+          <a:fontRef idx="minor">
+            <a:schemeClr val="lt1"/>
+          </a:fontRef>
+        </p:style>
+        <p:txBody>
+          <a:bodyPr rtlCol="0" anchor="ctr"/>
+          <a:lstStyle/>
+          <a:p>
+            <a:pPr algn="ctr"/>
+          </a:p>
+        </p:txBody>
+      </p:sp>
+      <p:sp>
+        <p:nvSpPr>
+          <p:cNvPr id="4" name="TextBox 3"/>
+          <p:cNvSpPr txBox="1"/>
+          <p:nvPr/>
+        </p:nvSpPr>
+        <p:spPr>
+          <a:xfrm>
+            <a:off x="822960" y="2176272"/>
+            <a:ext cx="640080" cy="640080"/>
+          </a:xfrm>
+          <a:prstGeom prst="rect">
+            <a:avLst/>
+          </a:prstGeom>
+          <a:noFill/>
+        </p:spPr>
+        <p:txBody>
+          <a:bodyPr wrap="square" anchor="ctr" lIns="0" rIns="0" tIns="0" bIns="0">
+            <a:spAutoFit/>
+          </a:bodyPr>
+          <a:lstStyle/>
+          <a:p>
+            <a:pPr algn="ctr">
+              <a:lnSpc>
+                <a:spcPct val="100000"/>
+              </a:lnSpc>
+            </a:pPr>
+            <a:r>
+              <a:rPr sz="2800" b="1">
+                <a:solidFill>
+                  <a:srgbClr val="F3F3F6"/>
+                </a:solidFill>
+                <a:latin typeface="Arial"/>
+              </a:rPr>
+              <a:t>V</a:t>
+            </a:r>
+          </a:p>
+        </p:txBody>
+      </p:sp>
+      <p:sp>
+        <p:nvSpPr>
+          <p:cNvPr id="5" name="TextBox 4"/>
+          <p:cNvSpPr txBox="1"/>
+          <p:nvPr/>
+        </p:nvSpPr>
+        <p:spPr>
+          <a:xfrm>
+            <a:off x="822960" y="3063240"/>
+            <a:ext cx="10515600" cy="914400"/>
+          </a:xfrm>
+          <a:prstGeom prst="rect">
+            <a:avLst/>
+          </a:prstGeom>
+          <a:noFill/>
+        </p:spPr>
+        <p:txBody>
+          <a:bodyPr wrap="square" anchor="t" lIns="0" rIns="0" tIns="0" bIns="0">
+            <a:spAutoFit/>
+          </a:bodyPr>
+          <a:lstStyle/>
+          <a:p>
+            <a:pPr algn="l">
+              <a:lnSpc>
+                <a:spcPct val="100000"/>
+              </a:lnSpc>
+            </a:pPr>
+            <a:r>
+              <a:rPr sz="4400" b="1">
+                <a:solidFill>
+                  <a:srgbClr val="F3F3F6"/>
+                </a:solidFill>
+                <a:latin typeface="Arial"/>
+              </a:rPr>
+              <a:t>See it live.</a:t>
+            </a:r>
+          </a:p>
+        </p:txBody>
+      </p:sp>
+      <p:sp>
+        <p:nvSpPr>
+          <p:cNvPr id="6" name="TextBox 5"/>
+          <p:cNvSpPr txBox="1"/>
+          <p:nvPr/>
+        </p:nvSpPr>
+        <p:spPr>
+          <a:xfrm>
+            <a:off x="822960" y="3977639"/>
+            <a:ext cx="10515600" cy="457200"/>
+          </a:xfrm>
+          <a:prstGeom prst="rect">
+            <a:avLst/>
+          </a:prstGeom>
+          <a:noFill/>
+        </p:spPr>
+        <p:txBody>
+          <a:bodyPr wrap="square" anchor="t" lIns="0" rIns="0" tIns="0" bIns="0">
+            <a:spAutoFit/>
+          </a:bodyPr>
+          <a:lstStyle/>
+          <a:p>
+            <a:pPr algn="l">
+              <a:lnSpc>
+                <a:spcPct val="100000"/>
+              </a:lnSpc>
+            </a:pPr>
+            <a:r>
+              <a:rPr sz="1600" b="0">
+                <a:solidFill>
+                  <a:srgbClr val="9C9CAA"/>
+                </a:solidFill>
+                <a:latin typeface="Arial"/>
+              </a:rPr>
+              <a:t>Interactive demo + customer portal, with live billing data.</a:t>
+            </a:r>
+          </a:p>
+        </p:txBody>
+      </p:sp>
+      <p:sp>
+        <p:nvSpPr>
+          <p:cNvPr id="7" name="Rounded Rectangle 6"/>
+          <p:cNvSpPr/>
+          <p:nvPr/>
+        </p:nvSpPr>
+        <p:spPr>
+          <a:xfrm>
+            <a:off x="822960" y="4663440"/>
+            <a:ext cx="5486400" cy="640080"/>
+          </a:xfrm>
+          <a:prstGeom prst="roundRect">
+            <a:avLst/>
+          </a:prstGeom>
+          <a:solidFill>
+            <a:srgbClr val="15151E"/>
+          </a:solidFill>
+          <a:ln w="12700">
+            <a:solidFill>
+              <a:srgbClr val="333344"/>
+            </a:solidFill>
+          </a:ln>
+          <a:effectLst/>
+        </p:spPr>
+        <p:style>
+          <a:lnRef idx="1">
+            <a:schemeClr val="accent1"/>
+          </a:lnRef>
+          <a:fillRef idx="3">
+            <a:schemeClr val="accent1"/>
+          </a:fillRef>
+          <a:effectRef idx="2">
+            <a:schemeClr val="accent1"/>
+          </a:effectRef>
+          <a:fontRef idx="minor">
+            <a:schemeClr val="lt1"/>
+          </a:fontRef>
+        </p:style>
+        <p:txBody>
+          <a:bodyPr rtlCol="0" anchor="ctr"/>
+          <a:lstStyle/>
+          <a:p>
+            <a:pPr algn="ctr"/>
+          </a:p>
+        </p:txBody>
+      </p:sp>
+      <p:sp>
+        <p:nvSpPr>
+          <p:cNvPr id="8" name="TextBox 7"/>
+          <p:cNvSpPr txBox="1"/>
+          <p:nvPr/>
+        </p:nvSpPr>
+        <p:spPr>
+          <a:xfrm>
+            <a:off x="1051560" y="4818888"/>
+            <a:ext cx="5120640" cy="365760"/>
+          </a:xfrm>
+          <a:prstGeom prst="rect">
+            <a:avLst/>
+          </a:prstGeom>
+          <a:noFill/>
+        </p:spPr>
+        <p:txBody>
+          <a:bodyPr wrap="square" anchor="t" lIns="0" rIns="0" tIns="0" bIns="0">
+            <a:spAutoFit/>
+          </a:bodyPr>
+          <a:lstStyle/>
+          <a:p>
+            <a:pPr algn="l">
+              <a:lnSpc>
+                <a:spcPct val="100000"/>
+              </a:lnSpc>
+            </a:pPr>
+            <a:r>
+              <a:rPr sz="1300" b="0">
+                <a:solidFill>
+                  <a:srgbClr val="6B6B77"/>
+                </a:solidFill>
+                <a:latin typeface="Arial"/>
+              </a:rPr>
+              <a:t>Demo:  </a:t>
+            </a:r>
+            <a:r>
+              <a:rPr sz="1300" b="1">
+                <a:solidFill>
+                  <a:srgbClr val="A5B4FC"/>
+                </a:solidFill>
+                <a:latin typeface="Arial"/>
+              </a:rPr>
+              <a:t>roai.emergedigital.ae</a:t>
+            </a:r>
+          </a:p>
+        </p:txBody>
+      </p:sp>
+      <p:sp>
+        <p:nvSpPr>
+          <p:cNvPr id="9" name="Rounded Rectangle 8"/>
+          <p:cNvSpPr/>
+          <p:nvPr/>
+        </p:nvSpPr>
+        <p:spPr>
+          <a:xfrm>
+            <a:off x="822960" y="5440680"/>
+            <a:ext cx="5486400" cy="640080"/>
+          </a:xfrm>
+          <a:prstGeom prst="roundRect">
+            <a:avLst/>
+          </a:prstGeom>
+          <a:solidFill>
+            <a:srgbClr val="15151E"/>
+          </a:solidFill>
+          <a:ln w="12700">
+            <a:solidFill>
+              <a:srgbClr val="333344"/>
+            </a:solidFill>
+          </a:ln>
+          <a:effectLst/>
+        </p:spPr>
+        <p:style>
+          <a:lnRef idx="1">
+            <a:schemeClr val="accent1"/>
+          </a:lnRef>
+          <a:fillRef idx="3">
+            <a:schemeClr val="accent1"/>
+          </a:fillRef>
+          <a:effectRef idx="2">
+            <a:schemeClr val="accent1"/>
+          </a:effectRef>
+          <a:fontRef idx="minor">
+            <a:schemeClr val="lt1"/>
+          </a:fontRef>
+        </p:style>
+        <p:txBody>
+          <a:bodyPr rtlCol="0" anchor="ctr"/>
+          <a:lstStyle/>
+          <a:p>
+            <a:pPr algn="ctr"/>
+          </a:p>
+        </p:txBody>
+      </p:sp>
+      <p:sp>
+        <p:nvSpPr>
+          <p:cNvPr id="10" name="TextBox 9"/>
+          <p:cNvSpPr txBox="1"/>
+          <p:nvPr/>
+        </p:nvSpPr>
+        <p:spPr>
+          <a:xfrm>
+            <a:off x="1051560" y="5596128"/>
+            <a:ext cx="5120640" cy="365760"/>
+          </a:xfrm>
+          <a:prstGeom prst="rect">
+            <a:avLst/>
+          </a:prstGeom>
+          <a:noFill/>
+        </p:spPr>
+        <p:txBody>
+          <a:bodyPr wrap="square" anchor="t" lIns="0" rIns="0" tIns="0" bIns="0">
+            <a:spAutoFit/>
+          </a:bodyPr>
+          <a:lstStyle/>
+          <a:p>
+            <a:pPr algn="l">
+              <a:lnSpc>
+                <a:spcPct val="100000"/>
+              </a:lnSpc>
+            </a:pPr>
+            <a:r>
+              <a:rPr sz="1300" b="0">
+                <a:solidFill>
+                  <a:srgbClr val="6B6B77"/>
+                </a:solidFill>
+                <a:latin typeface="Arial"/>
+              </a:rPr>
+              <a:t>Guide: </a:t>
+            </a:r>
+            <a:r>
+              <a:rPr sz="1300" b="1">
+                <a:solidFill>
+                  <a:srgbClr val="A5B4FC"/>
+                </a:solidFill>
+                <a:latin typeface="Arial"/>
+              </a:rPr>
+              <a:t>roai.emergedigital.ae/guide</a:t>
+            </a:r>
+          </a:p>
+        </p:txBody>
+      </p:sp>
+      <p:sp>
+        <p:nvSpPr>
+          <p:cNvPr id="11" name="TextBox 10"/>
+          <p:cNvSpPr txBox="1"/>
+          <p:nvPr/>
+        </p:nvSpPr>
+        <p:spPr>
+          <a:xfrm>
+            <a:off x="822960" y="6419088"/>
+            <a:ext cx="10515600" cy="274320"/>
+          </a:xfrm>
+          <a:prstGeom prst="rect">
+            <a:avLst/>
+          </a:prstGeom>
+          <a:noFill/>
+        </p:spPr>
+        <p:txBody>
+          <a:bodyPr wrap="square" anchor="t" lIns="0" rIns="0" tIns="0" bIns="0">
+            <a:spAutoFit/>
+          </a:bodyPr>
+          <a:lstStyle/>
+          <a:p>
+            <a:pPr algn="l">
+              <a:lnSpc>
+                <a:spcPct val="100000"/>
+              </a:lnSpc>
+            </a:pPr>
+            <a:r>
+              <a:rPr sz="1000" b="0">
+                <a:solidFill>
+                  <a:srgbClr val="6B6B77"/>
+                </a:solidFill>
+                <a:latin typeface="Arial"/>
+              </a:rPr>
+              <a:t>Built by Emerge Digital for an AI-native enterprise CX practice</a:t>
+            </a:r>
+          </a:p>
+        </p:txBody>
+      </p:sp>
+    </p:spTree>
+  </p:cSld>
+  <p:clrMapOvr>
+    <a:masterClrMapping/>
+  </p:clrMapOvr>
+</p:sld>
+</file>
+
 <file path=ppt/slides/slide2.xml><?xml version="1.0" encoding="utf-8"?>
 <p:sld xmlns:a="http://schemas.openxmlformats.org/drawingml/2006/main" xmlns:p="http://schemas.openxmlformats.org/presentationml/2006/main" xmlns:r="http://schemas.openxmlformats.org/officeDocument/2006/relationships">
   <p:cSld>
@@ -6056,7 +6507,7 @@
                 </a:solidFill>
                 <a:latin typeface="Arial"/>
               </a:rPr>
-              <a:t>THE DIFFERENTIATOR</a:t>
+              <a:t>BUY IT BY THE CALL</a:t>
             </a:r>
           </a:p>
         </p:txBody>
@@ -6095,7 +6546,7 @@
                 </a:solidFill>
                 <a:latin typeface="Arial"/>
               </a:rPr>
-              <a:t>Every engagement, measured in ROAI.</a:t>
+              <a:t>Every product, callable per request.</a:t>
             </a:r>
           </a:p>
         </p:txBody>
@@ -6108,8 +6559,8 @@
         </p:nvSpPr>
         <p:spPr>
           <a:xfrm>
-            <a:off x="822960" y="1828800"/>
-            <a:ext cx="4937760" cy="3474720"/>
+            <a:off x="822960" y="1783080"/>
+            <a:ext cx="10515600" cy="566928"/>
           </a:xfrm>
           <a:prstGeom prst="roundRect">
             <a:avLst/>
@@ -6154,235 +6605,809 @@
         </p:nvSpPr>
         <p:spPr>
           <a:xfrm>
-            <a:off x="1143000" y="2148840"/>
-            <a:ext cx="4297680" cy="274320"/>
-          </a:xfrm>
-          <a:prstGeom prst="rect">
-            <a:avLst/>
-          </a:prstGeom>
-          <a:noFill/>
-        </p:spPr>
-        <p:txBody>
-          <a:bodyPr wrap="square" anchor="t" lIns="0" rIns="0" tIns="0" bIns="0">
-            <a:spAutoFit/>
-          </a:bodyPr>
-          <a:lstStyle/>
-          <a:p>
-            <a:pPr algn="l">
-              <a:lnSpc>
-                <a:spcPct val="100000"/>
-              </a:lnSpc>
-            </a:pPr>
-            <a:r>
-              <a:rPr sz="1100" b="1">
+            <a:off x="1051560" y="1901952"/>
+            <a:ext cx="2377440" cy="329184"/>
+          </a:xfrm>
+          <a:prstGeom prst="rect">
+            <a:avLst/>
+          </a:prstGeom>
+          <a:noFill/>
+        </p:spPr>
+        <p:txBody>
+          <a:bodyPr wrap="square" anchor="t" lIns="0" rIns="0" tIns="0" bIns="0">
+            <a:spAutoFit/>
+          </a:bodyPr>
+          <a:lstStyle/>
+          <a:p>
+            <a:pPr algn="l">
+              <a:lnSpc>
+                <a:spcPct val="100000"/>
+              </a:lnSpc>
+            </a:pPr>
+            <a:r>
+              <a:rPr sz="1350" b="1">
+                <a:solidFill>
+                  <a:srgbClr val="F3F3F6"/>
+                </a:solidFill>
+                <a:latin typeface="Arial"/>
+              </a:rPr>
+              <a:t>Vela AEO</a:t>
+            </a:r>
+          </a:p>
+        </p:txBody>
+      </p:sp>
+      <p:sp>
+        <p:nvSpPr>
+          <p:cNvPr id="7" name="TextBox 6"/>
+          <p:cNvSpPr txBox="1"/>
+          <p:nvPr/>
+        </p:nvSpPr>
+        <p:spPr>
+          <a:xfrm>
+            <a:off x="3429000" y="1920240"/>
+            <a:ext cx="5120640" cy="329184"/>
+          </a:xfrm>
+          <a:prstGeom prst="rect">
+            <a:avLst/>
+          </a:prstGeom>
+          <a:noFill/>
+        </p:spPr>
+        <p:txBody>
+          <a:bodyPr wrap="square" anchor="t" lIns="0" rIns="0" tIns="0" bIns="0">
+            <a:spAutoFit/>
+          </a:bodyPr>
+          <a:lstStyle/>
+          <a:p>
+            <a:pPr algn="l">
+              <a:lnSpc>
+                <a:spcPct val="100000"/>
+              </a:lnSpc>
+            </a:pPr>
+            <a:r>
+              <a:rPr sz="1050" b="0">
+                <a:solidFill>
+                  <a:srgbClr val="9C9CAA"/>
+                </a:solidFill>
+                <a:latin typeface="Arial"/>
+              </a:rPr>
+              <a:t>GenAI-visibility rewrite + llms.txt block + Article/FAQ JSON-LD</a:t>
+            </a:r>
+          </a:p>
+        </p:txBody>
+      </p:sp>
+      <p:sp>
+        <p:nvSpPr>
+          <p:cNvPr id="8" name="TextBox 7"/>
+          <p:cNvSpPr txBox="1"/>
+          <p:nvPr/>
+        </p:nvSpPr>
+        <p:spPr>
+          <a:xfrm>
+            <a:off x="8595360" y="1901952"/>
+            <a:ext cx="2560320" cy="329184"/>
+          </a:xfrm>
+          <a:prstGeom prst="rect">
+            <a:avLst/>
+          </a:prstGeom>
+          <a:noFill/>
+        </p:spPr>
+        <p:txBody>
+          <a:bodyPr wrap="square" anchor="t" lIns="0" rIns="0" tIns="0" bIns="0">
+            <a:spAutoFit/>
+          </a:bodyPr>
+          <a:lstStyle/>
+          <a:p>
+            <a:pPr algn="r">
+              <a:lnSpc>
+                <a:spcPct val="100000"/>
+              </a:lnSpc>
+            </a:pPr>
+            <a:r>
+              <a:rPr sz="1300" b="1">
+                <a:solidFill>
+                  <a:srgbClr val="34D399"/>
+                </a:solidFill>
+                <a:latin typeface="Arial"/>
+              </a:rPr>
+              <a:t>$0.02 / request</a:t>
+            </a:r>
+          </a:p>
+        </p:txBody>
+      </p:sp>
+      <p:sp>
+        <p:nvSpPr>
+          <p:cNvPr id="9" name="Rounded Rectangle 8"/>
+          <p:cNvSpPr/>
+          <p:nvPr/>
+        </p:nvSpPr>
+        <p:spPr>
+          <a:xfrm>
+            <a:off x="822960" y="2459736"/>
+            <a:ext cx="10515600" cy="566928"/>
+          </a:xfrm>
+          <a:prstGeom prst="roundRect">
+            <a:avLst/>
+          </a:prstGeom>
+          <a:solidFill>
+            <a:srgbClr val="1B1B26"/>
+          </a:solidFill>
+          <a:ln w="12700">
+            <a:solidFill>
+              <a:srgbClr val="2A2A36"/>
+            </a:solidFill>
+          </a:ln>
+          <a:effectLst/>
+        </p:spPr>
+        <p:style>
+          <a:lnRef idx="1">
+            <a:schemeClr val="accent1"/>
+          </a:lnRef>
+          <a:fillRef idx="3">
+            <a:schemeClr val="accent1"/>
+          </a:fillRef>
+          <a:effectRef idx="2">
+            <a:schemeClr val="accent1"/>
+          </a:effectRef>
+          <a:fontRef idx="minor">
+            <a:schemeClr val="lt1"/>
+          </a:fontRef>
+        </p:style>
+        <p:txBody>
+          <a:bodyPr rtlCol="0" anchor="ctr"/>
+          <a:lstStyle/>
+          <a:p>
+            <a:pPr algn="ctr"/>
+          </a:p>
+        </p:txBody>
+      </p:sp>
+      <p:sp>
+        <p:nvSpPr>
+          <p:cNvPr id="10" name="TextBox 9"/>
+          <p:cNvSpPr txBox="1"/>
+          <p:nvPr/>
+        </p:nvSpPr>
+        <p:spPr>
+          <a:xfrm>
+            <a:off x="1051560" y="2578608"/>
+            <a:ext cx="2377440" cy="329184"/>
+          </a:xfrm>
+          <a:prstGeom prst="rect">
+            <a:avLst/>
+          </a:prstGeom>
+          <a:noFill/>
+        </p:spPr>
+        <p:txBody>
+          <a:bodyPr wrap="square" anchor="t" lIns="0" rIns="0" tIns="0" bIns="0">
+            <a:spAutoFit/>
+          </a:bodyPr>
+          <a:lstStyle/>
+          <a:p>
+            <a:pPr algn="l">
+              <a:lnSpc>
+                <a:spcPct val="100000"/>
+              </a:lnSpc>
+            </a:pPr>
+            <a:r>
+              <a:rPr sz="1350" b="1">
+                <a:solidFill>
+                  <a:srgbClr val="F3F3F6"/>
+                </a:solidFill>
+                <a:latin typeface="Arial"/>
+              </a:rPr>
+              <a:t>Vela Assist</a:t>
+            </a:r>
+          </a:p>
+        </p:txBody>
+      </p:sp>
+      <p:sp>
+        <p:nvSpPr>
+          <p:cNvPr id="11" name="TextBox 10"/>
+          <p:cNvSpPr txBox="1"/>
+          <p:nvPr/>
+        </p:nvSpPr>
+        <p:spPr>
+          <a:xfrm>
+            <a:off x="3429000" y="2596896"/>
+            <a:ext cx="5120640" cy="329184"/>
+          </a:xfrm>
+          <a:prstGeom prst="rect">
+            <a:avLst/>
+          </a:prstGeom>
+          <a:noFill/>
+        </p:spPr>
+        <p:txBody>
+          <a:bodyPr wrap="square" anchor="t" lIns="0" rIns="0" tIns="0" bIns="0">
+            <a:spAutoFit/>
+          </a:bodyPr>
+          <a:lstStyle/>
+          <a:p>
+            <a:pPr algn="l">
+              <a:lnSpc>
+                <a:spcPct val="100000"/>
+              </a:lnSpc>
+            </a:pPr>
+            <a:r>
+              <a:rPr sz="1050" b="0">
+                <a:solidFill>
+                  <a:srgbClr val="9C9CAA"/>
+                </a:solidFill>
+                <a:latin typeface="Arial"/>
+              </a:rPr>
+              <a:t>Governed CX answer with a claims-to-verify list</a:t>
+            </a:r>
+          </a:p>
+        </p:txBody>
+      </p:sp>
+      <p:sp>
+        <p:nvSpPr>
+          <p:cNvPr id="12" name="TextBox 11"/>
+          <p:cNvSpPr txBox="1"/>
+          <p:nvPr/>
+        </p:nvSpPr>
+        <p:spPr>
+          <a:xfrm>
+            <a:off x="8595360" y="2578608"/>
+            <a:ext cx="2560320" cy="329184"/>
+          </a:xfrm>
+          <a:prstGeom prst="rect">
+            <a:avLst/>
+          </a:prstGeom>
+          <a:noFill/>
+        </p:spPr>
+        <p:txBody>
+          <a:bodyPr wrap="square" anchor="t" lIns="0" rIns="0" tIns="0" bIns="0">
+            <a:spAutoFit/>
+          </a:bodyPr>
+          <a:lstStyle/>
+          <a:p>
+            <a:pPr algn="r">
+              <a:lnSpc>
+                <a:spcPct val="100000"/>
+              </a:lnSpc>
+            </a:pPr>
+            <a:r>
+              <a:rPr sz="1300" b="1">
+                <a:solidFill>
+                  <a:srgbClr val="34D399"/>
+                </a:solidFill>
+                <a:latin typeface="Arial"/>
+              </a:rPr>
+              <a:t>$0.25 / session</a:t>
+            </a:r>
+          </a:p>
+        </p:txBody>
+      </p:sp>
+      <p:sp>
+        <p:nvSpPr>
+          <p:cNvPr id="13" name="Rounded Rectangle 12"/>
+          <p:cNvSpPr/>
+          <p:nvPr/>
+        </p:nvSpPr>
+        <p:spPr>
+          <a:xfrm>
+            <a:off x="822960" y="3136391"/>
+            <a:ext cx="10515600" cy="566928"/>
+          </a:xfrm>
+          <a:prstGeom prst="roundRect">
+            <a:avLst/>
+          </a:prstGeom>
+          <a:solidFill>
+            <a:srgbClr val="15151E"/>
+          </a:solidFill>
+          <a:ln w="12700">
+            <a:solidFill>
+              <a:srgbClr val="2A2A36"/>
+            </a:solidFill>
+          </a:ln>
+          <a:effectLst/>
+        </p:spPr>
+        <p:style>
+          <a:lnRef idx="1">
+            <a:schemeClr val="accent1"/>
+          </a:lnRef>
+          <a:fillRef idx="3">
+            <a:schemeClr val="accent1"/>
+          </a:fillRef>
+          <a:effectRef idx="2">
+            <a:schemeClr val="accent1"/>
+          </a:effectRef>
+          <a:fontRef idx="minor">
+            <a:schemeClr val="lt1"/>
+          </a:fontRef>
+        </p:style>
+        <p:txBody>
+          <a:bodyPr rtlCol="0" anchor="ctr"/>
+          <a:lstStyle/>
+          <a:p>
+            <a:pPr algn="ctr"/>
+          </a:p>
+        </p:txBody>
+      </p:sp>
+      <p:sp>
+        <p:nvSpPr>
+          <p:cNvPr id="14" name="TextBox 13"/>
+          <p:cNvSpPr txBox="1"/>
+          <p:nvPr/>
+        </p:nvSpPr>
+        <p:spPr>
+          <a:xfrm>
+            <a:off x="1051560" y="3255263"/>
+            <a:ext cx="2377440" cy="329184"/>
+          </a:xfrm>
+          <a:prstGeom prst="rect">
+            <a:avLst/>
+          </a:prstGeom>
+          <a:noFill/>
+        </p:spPr>
+        <p:txBody>
+          <a:bodyPr wrap="square" anchor="t" lIns="0" rIns="0" tIns="0" bIns="0">
+            <a:spAutoFit/>
+          </a:bodyPr>
+          <a:lstStyle/>
+          <a:p>
+            <a:pPr algn="l">
+              <a:lnSpc>
+                <a:spcPct val="100000"/>
+              </a:lnSpc>
+            </a:pPr>
+            <a:r>
+              <a:rPr sz="1350" b="1">
+                <a:solidFill>
+                  <a:srgbClr val="F3F3F6"/>
+                </a:solidFill>
+                <a:latin typeface="Arial"/>
+              </a:rPr>
+              <a:t>Vela Recs</a:t>
+            </a:r>
+          </a:p>
+        </p:txBody>
+      </p:sp>
+      <p:sp>
+        <p:nvSpPr>
+          <p:cNvPr id="15" name="TextBox 14"/>
+          <p:cNvSpPr txBox="1"/>
+          <p:nvPr/>
+        </p:nvSpPr>
+        <p:spPr>
+          <a:xfrm>
+            <a:off x="3429000" y="3273551"/>
+            <a:ext cx="5120640" cy="329184"/>
+          </a:xfrm>
+          <a:prstGeom prst="rect">
+            <a:avLst/>
+          </a:prstGeom>
+          <a:noFill/>
+        </p:spPr>
+        <p:txBody>
+          <a:bodyPr wrap="square" anchor="t" lIns="0" rIns="0" tIns="0" bIns="0">
+            <a:spAutoFit/>
+          </a:bodyPr>
+          <a:lstStyle/>
+          <a:p>
+            <a:pPr algn="l">
+              <a:lnSpc>
+                <a:spcPct val="100000"/>
+              </a:lnSpc>
+            </a:pPr>
+            <a:r>
+              <a:rPr sz="1050" b="0">
+                <a:solidFill>
+                  <a:srgbClr val="9C9CAA"/>
+                </a:solidFill>
+                <a:latin typeface="Arial"/>
+              </a:rPr>
+              <a:t>Top-N by real cosine similarity, model id and scores shown</a:t>
+            </a:r>
+          </a:p>
+        </p:txBody>
+      </p:sp>
+      <p:sp>
+        <p:nvSpPr>
+          <p:cNvPr id="16" name="TextBox 15"/>
+          <p:cNvSpPr txBox="1"/>
+          <p:nvPr/>
+        </p:nvSpPr>
+        <p:spPr>
+          <a:xfrm>
+            <a:off x="8595360" y="3255263"/>
+            <a:ext cx="2560320" cy="329184"/>
+          </a:xfrm>
+          <a:prstGeom prst="rect">
+            <a:avLst/>
+          </a:prstGeom>
+          <a:noFill/>
+        </p:spPr>
+        <p:txBody>
+          <a:bodyPr wrap="square" anchor="t" lIns="0" rIns="0" tIns="0" bIns="0">
+            <a:spAutoFit/>
+          </a:bodyPr>
+          <a:lstStyle/>
+          <a:p>
+            <a:pPr algn="r">
+              <a:lnSpc>
+                <a:spcPct val="100000"/>
+              </a:lnSpc>
+            </a:pPr>
+            <a:r>
+              <a:rPr sz="1300" b="1">
+                <a:solidFill>
+                  <a:srgbClr val="34D399"/>
+                </a:solidFill>
+                <a:latin typeface="Arial"/>
+              </a:rPr>
+              <a:t>$0.10 / recommendation</a:t>
+            </a:r>
+          </a:p>
+        </p:txBody>
+      </p:sp>
+      <p:sp>
+        <p:nvSpPr>
+          <p:cNvPr id="17" name="Rounded Rectangle 16"/>
+          <p:cNvSpPr/>
+          <p:nvPr/>
+        </p:nvSpPr>
+        <p:spPr>
+          <a:xfrm>
+            <a:off x="822960" y="3813048"/>
+            <a:ext cx="10515600" cy="566928"/>
+          </a:xfrm>
+          <a:prstGeom prst="roundRect">
+            <a:avLst/>
+          </a:prstGeom>
+          <a:solidFill>
+            <a:srgbClr val="1B1B26"/>
+          </a:solidFill>
+          <a:ln w="12700">
+            <a:solidFill>
+              <a:srgbClr val="2A2A36"/>
+            </a:solidFill>
+          </a:ln>
+          <a:effectLst/>
+        </p:spPr>
+        <p:style>
+          <a:lnRef idx="1">
+            <a:schemeClr val="accent1"/>
+          </a:lnRef>
+          <a:fillRef idx="3">
+            <a:schemeClr val="accent1"/>
+          </a:fillRef>
+          <a:effectRef idx="2">
+            <a:schemeClr val="accent1"/>
+          </a:effectRef>
+          <a:fontRef idx="minor">
+            <a:schemeClr val="lt1"/>
+          </a:fontRef>
+        </p:style>
+        <p:txBody>
+          <a:bodyPr rtlCol="0" anchor="ctr"/>
+          <a:lstStyle/>
+          <a:p>
+            <a:pPr algn="ctr"/>
+          </a:p>
+        </p:txBody>
+      </p:sp>
+      <p:sp>
+        <p:nvSpPr>
+          <p:cNvPr id="18" name="TextBox 17"/>
+          <p:cNvSpPr txBox="1"/>
+          <p:nvPr/>
+        </p:nvSpPr>
+        <p:spPr>
+          <a:xfrm>
+            <a:off x="1051560" y="3931920"/>
+            <a:ext cx="2377440" cy="329184"/>
+          </a:xfrm>
+          <a:prstGeom prst="rect">
+            <a:avLst/>
+          </a:prstGeom>
+          <a:noFill/>
+        </p:spPr>
+        <p:txBody>
+          <a:bodyPr wrap="square" anchor="t" lIns="0" rIns="0" tIns="0" bIns="0">
+            <a:spAutoFit/>
+          </a:bodyPr>
+          <a:lstStyle/>
+          <a:p>
+            <a:pPr algn="l">
+              <a:lnSpc>
+                <a:spcPct val="100000"/>
+              </a:lnSpc>
+            </a:pPr>
+            <a:r>
+              <a:rPr sz="1350" b="1">
+                <a:solidFill>
+                  <a:srgbClr val="F3F3F6"/>
+                </a:solidFill>
+                <a:latin typeface="Arial"/>
+              </a:rPr>
+              <a:t>Vela Commerce</a:t>
+            </a:r>
+          </a:p>
+        </p:txBody>
+      </p:sp>
+      <p:sp>
+        <p:nvSpPr>
+          <p:cNvPr id="19" name="TextBox 18"/>
+          <p:cNvSpPr txBox="1"/>
+          <p:nvPr/>
+        </p:nvSpPr>
+        <p:spPr>
+          <a:xfrm>
+            <a:off x="3429000" y="3950208"/>
+            <a:ext cx="5120640" cy="329184"/>
+          </a:xfrm>
+          <a:prstGeom prst="rect">
+            <a:avLst/>
+          </a:prstGeom>
+          <a:noFill/>
+        </p:spPr>
+        <p:txBody>
+          <a:bodyPr wrap="square" anchor="t" lIns="0" rIns="0" tIns="0" bIns="0">
+            <a:spAutoFit/>
+          </a:bodyPr>
+          <a:lstStyle/>
+          <a:p>
+            <a:pPr algn="l">
+              <a:lnSpc>
+                <a:spcPct val="100000"/>
+              </a:lnSpc>
+            </a:pPr>
+            <a:r>
+              <a:rPr sz="1050" b="0">
+                <a:solidFill>
+                  <a:srgbClr val="9C9CAA"/>
+                </a:solidFill>
+                <a:latin typeface="Arial"/>
+              </a:rPr>
+              <a:t>Feed item validated to the GTIN check digit, then JSON-LD</a:t>
+            </a:r>
+          </a:p>
+        </p:txBody>
+      </p:sp>
+      <p:sp>
+        <p:nvSpPr>
+          <p:cNvPr id="20" name="TextBox 19"/>
+          <p:cNvSpPr txBox="1"/>
+          <p:nvPr/>
+        </p:nvSpPr>
+        <p:spPr>
+          <a:xfrm>
+            <a:off x="8595360" y="3931920"/>
+            <a:ext cx="2560320" cy="329184"/>
+          </a:xfrm>
+          <a:prstGeom prst="rect">
+            <a:avLst/>
+          </a:prstGeom>
+          <a:noFill/>
+        </p:spPr>
+        <p:txBody>
+          <a:bodyPr wrap="square" anchor="t" lIns="0" rIns="0" tIns="0" bIns="0">
+            <a:spAutoFit/>
+          </a:bodyPr>
+          <a:lstStyle/>
+          <a:p>
+            <a:pPr algn="r">
+              <a:lnSpc>
+                <a:spcPct val="100000"/>
+              </a:lnSpc>
+            </a:pPr>
+            <a:r>
+              <a:rPr sz="1300" b="1">
+                <a:solidFill>
+                  <a:srgbClr val="34D399"/>
+                </a:solidFill>
+                <a:latin typeface="Arial"/>
+              </a:rPr>
+              <a:t>$0.03 / API call</a:t>
+            </a:r>
+          </a:p>
+        </p:txBody>
+      </p:sp>
+      <p:sp>
+        <p:nvSpPr>
+          <p:cNvPr id="21" name="Rounded Rectangle 20"/>
+          <p:cNvSpPr/>
+          <p:nvPr/>
+        </p:nvSpPr>
+        <p:spPr>
+          <a:xfrm>
+            <a:off x="822960" y="4489704"/>
+            <a:ext cx="10515600" cy="566928"/>
+          </a:xfrm>
+          <a:prstGeom prst="roundRect">
+            <a:avLst/>
+          </a:prstGeom>
+          <a:solidFill>
+            <a:srgbClr val="15151E"/>
+          </a:solidFill>
+          <a:ln w="12700">
+            <a:solidFill>
+              <a:srgbClr val="2A2A36"/>
+            </a:solidFill>
+          </a:ln>
+          <a:effectLst/>
+        </p:spPr>
+        <p:style>
+          <a:lnRef idx="1">
+            <a:schemeClr val="accent1"/>
+          </a:lnRef>
+          <a:fillRef idx="3">
+            <a:schemeClr val="accent1"/>
+          </a:fillRef>
+          <a:effectRef idx="2">
+            <a:schemeClr val="accent1"/>
+          </a:effectRef>
+          <a:fontRef idx="minor">
+            <a:schemeClr val="lt1"/>
+          </a:fontRef>
+        </p:style>
+        <p:txBody>
+          <a:bodyPr rtlCol="0" anchor="ctr"/>
+          <a:lstStyle/>
+          <a:p>
+            <a:pPr algn="ctr"/>
+          </a:p>
+        </p:txBody>
+      </p:sp>
+      <p:sp>
+        <p:nvSpPr>
+          <p:cNvPr id="22" name="TextBox 21"/>
+          <p:cNvSpPr txBox="1"/>
+          <p:nvPr/>
+        </p:nvSpPr>
+        <p:spPr>
+          <a:xfrm>
+            <a:off x="1051560" y="4608576"/>
+            <a:ext cx="2377440" cy="329184"/>
+          </a:xfrm>
+          <a:prstGeom prst="rect">
+            <a:avLst/>
+          </a:prstGeom>
+          <a:noFill/>
+        </p:spPr>
+        <p:txBody>
+          <a:bodyPr wrap="square" anchor="t" lIns="0" rIns="0" tIns="0" bIns="0">
+            <a:spAutoFit/>
+          </a:bodyPr>
+          <a:lstStyle/>
+          <a:p>
+            <a:pPr algn="l">
+              <a:lnSpc>
+                <a:spcPct val="100000"/>
+              </a:lnSpc>
+            </a:pPr>
+            <a:r>
+              <a:rPr sz="1350" b="1">
+                <a:solidFill>
+                  <a:srgbClr val="F3F3F6"/>
+                </a:solidFill>
+                <a:latin typeface="Arial"/>
+              </a:rPr>
+              <a:t>Vela Scan</a:t>
+            </a:r>
+          </a:p>
+        </p:txBody>
+      </p:sp>
+      <p:sp>
+        <p:nvSpPr>
+          <p:cNvPr id="23" name="TextBox 22"/>
+          <p:cNvSpPr txBox="1"/>
+          <p:nvPr/>
+        </p:nvSpPr>
+        <p:spPr>
+          <a:xfrm>
+            <a:off x="3429000" y="4626864"/>
+            <a:ext cx="5120640" cy="329184"/>
+          </a:xfrm>
+          <a:prstGeom prst="rect">
+            <a:avLst/>
+          </a:prstGeom>
+          <a:noFill/>
+        </p:spPr>
+        <p:txBody>
+          <a:bodyPr wrap="square" anchor="t" lIns="0" rIns="0" tIns="0" bIns="0">
+            <a:spAutoFit/>
+          </a:bodyPr>
+          <a:lstStyle/>
+          <a:p>
+            <a:pPr algn="l">
+              <a:lnSpc>
+                <a:spcPct val="100000"/>
+              </a:lnSpc>
+            </a:pPr>
+            <a:r>
+              <a:rPr sz="1050" b="0">
+                <a:solidFill>
+                  <a:srgbClr val="9C9CAA"/>
+                </a:solidFill>
+                <a:latin typeface="Arial"/>
+              </a:rPr>
+              <a:t>Agent-readiness crawl: crawler rules, llms.txt, x402, MCP</a:t>
+            </a:r>
+          </a:p>
+        </p:txBody>
+      </p:sp>
+      <p:sp>
+        <p:nvSpPr>
+          <p:cNvPr id="24" name="TextBox 23"/>
+          <p:cNvSpPr txBox="1"/>
+          <p:nvPr/>
+        </p:nvSpPr>
+        <p:spPr>
+          <a:xfrm>
+            <a:off x="8595360" y="4608576"/>
+            <a:ext cx="2560320" cy="329184"/>
+          </a:xfrm>
+          <a:prstGeom prst="rect">
+            <a:avLst/>
+          </a:prstGeom>
+          <a:noFill/>
+        </p:spPr>
+        <p:txBody>
+          <a:bodyPr wrap="square" anchor="t" lIns="0" rIns="0" tIns="0" bIns="0">
+            <a:spAutoFit/>
+          </a:bodyPr>
+          <a:lstStyle/>
+          <a:p>
+            <a:pPr algn="r">
+              <a:lnSpc>
+                <a:spcPct val="100000"/>
+              </a:lnSpc>
+            </a:pPr>
+            <a:r>
+              <a:rPr sz="1300" b="1">
+                <a:solidFill>
+                  <a:srgbClr val="34D399"/>
+                </a:solidFill>
+                <a:latin typeface="Arial"/>
+              </a:rPr>
+              <a:t>$0.05 / scan</a:t>
+            </a:r>
+          </a:p>
+        </p:txBody>
+      </p:sp>
+      <p:sp>
+        <p:nvSpPr>
+          <p:cNvPr id="25" name="TextBox 24"/>
+          <p:cNvSpPr txBox="1"/>
+          <p:nvPr/>
+        </p:nvSpPr>
+        <p:spPr>
+          <a:xfrm>
+            <a:off x="822960" y="5285232"/>
+            <a:ext cx="10515600" cy="731520"/>
+          </a:xfrm>
+          <a:prstGeom prst="rect">
+            <a:avLst/>
+          </a:prstGeom>
+          <a:noFill/>
+        </p:spPr>
+        <p:txBody>
+          <a:bodyPr wrap="square" anchor="t" lIns="0" rIns="0" tIns="0" bIns="0">
+            <a:spAutoFit/>
+          </a:bodyPr>
+          <a:lstStyle/>
+          <a:p>
+            <a:pPr algn="l">
+              <a:lnSpc>
+                <a:spcPct val="125000"/>
+              </a:lnSpc>
+            </a:pPr>
+            <a:r>
+              <a:rPr sz="1050" b="0">
                 <a:solidFill>
                   <a:srgbClr val="6B6B77"/>
                 </a:solidFill>
                 <a:latin typeface="Arial"/>
               </a:rPr>
-              <a:t>EXAMPLE CLIENT - BLENDED ROAI</a:t>
-            </a:r>
-          </a:p>
-        </p:txBody>
-      </p:sp>
-      <p:sp>
-        <p:nvSpPr>
-          <p:cNvPr id="7" name="TextBox 6"/>
-          <p:cNvSpPr txBox="1"/>
-          <p:nvPr/>
-        </p:nvSpPr>
-        <p:spPr>
-          <a:xfrm>
-            <a:off x="1143000" y="2514600"/>
-            <a:ext cx="4297680" cy="1188720"/>
-          </a:xfrm>
-          <a:prstGeom prst="rect">
-            <a:avLst/>
-          </a:prstGeom>
-          <a:noFill/>
-        </p:spPr>
-        <p:txBody>
-          <a:bodyPr wrap="square" anchor="t" lIns="0" rIns="0" tIns="0" bIns="0">
-            <a:spAutoFit/>
-          </a:bodyPr>
-          <a:lstStyle/>
-          <a:p>
-            <a:pPr algn="l">
-              <a:lnSpc>
-                <a:spcPct val="100000"/>
-              </a:lnSpc>
-            </a:pPr>
-            <a:r>
-              <a:rPr sz="7000" b="1">
-                <a:solidFill>
-                  <a:srgbClr val="34D399"/>
-                </a:solidFill>
-                <a:latin typeface="Arial"/>
-              </a:rPr>
-              <a:t>5.4x</a:t>
-            </a:r>
-          </a:p>
-        </p:txBody>
-      </p:sp>
-      <p:sp>
-        <p:nvSpPr>
-          <p:cNvPr id="8" name="TextBox 7"/>
-          <p:cNvSpPr txBox="1"/>
-          <p:nvPr/>
-        </p:nvSpPr>
-        <p:spPr>
-          <a:xfrm>
-            <a:off x="1143000" y="3840480"/>
-            <a:ext cx="4297680" cy="548640"/>
-          </a:xfrm>
-          <a:prstGeom prst="rect">
-            <a:avLst/>
-          </a:prstGeom>
-          <a:noFill/>
-        </p:spPr>
-        <p:txBody>
-          <a:bodyPr wrap="square" anchor="t" lIns="0" rIns="0" tIns="0" bIns="0">
-            <a:spAutoFit/>
-          </a:bodyPr>
-          <a:lstStyle/>
-          <a:p>
-            <a:pPr algn="l">
-              <a:lnSpc>
-                <a:spcPct val="110000"/>
-              </a:lnSpc>
-            </a:pPr>
-            <a:r>
-              <a:rPr sz="1300" b="0">
-                <a:solidFill>
-                  <a:srgbClr val="9C9CAA"/>
-                </a:solidFill>
-                <a:latin typeface="Arial"/>
-              </a:rPr>
-              <a:t>$1 invested  -&gt;  $5.40 of measured value returned</a:t>
-            </a:r>
-          </a:p>
-        </p:txBody>
-      </p:sp>
-      <p:sp>
-        <p:nvSpPr>
-          <p:cNvPr id="9" name="TextBox 8"/>
-          <p:cNvSpPr txBox="1"/>
-          <p:nvPr/>
-        </p:nvSpPr>
-        <p:spPr>
-          <a:xfrm>
-            <a:off x="6126480" y="2011680"/>
-            <a:ext cx="5212080" cy="822960"/>
-          </a:xfrm>
-          <a:prstGeom prst="rect">
-            <a:avLst/>
-          </a:prstGeom>
-          <a:noFill/>
-        </p:spPr>
-        <p:txBody>
-          <a:bodyPr wrap="square" anchor="t" lIns="0" rIns="0" tIns="0" bIns="0">
-            <a:spAutoFit/>
-          </a:bodyPr>
-          <a:lstStyle/>
-          <a:p>
-            <a:pPr algn="l">
-              <a:lnSpc>
-                <a:spcPct val="100000"/>
-              </a:lnSpc>
-            </a:pPr>
-            <a:r>
-              <a:rPr sz="1700" b="1">
-                <a:solidFill>
-                  <a:srgbClr val="F3F3F6"/>
-                </a:solidFill>
-                <a:latin typeface="Arial"/>
-              </a:rPr>
-              <a:t>ROAI = (Value delivered - AI cost) / AI cost</a:t>
-            </a:r>
-          </a:p>
-        </p:txBody>
-      </p:sp>
-      <p:sp>
-        <p:nvSpPr>
-          <p:cNvPr id="10" name="TextBox 9"/>
-          <p:cNvSpPr txBox="1"/>
-          <p:nvPr/>
-        </p:nvSpPr>
-        <p:spPr>
-          <a:xfrm>
-            <a:off x="6126480" y="2743200"/>
-            <a:ext cx="5212080" cy="548640"/>
-          </a:xfrm>
-          <a:prstGeom prst="rect">
-            <a:avLst/>
-          </a:prstGeom>
-          <a:noFill/>
-        </p:spPr>
-        <p:txBody>
-          <a:bodyPr wrap="square" anchor="t" lIns="0" rIns="0" tIns="0" bIns="0">
-            <a:spAutoFit/>
-          </a:bodyPr>
-          <a:lstStyle/>
-          <a:p>
-            <a:pPr algn="l">
-              <a:lnSpc>
-                <a:spcPct val="110000"/>
-              </a:lnSpc>
-            </a:pPr>
-            <a:r>
-              <a:rPr sz="1300" b="0">
-                <a:solidFill>
-                  <a:srgbClr val="9C9CAA"/>
-                </a:solidFill>
-                <a:latin typeface="Arial"/>
-              </a:rPr>
-              <a:t>Value = hours saved + revenue uplift, measured per engagement.</a:t>
-            </a:r>
-          </a:p>
-        </p:txBody>
-      </p:sp>
-      <p:sp>
-        <p:nvSpPr>
-          <p:cNvPr id="11" name="TextBox 10"/>
-          <p:cNvSpPr txBox="1"/>
-          <p:nvPr/>
-        </p:nvSpPr>
-        <p:spPr>
-          <a:xfrm>
-            <a:off x="6126480" y="3566160"/>
-            <a:ext cx="5212080" cy="1645920"/>
-          </a:xfrm>
-          <a:prstGeom prst="rect">
-            <a:avLst/>
-          </a:prstGeom>
-          <a:noFill/>
-        </p:spPr>
-        <p:txBody>
-          <a:bodyPr wrap="square" anchor="t" lIns="0" rIns="0" tIns="0" bIns="0">
-            <a:spAutoFit/>
-          </a:bodyPr>
-          <a:lstStyle/>
-          <a:p>
-            <a:pPr algn="l">
-              <a:lnSpc>
-                <a:spcPct val="115000"/>
-              </a:lnSpc>
-            </a:pPr>
-            <a:r>
-              <a:rPr sz="1400" b="0">
-                <a:solidFill>
-                  <a:srgbClr val="9C9CAA"/>
-                </a:solidFill>
-                <a:latin typeface="Arial"/>
-              </a:rPr>
-              <a:t>The practice and the client always see the same source of truth - so renewals and expansion become a data conversation, not a debate.</a:t>
-            </a:r>
-          </a:p>
-        </p:txBody>
-      </p:sp>
-      <p:sp>
-        <p:nvSpPr>
-          <p:cNvPr id="12" name="TextBox 11"/>
+              <a:t>Settles in XRP or RLUSD over the x402 protocol on the XRP Ledger - usage metered in Metronome - no account, no contract, no sales call. Catalogue at agent-commerce.emergedigital.com/.well-known/x402</a:t>
+            </a:r>
+          </a:p>
+        </p:txBody>
+      </p:sp>
+      <p:sp>
+        <p:nvSpPr>
+          <p:cNvPr id="26" name="TextBox 25"/>
           <p:cNvSpPr txBox="1"/>
           <p:nvPr/>
         </p:nvSpPr>
@@ -6430,7 +7455,7 @@
       </p:sp>
       <p:sp>
         <p:nvSpPr>
-          <p:cNvPr id="13" name="TextBox 12"/>
+          <p:cNvPr id="27" name="TextBox 26"/>
           <p:cNvSpPr txBox="1"/>
           <p:nvPr/>
         </p:nvSpPr>
@@ -6563,7 +7588,7 @@
                 </a:solidFill>
                 <a:latin typeface="Arial"/>
               </a:rPr>
-              <a:t>NOT A MOCKUP</a:t>
+              <a:t>THE DIFFERENTIATOR</a:t>
             </a:r>
           </a:p>
         </p:txBody>
@@ -6602,60 +7627,21 @@
                 </a:solidFill>
                 <a:latin typeface="Arial"/>
               </a:rPr>
-              <a:t>Live usage-based billing, wired to Metronome.</a:t>
-            </a:r>
-          </a:p>
-        </p:txBody>
-      </p:sp>
-      <p:sp>
-        <p:nvSpPr>
-          <p:cNvPr id="5" name="TextBox 4"/>
-          <p:cNvSpPr txBox="1"/>
-          <p:nvPr/>
-        </p:nvSpPr>
-        <p:spPr>
-          <a:xfrm>
-            <a:off x="822960" y="1600200"/>
-            <a:ext cx="10424160" cy="640080"/>
-          </a:xfrm>
-          <a:prstGeom prst="rect">
-            <a:avLst/>
-          </a:prstGeom>
-          <a:noFill/>
-        </p:spPr>
-        <p:txBody>
-          <a:bodyPr wrap="square" anchor="t" lIns="0" rIns="0" tIns="0" bIns="0">
-            <a:spAutoFit/>
-          </a:bodyPr>
-          <a:lstStyle/>
-          <a:p>
-            <a:pPr algn="l">
-              <a:lnSpc>
-                <a:spcPct val="110000"/>
-              </a:lnSpc>
-            </a:pPr>
-            <a:r>
-              <a:rPr sz="1400" b="0">
-                <a:solidFill>
-                  <a:srgbClr val="9C9CAA"/>
-                </a:solidFill>
-                <a:latin typeface="Arial"/>
-              </a:rPr>
-              <a:t>The Billing -&gt; Live panel reads a real Metronome account through a secure, read-only proxy - the API key never reaches the browser.</a:t>
-            </a:r>
-          </a:p>
-        </p:txBody>
-      </p:sp>
-      <p:sp>
-        <p:nvSpPr>
-          <p:cNvPr id="6" name="Rounded Rectangle 5"/>
+              <a:t>Every engagement, measured in ROAI.</a:t>
+            </a:r>
+          </a:p>
+        </p:txBody>
+      </p:sp>
+      <p:sp>
+        <p:nvSpPr>
+          <p:cNvPr id="5" name="Rounded Rectangle 4"/>
           <p:cNvSpPr/>
           <p:nvPr/>
         </p:nvSpPr>
         <p:spPr>
           <a:xfrm>
-            <a:off x="822960" y="2468880"/>
-            <a:ext cx="5212080" cy="3200400"/>
+            <a:off x="822960" y="1828800"/>
+            <a:ext cx="4937760" cy="3474720"/>
           </a:xfrm>
           <a:prstGeom prst="roundRect">
             <a:avLst/>
@@ -6694,39 +7680,78 @@
       </p:sp>
       <p:sp>
         <p:nvSpPr>
+          <p:cNvPr id="6" name="TextBox 5"/>
+          <p:cNvSpPr txBox="1"/>
+          <p:nvPr/>
+        </p:nvSpPr>
+        <p:spPr>
+          <a:xfrm>
+            <a:off x="1143000" y="2148840"/>
+            <a:ext cx="4297680" cy="274320"/>
+          </a:xfrm>
+          <a:prstGeom prst="rect">
+            <a:avLst/>
+          </a:prstGeom>
+          <a:noFill/>
+        </p:spPr>
+        <p:txBody>
+          <a:bodyPr wrap="square" anchor="t" lIns="0" rIns="0" tIns="0" bIns="0">
+            <a:spAutoFit/>
+          </a:bodyPr>
+          <a:lstStyle/>
+          <a:p>
+            <a:pPr algn="l">
+              <a:lnSpc>
+                <a:spcPct val="100000"/>
+              </a:lnSpc>
+            </a:pPr>
+            <a:r>
+              <a:rPr sz="1100" b="1">
+                <a:solidFill>
+                  <a:srgbClr val="6B6B77"/>
+                </a:solidFill>
+                <a:latin typeface="Arial"/>
+              </a:rPr>
+              <a:t>EXAMPLE CLIENT - BLENDED ROAI</a:t>
+            </a:r>
+          </a:p>
+        </p:txBody>
+      </p:sp>
+      <p:sp>
+        <p:nvSpPr>
           <p:cNvPr id="7" name="TextBox 6"/>
           <p:cNvSpPr txBox="1"/>
           <p:nvPr/>
         </p:nvSpPr>
         <p:spPr>
           <a:xfrm>
-            <a:off x="1188720" y="2743200"/>
-            <a:ext cx="4572000" cy="274320"/>
-          </a:xfrm>
-          <a:prstGeom prst="rect">
-            <a:avLst/>
-          </a:prstGeom>
-          <a:noFill/>
-        </p:spPr>
-        <p:txBody>
-          <a:bodyPr wrap="square" anchor="t" lIns="0" rIns="0" tIns="0" bIns="0">
-            <a:spAutoFit/>
-          </a:bodyPr>
-          <a:lstStyle/>
-          <a:p>
-            <a:pPr algn="l">
-              <a:lnSpc>
-                <a:spcPct val="100000"/>
-              </a:lnSpc>
-            </a:pPr>
-            <a:r>
-              <a:rPr sz="1100" b="1">
-                <a:solidFill>
-                  <a:srgbClr val="A5B4FC"/>
-                </a:solidFill>
-                <a:latin typeface="Arial"/>
-              </a:rPr>
-              <a:t>WHAT'S LIVE</a:t>
+            <a:off x="1143000" y="2514600"/>
+            <a:ext cx="4297680" cy="1188720"/>
+          </a:xfrm>
+          <a:prstGeom prst="rect">
+            <a:avLst/>
+          </a:prstGeom>
+          <a:noFill/>
+        </p:spPr>
+        <p:txBody>
+          <a:bodyPr wrap="square" anchor="t" lIns="0" rIns="0" tIns="0" bIns="0">
+            <a:spAutoFit/>
+          </a:bodyPr>
+          <a:lstStyle/>
+          <a:p>
+            <a:pPr algn="l">
+              <a:lnSpc>
+                <a:spcPct val="100000"/>
+              </a:lnSpc>
+            </a:pPr>
+            <a:r>
+              <a:rPr sz="7000" b="1">
+                <a:solidFill>
+                  <a:srgbClr val="34D399"/>
+                </a:solidFill>
+                <a:latin typeface="Arial"/>
+              </a:rPr>
+              <a:t>5.4x</a:t>
             </a:r>
           </a:p>
         </p:txBody>
@@ -6739,23 +7764,23 @@
         </p:nvSpPr>
         <p:spPr>
           <a:xfrm>
-            <a:off x="1188720" y="3154680"/>
-            <a:ext cx="4572000" cy="2377440"/>
-          </a:xfrm>
-          <a:prstGeom prst="rect">
-            <a:avLst/>
-          </a:prstGeom>
-          <a:noFill/>
-        </p:spPr>
-        <p:txBody>
-          <a:bodyPr wrap="square" anchor="t" lIns="0" rIns="0" tIns="0" bIns="0">
-            <a:spAutoFit/>
-          </a:bodyPr>
-          <a:lstStyle/>
-          <a:p>
-            <a:pPr algn="l">
-              <a:lnSpc>
-                <a:spcPct val="150000"/>
+            <a:off x="1143000" y="3840480"/>
+            <a:ext cx="4297680" cy="548640"/>
+          </a:xfrm>
+          <a:prstGeom prst="rect">
+            <a:avLst/>
+          </a:prstGeom>
+          <a:noFill/>
+        </p:spPr>
+        <p:txBody>
+          <a:bodyPr wrap="square" anchor="t" lIns="0" rIns="0" tIns="0" bIns="0">
+            <a:spAutoFit/>
+          </a:bodyPr>
+          <a:lstStyle/>
+          <a:p>
+            <a:pPr algn="l">
+              <a:lnSpc>
+                <a:spcPct val="110000"/>
               </a:lnSpc>
             </a:pPr>
             <a:r>
@@ -6765,13 +7790,75 @@
                 </a:solidFill>
                 <a:latin typeface="Arial"/>
               </a:rPr>
-              <a:t>-  7 customers: prepaid-commit + hybrid models</a:t>
-            </a:r>
-          </a:p>
-          <a:p>
-            <a:pPr algn="l">
-              <a:lnSpc>
-                <a:spcPct val="150000"/>
+              <a:t>$1 invested  -&gt;  $5.40 of measured value returned</a:t>
+            </a:r>
+          </a:p>
+        </p:txBody>
+      </p:sp>
+      <p:sp>
+        <p:nvSpPr>
+          <p:cNvPr id="9" name="TextBox 8"/>
+          <p:cNvSpPr txBox="1"/>
+          <p:nvPr/>
+        </p:nvSpPr>
+        <p:spPr>
+          <a:xfrm>
+            <a:off x="6126480" y="2011680"/>
+            <a:ext cx="5212080" cy="822960"/>
+          </a:xfrm>
+          <a:prstGeom prst="rect">
+            <a:avLst/>
+          </a:prstGeom>
+          <a:noFill/>
+        </p:spPr>
+        <p:txBody>
+          <a:bodyPr wrap="square" anchor="t" lIns="0" rIns="0" tIns="0" bIns="0">
+            <a:spAutoFit/>
+          </a:bodyPr>
+          <a:lstStyle/>
+          <a:p>
+            <a:pPr algn="l">
+              <a:lnSpc>
+                <a:spcPct val="100000"/>
+              </a:lnSpc>
+            </a:pPr>
+            <a:r>
+              <a:rPr sz="1700" b="1">
+                <a:solidFill>
+                  <a:srgbClr val="F3F3F6"/>
+                </a:solidFill>
+                <a:latin typeface="Arial"/>
+              </a:rPr>
+              <a:t>ROAI = (Value delivered - AI cost) / AI cost</a:t>
+            </a:r>
+          </a:p>
+        </p:txBody>
+      </p:sp>
+      <p:sp>
+        <p:nvSpPr>
+          <p:cNvPr id="10" name="TextBox 9"/>
+          <p:cNvSpPr txBox="1"/>
+          <p:nvPr/>
+        </p:nvSpPr>
+        <p:spPr>
+          <a:xfrm>
+            <a:off x="6126480" y="2743200"/>
+            <a:ext cx="5212080" cy="548640"/>
+          </a:xfrm>
+          <a:prstGeom prst="rect">
+            <a:avLst/>
+          </a:prstGeom>
+          <a:noFill/>
+        </p:spPr>
+        <p:txBody>
+          <a:bodyPr wrap="square" anchor="t" lIns="0" rIns="0" tIns="0" bIns="0">
+            <a:spAutoFit/>
+          </a:bodyPr>
+          <a:lstStyle/>
+          <a:p>
+            <a:pPr algn="l">
+              <a:lnSpc>
+                <a:spcPct val="110000"/>
               </a:lnSpc>
             </a:pPr>
             <a:r>
@@ -6781,211 +7868,46 @@
                 </a:solidFill>
                 <a:latin typeface="Arial"/>
               </a:rPr>
-              <a:t>-  Finalized + draft invoices, 6 months history</a:t>
-            </a:r>
-          </a:p>
-          <a:p>
-            <a:pPr algn="l">
-              <a:lnSpc>
-                <a:spcPct val="150000"/>
-              </a:lnSpc>
-            </a:pPr>
-            <a:r>
-              <a:rPr sz="1300" b="0">
+              <a:t>Value = hours saved + revenue uplift, measured per engagement.</a:t>
+            </a:r>
+          </a:p>
+        </p:txBody>
+      </p:sp>
+      <p:sp>
+        <p:nvSpPr>
+          <p:cNvPr id="11" name="TextBox 10"/>
+          <p:cNvSpPr txBox="1"/>
+          <p:nvPr/>
+        </p:nvSpPr>
+        <p:spPr>
+          <a:xfrm>
+            <a:off x="6126480" y="3566160"/>
+            <a:ext cx="5212080" cy="1645920"/>
+          </a:xfrm>
+          <a:prstGeom prst="rect">
+            <a:avLst/>
+          </a:prstGeom>
+          <a:noFill/>
+        </p:spPr>
+        <p:txBody>
+          <a:bodyPr wrap="square" anchor="t" lIns="0" rIns="0" tIns="0" bIns="0">
+            <a:spAutoFit/>
+          </a:bodyPr>
+          <a:lstStyle/>
+          <a:p>
+            <a:pPr algn="l">
+              <a:lnSpc>
+                <a:spcPct val="115000"/>
+              </a:lnSpc>
+            </a:pPr>
+            <a:r>
+              <a:rPr sz="1400" b="0">
                 <a:solidFill>
                   <a:srgbClr val="9C9CAA"/>
                 </a:solidFill>
                 <a:latin typeface="Arial"/>
               </a:rPr>
-              <a:t>-  Commit/credit balances drawing down on usage</a:t>
-            </a:r>
-          </a:p>
-          <a:p>
-            <a:pPr algn="l">
-              <a:lnSpc>
-                <a:spcPct val="150000"/>
-              </a:lnSpc>
-            </a:pPr>
-            <a:r>
-              <a:rPr sz="1300" b="0">
-                <a:solidFill>
-                  <a:srgbClr val="9C9CAA"/>
-                </a:solidFill>
-                <a:latin typeface="Arial"/>
-              </a:rPr>
-              <a:t>-  Full catalog: metrics, products, rate cards, packages</a:t>
-            </a:r>
-          </a:p>
-        </p:txBody>
-      </p:sp>
-      <p:sp>
-        <p:nvSpPr>
-          <p:cNvPr id="9" name="Rounded Rectangle 8"/>
-          <p:cNvSpPr/>
-          <p:nvPr/>
-        </p:nvSpPr>
-        <p:spPr>
-          <a:xfrm>
-            <a:off x="6400800" y="2468880"/>
-            <a:ext cx="5212080" cy="3200400"/>
-          </a:xfrm>
-          <a:prstGeom prst="roundRect">
-            <a:avLst/>
-          </a:prstGeom>
-          <a:solidFill>
-            <a:srgbClr val="15151E"/>
-          </a:solidFill>
-          <a:ln w="12700">
-            <a:solidFill>
-              <a:srgbClr val="2A2A36"/>
-            </a:solidFill>
-          </a:ln>
-          <a:effectLst/>
-        </p:spPr>
-        <p:style>
-          <a:lnRef idx="1">
-            <a:schemeClr val="accent1"/>
-          </a:lnRef>
-          <a:fillRef idx="3">
-            <a:schemeClr val="accent1"/>
-          </a:fillRef>
-          <a:effectRef idx="2">
-            <a:schemeClr val="accent1"/>
-          </a:effectRef>
-          <a:fontRef idx="minor">
-            <a:schemeClr val="lt1"/>
-          </a:fontRef>
-        </p:style>
-        <p:txBody>
-          <a:bodyPr rtlCol="0" anchor="ctr"/>
-          <a:lstStyle/>
-          <a:p>
-            <a:pPr algn="ctr"/>
-          </a:p>
-        </p:txBody>
-      </p:sp>
-      <p:sp>
-        <p:nvSpPr>
-          <p:cNvPr id="10" name="TextBox 9"/>
-          <p:cNvSpPr txBox="1"/>
-          <p:nvPr/>
-        </p:nvSpPr>
-        <p:spPr>
-          <a:xfrm>
-            <a:off x="6766560" y="2743200"/>
-            <a:ext cx="4572000" cy="274320"/>
-          </a:xfrm>
-          <a:prstGeom prst="rect">
-            <a:avLst/>
-          </a:prstGeom>
-          <a:noFill/>
-        </p:spPr>
-        <p:txBody>
-          <a:bodyPr wrap="square" anchor="t" lIns="0" rIns="0" tIns="0" bIns="0">
-            <a:spAutoFit/>
-          </a:bodyPr>
-          <a:lstStyle/>
-          <a:p>
-            <a:pPr algn="l">
-              <a:lnSpc>
-                <a:spcPct val="100000"/>
-              </a:lnSpc>
-            </a:pPr>
-            <a:r>
-              <a:rPr sz="1100" b="1">
-                <a:solidFill>
-                  <a:srgbClr val="34D399"/>
-                </a:solidFill>
-                <a:latin typeface="Arial"/>
-              </a:rPr>
-              <a:t>WHY IT MATTERS</a:t>
-            </a:r>
-          </a:p>
-        </p:txBody>
-      </p:sp>
-      <p:sp>
-        <p:nvSpPr>
-          <p:cNvPr id="11" name="TextBox 10"/>
-          <p:cNvSpPr txBox="1"/>
-          <p:nvPr/>
-        </p:nvSpPr>
-        <p:spPr>
-          <a:xfrm>
-            <a:off x="6766560" y="3154680"/>
-            <a:ext cx="4572000" cy="2377440"/>
-          </a:xfrm>
-          <a:prstGeom prst="rect">
-            <a:avLst/>
-          </a:prstGeom>
-          <a:noFill/>
-        </p:spPr>
-        <p:txBody>
-          <a:bodyPr wrap="square" anchor="t" lIns="0" rIns="0" tIns="0" bIns="0">
-            <a:spAutoFit/>
-          </a:bodyPr>
-          <a:lstStyle/>
-          <a:p>
-            <a:pPr algn="l">
-              <a:lnSpc>
-                <a:spcPct val="150000"/>
-              </a:lnSpc>
-            </a:pPr>
-            <a:r>
-              <a:rPr sz="1300" b="0">
-                <a:solidFill>
-                  <a:srgbClr val="9C9CAA"/>
-                </a:solidFill>
-                <a:latin typeface="Arial"/>
-              </a:rPr>
-              <a:t>-  Usage-based pricing + committed-spend drawdown</a:t>
-            </a:r>
-          </a:p>
-          <a:p>
-            <a:pPr algn="l">
-              <a:lnSpc>
-                <a:spcPct val="150000"/>
-              </a:lnSpc>
-            </a:pPr>
-            <a:r>
-              <a:rPr sz="1300" b="0">
-                <a:solidFill>
-                  <a:srgbClr val="9C9CAA"/>
-                </a:solidFill>
-                <a:latin typeface="Arial"/>
-              </a:rPr>
-              <a:t>-  Government Net-60 / PO and self-serve top-ups</a:t>
-            </a:r>
-          </a:p>
-          <a:p>
-            <a:pPr algn="l">
-              <a:lnSpc>
-                <a:spcPct val="150000"/>
-              </a:lnSpc>
-            </a:pPr>
-            <a:r>
-              <a:rPr sz="1300" b="0">
-                <a:solidFill>
-                  <a:srgbClr val="9C9CAA"/>
-                </a:solidFill>
-                <a:latin typeface="Arial"/>
-              </a:rPr>
-              <a:t>-  Runs on production billing infrastructure</a:t>
-            </a:r>
-          </a:p>
-          <a:p>
-            <a:pPr algn="l">
-              <a:lnSpc>
-                <a:spcPct val="150000"/>
-              </a:lnSpc>
-            </a:pPr>
-            <a:r>
-              <a:rPr sz="1300" b="0">
-                <a:solidFill>
-                  <a:srgbClr val="9C9CAA"/>
-                </a:solidFill>
-                <a:latin typeface="Arial"/>
-              </a:rPr>
-              <a:t>-  The same proxy pattern drops into a real deployment</a:t>
+              <a:t>The practice and the client always see the same source of truth - so renewals and expansion become a data conversation, not a debate.</a:t>
             </a:r>
           </a:p>
         </p:txBody>
@@ -7173,7 +8095,7 @@
                 </a:solidFill>
                 <a:latin typeface="Arial"/>
               </a:rPr>
-              <a:t>PROOF</a:t>
+              <a:t>NOT A MOCKUP</a:t>
             </a:r>
           </a:p>
         </p:txBody>
@@ -7212,21 +8134,60 @@
                 </a:solidFill>
                 <a:latin typeface="Arial"/>
               </a:rPr>
-              <a:t>Real FPT outcomes behind the demo.</a:t>
-            </a:r>
-          </a:p>
-        </p:txBody>
-      </p:sp>
-      <p:sp>
-        <p:nvSpPr>
-          <p:cNvPr id="5" name="Rounded Rectangle 4"/>
+              <a:t>Live usage-based billing, wired to Metronome.</a:t>
+            </a:r>
+          </a:p>
+        </p:txBody>
+      </p:sp>
+      <p:sp>
+        <p:nvSpPr>
+          <p:cNvPr id="5" name="TextBox 4"/>
+          <p:cNvSpPr txBox="1"/>
+          <p:nvPr/>
+        </p:nvSpPr>
+        <p:spPr>
+          <a:xfrm>
+            <a:off x="822960" y="1600200"/>
+            <a:ext cx="10424160" cy="640080"/>
+          </a:xfrm>
+          <a:prstGeom prst="rect">
+            <a:avLst/>
+          </a:prstGeom>
+          <a:noFill/>
+        </p:spPr>
+        <p:txBody>
+          <a:bodyPr wrap="square" anchor="t" lIns="0" rIns="0" tIns="0" bIns="0">
+            <a:spAutoFit/>
+          </a:bodyPr>
+          <a:lstStyle/>
+          <a:p>
+            <a:pPr algn="l">
+              <a:lnSpc>
+                <a:spcPct val="110000"/>
+              </a:lnSpc>
+            </a:pPr>
+            <a:r>
+              <a:rPr sz="1400" b="0">
+                <a:solidFill>
+                  <a:srgbClr val="9C9CAA"/>
+                </a:solidFill>
+                <a:latin typeface="Arial"/>
+              </a:rPr>
+              <a:t>The Billing -&gt; Live panel reads a real Metronome account through a secure, read-only proxy - the API key never reaches the browser.</a:t>
+            </a:r>
+          </a:p>
+        </p:txBody>
+      </p:sp>
+      <p:sp>
+        <p:nvSpPr>
+          <p:cNvPr id="6" name="Rounded Rectangle 5"/>
           <p:cNvSpPr/>
           <p:nvPr/>
         </p:nvSpPr>
         <p:spPr>
           <a:xfrm>
-            <a:off x="822960" y="1737360"/>
-            <a:ext cx="5212080" cy="1371600"/>
+            <a:off x="822960" y="2468880"/>
+            <a:ext cx="5212080" cy="3200400"/>
           </a:xfrm>
           <a:prstGeom prst="roundRect">
             <a:avLst/>
@@ -7265,78 +8226,39 @@
       </p:sp>
       <p:sp>
         <p:nvSpPr>
-          <p:cNvPr id="6" name="TextBox 5"/>
-          <p:cNvSpPr txBox="1"/>
-          <p:nvPr/>
-        </p:nvSpPr>
-        <p:spPr>
-          <a:xfrm>
-            <a:off x="1115568" y="1883664"/>
-            <a:ext cx="4663440" cy="274320"/>
-          </a:xfrm>
-          <a:prstGeom prst="rect">
-            <a:avLst/>
-          </a:prstGeom>
-          <a:noFill/>
-        </p:spPr>
-        <p:txBody>
-          <a:bodyPr wrap="square" anchor="t" lIns="0" rIns="0" tIns="0" bIns="0">
-            <a:spAutoFit/>
-          </a:bodyPr>
-          <a:lstStyle/>
-          <a:p>
-            <a:pPr algn="l">
-              <a:lnSpc>
-                <a:spcPct val="100000"/>
-              </a:lnSpc>
-            </a:pPr>
-            <a:r>
-              <a:rPr sz="1050" b="1">
+          <p:cNvPr id="7" name="TextBox 6"/>
+          <p:cNvSpPr txBox="1"/>
+          <p:nvPr/>
+        </p:nvSpPr>
+        <p:spPr>
+          <a:xfrm>
+            <a:off x="1188720" y="2743200"/>
+            <a:ext cx="4572000" cy="274320"/>
+          </a:xfrm>
+          <a:prstGeom prst="rect">
+            <a:avLst/>
+          </a:prstGeom>
+          <a:noFill/>
+        </p:spPr>
+        <p:txBody>
+          <a:bodyPr wrap="square" anchor="t" lIns="0" rIns="0" tIns="0" bIns="0">
+            <a:spAutoFit/>
+          </a:bodyPr>
+          <a:lstStyle/>
+          <a:p>
+            <a:pPr algn="l">
+              <a:lnSpc>
+                <a:spcPct val="100000"/>
+              </a:lnSpc>
+            </a:pPr>
+            <a:r>
+              <a:rPr sz="1100" b="1">
                 <a:solidFill>
                   <a:srgbClr val="A5B4FC"/>
                 </a:solidFill>
                 <a:latin typeface="Arial"/>
               </a:rPr>
-              <a:t>Answer Engine Optimization</a:t>
-            </a:r>
-          </a:p>
-        </p:txBody>
-      </p:sp>
-      <p:sp>
-        <p:nvSpPr>
-          <p:cNvPr id="7" name="TextBox 6"/>
-          <p:cNvSpPr txBox="1"/>
-          <p:nvPr/>
-        </p:nvSpPr>
-        <p:spPr>
-          <a:xfrm>
-            <a:off x="1115568" y="2139696"/>
-            <a:ext cx="4663440" cy="365760"/>
-          </a:xfrm>
-          <a:prstGeom prst="rect">
-            <a:avLst/>
-          </a:prstGeom>
-          <a:noFill/>
-        </p:spPr>
-        <p:txBody>
-          <a:bodyPr wrap="square" anchor="t" lIns="0" rIns="0" tIns="0" bIns="0">
-            <a:spAutoFit/>
-          </a:bodyPr>
-          <a:lstStyle/>
-          <a:p>
-            <a:pPr algn="l">
-              <a:lnSpc>
-                <a:spcPct val="100000"/>
-              </a:lnSpc>
-            </a:pPr>
-            <a:r>
-              <a:rPr sz="1600" b="1">
-                <a:solidFill>
-                  <a:srgbClr val="F3F3F6"/>
-                </a:solidFill>
-                <a:latin typeface="Arial"/>
-              </a:rPr>
-              <a:t>+200% click-through rate</a:t>
+              <a:t>WHAT'S LIVE</a:t>
             </a:r>
           </a:p>
         </p:txBody>
@@ -7349,86 +8271,95 @@
         </p:nvSpPr>
         <p:spPr>
           <a:xfrm>
-            <a:off x="1115568" y="2487168"/>
-            <a:ext cx="4663440" cy="274320"/>
-          </a:xfrm>
-          <a:prstGeom prst="rect">
-            <a:avLst/>
-          </a:prstGeom>
-          <a:noFill/>
-        </p:spPr>
-        <p:txBody>
-          <a:bodyPr wrap="square" anchor="t" lIns="0" rIns="0" tIns="0" bIns="0">
-            <a:spAutoFit/>
-          </a:bodyPr>
-          <a:lstStyle/>
-          <a:p>
-            <a:pPr algn="l">
-              <a:lnSpc>
-                <a:spcPct val="100000"/>
-              </a:lnSpc>
-            </a:pPr>
-            <a:r>
-              <a:rPr sz="1050" b="0">
-                <a:solidFill>
-                  <a:srgbClr val="6B6B77"/>
-                </a:solidFill>
-                <a:latin typeface="Arial"/>
-              </a:rPr>
-              <a:t>Global technology leader</a:t>
-            </a:r>
-          </a:p>
-        </p:txBody>
-      </p:sp>
-      <p:sp>
-        <p:nvSpPr>
-          <p:cNvPr id="9" name="TextBox 8"/>
-          <p:cNvSpPr txBox="1"/>
-          <p:nvPr/>
-        </p:nvSpPr>
-        <p:spPr>
-          <a:xfrm>
-            <a:off x="1115568" y="2724912"/>
-            <a:ext cx="4663440" cy="320040"/>
-          </a:xfrm>
-          <a:prstGeom prst="rect">
-            <a:avLst/>
-          </a:prstGeom>
-          <a:noFill/>
-        </p:spPr>
-        <p:txBody>
-          <a:bodyPr wrap="square" anchor="t" lIns="0" rIns="0" tIns="0" bIns="0">
-            <a:spAutoFit/>
-          </a:bodyPr>
-          <a:lstStyle/>
-          <a:p>
-            <a:pPr algn="l">
-              <a:lnSpc>
-                <a:spcPct val="100000"/>
-              </a:lnSpc>
-            </a:pPr>
-            <a:r>
-              <a:rPr sz="1000" b="0">
+            <a:off x="1188720" y="3154680"/>
+            <a:ext cx="4572000" cy="2377440"/>
+          </a:xfrm>
+          <a:prstGeom prst="rect">
+            <a:avLst/>
+          </a:prstGeom>
+          <a:noFill/>
+        </p:spPr>
+        <p:txBody>
+          <a:bodyPr wrap="square" anchor="t" lIns="0" rIns="0" tIns="0" bIns="0">
+            <a:spAutoFit/>
+          </a:bodyPr>
+          <a:lstStyle/>
+          <a:p>
+            <a:pPr algn="l">
+              <a:lnSpc>
+                <a:spcPct val="150000"/>
+              </a:lnSpc>
+            </a:pPr>
+            <a:r>
+              <a:rPr sz="1300" b="0">
                 <a:solidFill>
                   <a:srgbClr val="9C9CAA"/>
                 </a:solidFill>
                 <a:latin typeface="Arial"/>
               </a:rPr>
-              <a:t>Site ranking #6 (+18) - CTR 3.2% - featured snippets 30%</a:t>
-            </a:r>
-          </a:p>
-        </p:txBody>
-      </p:sp>
-      <p:sp>
-        <p:nvSpPr>
-          <p:cNvPr id="10" name="Rounded Rectangle 9"/>
+              <a:t>-  7 customers: prepaid-commit + hybrid models</a:t>
+            </a:r>
+          </a:p>
+          <a:p>
+            <a:pPr algn="l">
+              <a:lnSpc>
+                <a:spcPct val="150000"/>
+              </a:lnSpc>
+            </a:pPr>
+            <a:r>
+              <a:rPr sz="1300" b="0">
+                <a:solidFill>
+                  <a:srgbClr val="9C9CAA"/>
+                </a:solidFill>
+                <a:latin typeface="Arial"/>
+              </a:rPr>
+              <a:t>-  Finalized + draft invoices, 6 months history</a:t>
+            </a:r>
+          </a:p>
+          <a:p>
+            <a:pPr algn="l">
+              <a:lnSpc>
+                <a:spcPct val="150000"/>
+              </a:lnSpc>
+            </a:pPr>
+            <a:r>
+              <a:rPr sz="1300" b="0">
+                <a:solidFill>
+                  <a:srgbClr val="9C9CAA"/>
+                </a:solidFill>
+                <a:latin typeface="Arial"/>
+              </a:rPr>
+              <a:t>-  Commit/credit balances drawing down on usage</a:t>
+            </a:r>
+          </a:p>
+          <a:p>
+            <a:pPr algn="l">
+              <a:lnSpc>
+                <a:spcPct val="150000"/>
+              </a:lnSpc>
+            </a:pPr>
+            <a:r>
+              <a:rPr sz="1300" b="0">
+                <a:solidFill>
+                  <a:srgbClr val="9C9CAA"/>
+                </a:solidFill>
+                <a:latin typeface="Arial"/>
+              </a:rPr>
+              <a:t>-  Full catalog: metrics, products, rate cards, packages</a:t>
+            </a:r>
+          </a:p>
+        </p:txBody>
+      </p:sp>
+      <p:sp>
+        <p:nvSpPr>
+          <p:cNvPr id="9" name="Rounded Rectangle 8"/>
           <p:cNvSpPr/>
           <p:nvPr/>
         </p:nvSpPr>
         <p:spPr>
           <a:xfrm>
-            <a:off x="6400800" y="1737360"/>
-            <a:ext cx="5212080" cy="1371600"/>
+            <a:off x="6400800" y="2468880"/>
+            <a:ext cx="5212080" cy="3200400"/>
           </a:xfrm>
           <a:prstGeom prst="roundRect">
             <a:avLst/>
@@ -7467,39 +8398,126 @@
       </p:sp>
       <p:sp>
         <p:nvSpPr>
+          <p:cNvPr id="10" name="TextBox 9"/>
+          <p:cNvSpPr txBox="1"/>
+          <p:nvPr/>
+        </p:nvSpPr>
+        <p:spPr>
+          <a:xfrm>
+            <a:off x="6766560" y="2743200"/>
+            <a:ext cx="4572000" cy="274320"/>
+          </a:xfrm>
+          <a:prstGeom prst="rect">
+            <a:avLst/>
+          </a:prstGeom>
+          <a:noFill/>
+        </p:spPr>
+        <p:txBody>
+          <a:bodyPr wrap="square" anchor="t" lIns="0" rIns="0" tIns="0" bIns="0">
+            <a:spAutoFit/>
+          </a:bodyPr>
+          <a:lstStyle/>
+          <a:p>
+            <a:pPr algn="l">
+              <a:lnSpc>
+                <a:spcPct val="100000"/>
+              </a:lnSpc>
+            </a:pPr>
+            <a:r>
+              <a:rPr sz="1100" b="1">
+                <a:solidFill>
+                  <a:srgbClr val="34D399"/>
+                </a:solidFill>
+                <a:latin typeface="Arial"/>
+              </a:rPr>
+              <a:t>WHY IT MATTERS</a:t>
+            </a:r>
+          </a:p>
+        </p:txBody>
+      </p:sp>
+      <p:sp>
+        <p:nvSpPr>
           <p:cNvPr id="11" name="TextBox 10"/>
           <p:cNvSpPr txBox="1"/>
           <p:nvPr/>
         </p:nvSpPr>
         <p:spPr>
           <a:xfrm>
-            <a:off x="6693408" y="1883664"/>
-            <a:ext cx="4663440" cy="274320"/>
-          </a:xfrm>
-          <a:prstGeom prst="rect">
-            <a:avLst/>
-          </a:prstGeom>
-          <a:noFill/>
-        </p:spPr>
-        <p:txBody>
-          <a:bodyPr wrap="square" anchor="t" lIns="0" rIns="0" tIns="0" bIns="0">
-            <a:spAutoFit/>
-          </a:bodyPr>
-          <a:lstStyle/>
-          <a:p>
-            <a:pPr algn="l">
-              <a:lnSpc>
-                <a:spcPct val="100000"/>
-              </a:lnSpc>
-            </a:pPr>
-            <a:r>
-              <a:rPr sz="1050" b="1">
-                <a:solidFill>
-                  <a:srgbClr val="A5B4FC"/>
-                </a:solidFill>
-                <a:latin typeface="Arial"/>
-              </a:rPr>
-              <a:t>Answer Engine Optimization</a:t>
+            <a:off x="6766560" y="3154680"/>
+            <a:ext cx="4572000" cy="2377440"/>
+          </a:xfrm>
+          <a:prstGeom prst="rect">
+            <a:avLst/>
+          </a:prstGeom>
+          <a:noFill/>
+        </p:spPr>
+        <p:txBody>
+          <a:bodyPr wrap="square" anchor="t" lIns="0" rIns="0" tIns="0" bIns="0">
+            <a:spAutoFit/>
+          </a:bodyPr>
+          <a:lstStyle/>
+          <a:p>
+            <a:pPr algn="l">
+              <a:lnSpc>
+                <a:spcPct val="150000"/>
+              </a:lnSpc>
+            </a:pPr>
+            <a:r>
+              <a:rPr sz="1300" b="0">
+                <a:solidFill>
+                  <a:srgbClr val="9C9CAA"/>
+                </a:solidFill>
+                <a:latin typeface="Arial"/>
+              </a:rPr>
+              <a:t>-  Usage-based pricing + committed-spend drawdown</a:t>
+            </a:r>
+          </a:p>
+          <a:p>
+            <a:pPr algn="l">
+              <a:lnSpc>
+                <a:spcPct val="150000"/>
+              </a:lnSpc>
+            </a:pPr>
+            <a:r>
+              <a:rPr sz="1300" b="0">
+                <a:solidFill>
+                  <a:srgbClr val="9C9CAA"/>
+                </a:solidFill>
+                <a:latin typeface="Arial"/>
+              </a:rPr>
+              <a:t>-  Government Net-60 / PO and self-serve top-ups</a:t>
+            </a:r>
+          </a:p>
+          <a:p>
+            <a:pPr algn="l">
+              <a:lnSpc>
+                <a:spcPct val="150000"/>
+              </a:lnSpc>
+            </a:pPr>
+            <a:r>
+              <a:rPr sz="1300" b="0">
+                <a:solidFill>
+                  <a:srgbClr val="9C9CAA"/>
+                </a:solidFill>
+                <a:latin typeface="Arial"/>
+              </a:rPr>
+              <a:t>-  Runs on production billing infrastructure</a:t>
+            </a:r>
+          </a:p>
+          <a:p>
+            <a:pPr algn="l">
+              <a:lnSpc>
+                <a:spcPct val="150000"/>
+              </a:lnSpc>
+            </a:pPr>
+            <a:r>
+              <a:rPr sz="1300" b="0">
+                <a:solidFill>
+                  <a:srgbClr val="9C9CAA"/>
+                </a:solidFill>
+                <a:latin typeface="Arial"/>
+              </a:rPr>
+              <a:t>-  The same proxy pattern drops into a real deployment</a:t>
             </a:r>
           </a:p>
         </p:txBody>
@@ -7507,623 +8525,6 @@
       <p:sp>
         <p:nvSpPr>
           <p:cNvPr id="12" name="TextBox 11"/>
-          <p:cNvSpPr txBox="1"/>
-          <p:nvPr/>
-        </p:nvSpPr>
-        <p:spPr>
-          <a:xfrm>
-            <a:off x="6693408" y="2139696"/>
-            <a:ext cx="4663440" cy="365760"/>
-          </a:xfrm>
-          <a:prstGeom prst="rect">
-            <a:avLst/>
-          </a:prstGeom>
-          <a:noFill/>
-        </p:spPr>
-        <p:txBody>
-          <a:bodyPr wrap="square" anchor="t" lIns="0" rIns="0" tIns="0" bIns="0">
-            <a:spAutoFit/>
-          </a:bodyPr>
-          <a:lstStyle/>
-          <a:p>
-            <a:pPr algn="l">
-              <a:lnSpc>
-                <a:spcPct val="100000"/>
-              </a:lnSpc>
-            </a:pPr>
-            <a:r>
-              <a:rPr sz="1600" b="1">
-                <a:solidFill>
-                  <a:srgbClr val="F3F3F6"/>
-                </a:solidFill>
-                <a:latin typeface="Arial"/>
-              </a:rPr>
-              <a:t>Cited across 120+ markets</a:t>
-            </a:r>
-          </a:p>
-        </p:txBody>
-      </p:sp>
-      <p:sp>
-        <p:nvSpPr>
-          <p:cNvPr id="13" name="TextBox 12"/>
-          <p:cNvSpPr txBox="1"/>
-          <p:nvPr/>
-        </p:nvSpPr>
-        <p:spPr>
-          <a:xfrm>
-            <a:off x="6693408" y="2487168"/>
-            <a:ext cx="4663440" cy="274320"/>
-          </a:xfrm>
-          <a:prstGeom prst="rect">
-            <a:avLst/>
-          </a:prstGeom>
-          <a:noFill/>
-        </p:spPr>
-        <p:txBody>
-          <a:bodyPr wrap="square" anchor="t" lIns="0" rIns="0" tIns="0" bIns="0">
-            <a:spAutoFit/>
-          </a:bodyPr>
-          <a:lstStyle/>
-          <a:p>
-            <a:pPr algn="l">
-              <a:lnSpc>
-                <a:spcPct val="100000"/>
-              </a:lnSpc>
-            </a:pPr>
-            <a:r>
-              <a:rPr sz="1050" b="0">
-                <a:solidFill>
-                  <a:srgbClr val="6B6B77"/>
-                </a:solidFill>
-                <a:latin typeface="Arial"/>
-              </a:rPr>
-              <a:t>Global health F&amp;B leader</a:t>
-            </a:r>
-          </a:p>
-        </p:txBody>
-      </p:sp>
-      <p:sp>
-        <p:nvSpPr>
-          <p:cNvPr id="14" name="TextBox 13"/>
-          <p:cNvSpPr txBox="1"/>
-          <p:nvPr/>
-        </p:nvSpPr>
-        <p:spPr>
-          <a:xfrm>
-            <a:off x="6693408" y="2724912"/>
-            <a:ext cx="4663440" cy="320040"/>
-          </a:xfrm>
-          <a:prstGeom prst="rect">
-            <a:avLst/>
-          </a:prstGeom>
-          <a:noFill/>
-        </p:spPr>
-        <p:txBody>
-          <a:bodyPr wrap="square" anchor="t" lIns="0" rIns="0" tIns="0" bIns="0">
-            <a:spAutoFit/>
-          </a:bodyPr>
-          <a:lstStyle/>
-          <a:p>
-            <a:pPr algn="l">
-              <a:lnSpc>
-                <a:spcPct val="100000"/>
-              </a:lnSpc>
-            </a:pPr>
-            <a:r>
-              <a:rPr sz="1000" b="0">
-                <a:solidFill>
-                  <a:srgbClr val="9C9CAA"/>
-                </a:solidFill>
-                <a:latin typeface="Arial"/>
-              </a:rPr>
-              <a:t>120+ markets - consistent AI answer boxes - acquisition cost down</a:t>
-            </a:r>
-          </a:p>
-        </p:txBody>
-      </p:sp>
-      <p:sp>
-        <p:nvSpPr>
-          <p:cNvPr id="15" name="Rounded Rectangle 14"/>
-          <p:cNvSpPr/>
-          <p:nvPr/>
-        </p:nvSpPr>
-        <p:spPr>
-          <a:xfrm>
-            <a:off x="822960" y="3383280"/>
-            <a:ext cx="5212080" cy="1371600"/>
-          </a:xfrm>
-          <a:prstGeom prst="roundRect">
-            <a:avLst/>
-          </a:prstGeom>
-          <a:solidFill>
-            <a:srgbClr val="15151E"/>
-          </a:solidFill>
-          <a:ln w="12700">
-            <a:solidFill>
-              <a:srgbClr val="2A2A36"/>
-            </a:solidFill>
-          </a:ln>
-          <a:effectLst/>
-        </p:spPr>
-        <p:style>
-          <a:lnRef idx="1">
-            <a:schemeClr val="accent1"/>
-          </a:lnRef>
-          <a:fillRef idx="3">
-            <a:schemeClr val="accent1"/>
-          </a:fillRef>
-          <a:effectRef idx="2">
-            <a:schemeClr val="accent1"/>
-          </a:effectRef>
-          <a:fontRef idx="minor">
-            <a:schemeClr val="lt1"/>
-          </a:fontRef>
-        </p:style>
-        <p:txBody>
-          <a:bodyPr rtlCol="0" anchor="ctr"/>
-          <a:lstStyle/>
-          <a:p>
-            <a:pPr algn="ctr"/>
-          </a:p>
-        </p:txBody>
-      </p:sp>
-      <p:sp>
-        <p:nvSpPr>
-          <p:cNvPr id="16" name="TextBox 15"/>
-          <p:cNvSpPr txBox="1"/>
-          <p:nvPr/>
-        </p:nvSpPr>
-        <p:spPr>
-          <a:xfrm>
-            <a:off x="1115568" y="3529584"/>
-            <a:ext cx="4663440" cy="274320"/>
-          </a:xfrm>
-          <a:prstGeom prst="rect">
-            <a:avLst/>
-          </a:prstGeom>
-          <a:noFill/>
-        </p:spPr>
-        <p:txBody>
-          <a:bodyPr wrap="square" anchor="t" lIns="0" rIns="0" tIns="0" bIns="0">
-            <a:spAutoFit/>
-          </a:bodyPr>
-          <a:lstStyle/>
-          <a:p>
-            <a:pPr algn="l">
-              <a:lnSpc>
-                <a:spcPct val="100000"/>
-              </a:lnSpc>
-            </a:pPr>
-            <a:r>
-              <a:rPr sz="1050" b="1">
-                <a:solidFill>
-                  <a:srgbClr val="A5B4FC"/>
-                </a:solidFill>
-                <a:latin typeface="Arial"/>
-              </a:rPr>
-              <a:t>Commerce</a:t>
-            </a:r>
-          </a:p>
-        </p:txBody>
-      </p:sp>
-      <p:sp>
-        <p:nvSpPr>
-          <p:cNvPr id="17" name="TextBox 16"/>
-          <p:cNvSpPr txBox="1"/>
-          <p:nvPr/>
-        </p:nvSpPr>
-        <p:spPr>
-          <a:xfrm>
-            <a:off x="1115568" y="3785616"/>
-            <a:ext cx="4663440" cy="365760"/>
-          </a:xfrm>
-          <a:prstGeom prst="rect">
-            <a:avLst/>
-          </a:prstGeom>
-          <a:noFill/>
-        </p:spPr>
-        <p:txBody>
-          <a:bodyPr wrap="square" anchor="t" lIns="0" rIns="0" tIns="0" bIns="0">
-            <a:spAutoFit/>
-          </a:bodyPr>
-          <a:lstStyle/>
-          <a:p>
-            <a:pPr algn="l">
-              <a:lnSpc>
-                <a:spcPct val="100000"/>
-              </a:lnSpc>
-            </a:pPr>
-            <a:r>
-              <a:rPr sz="1600" b="1">
-                <a:solidFill>
-                  <a:srgbClr val="F3F3F6"/>
-                </a:solidFill>
-                <a:latin typeface="Arial"/>
-              </a:rPr>
-              <a:t>MVP in 2 months, not 10</a:t>
-            </a:r>
-          </a:p>
-        </p:txBody>
-      </p:sp>
-      <p:sp>
-        <p:nvSpPr>
-          <p:cNvPr id="18" name="TextBox 17"/>
-          <p:cNvSpPr txBox="1"/>
-          <p:nvPr/>
-        </p:nvSpPr>
-        <p:spPr>
-          <a:xfrm>
-            <a:off x="1115568" y="4133088"/>
-            <a:ext cx="4663440" cy="274320"/>
-          </a:xfrm>
-          <a:prstGeom prst="rect">
-            <a:avLst/>
-          </a:prstGeom>
-          <a:noFill/>
-        </p:spPr>
-        <p:txBody>
-          <a:bodyPr wrap="square" anchor="t" lIns="0" rIns="0" tIns="0" bIns="0">
-            <a:spAutoFit/>
-          </a:bodyPr>
-          <a:lstStyle/>
-          <a:p>
-            <a:pPr algn="l">
-              <a:lnSpc>
-                <a:spcPct val="100000"/>
-              </a:lnSpc>
-            </a:pPr>
-            <a:r>
-              <a:rPr sz="1050" b="0">
-                <a:solidFill>
-                  <a:srgbClr val="6B6B77"/>
-                </a:solidFill>
-                <a:latin typeface="Arial"/>
-              </a:rPr>
-              <a:t>KSA megaproject (PIF)</a:t>
-            </a:r>
-          </a:p>
-        </p:txBody>
-      </p:sp>
-      <p:sp>
-        <p:nvSpPr>
-          <p:cNvPr id="19" name="TextBox 18"/>
-          <p:cNvSpPr txBox="1"/>
-          <p:nvPr/>
-        </p:nvSpPr>
-        <p:spPr>
-          <a:xfrm>
-            <a:off x="1115568" y="4370832"/>
-            <a:ext cx="4663440" cy="320040"/>
-          </a:xfrm>
-          <a:prstGeom prst="rect">
-            <a:avLst/>
-          </a:prstGeom>
-          <a:noFill/>
-        </p:spPr>
-        <p:txBody>
-          <a:bodyPr wrap="square" anchor="t" lIns="0" rIns="0" tIns="0" bIns="0">
-            <a:spAutoFit/>
-          </a:bodyPr>
-          <a:lstStyle/>
-          <a:p>
-            <a:pPr algn="l">
-              <a:lnSpc>
-                <a:spcPct val="100000"/>
-              </a:lnSpc>
-            </a:pPr>
-            <a:r>
-              <a:rPr sz="1000" b="0">
-                <a:solidFill>
-                  <a:srgbClr val="9C9CAA"/>
-                </a:solidFill>
-                <a:latin typeface="Arial"/>
-              </a:rPr>
-              <a:t>Time to MVP 2 mo (vs 10) - build time -55% - requirements -40%</a:t>
-            </a:r>
-          </a:p>
-        </p:txBody>
-      </p:sp>
-      <p:sp>
-        <p:nvSpPr>
-          <p:cNvPr id="20" name="Rounded Rectangle 19"/>
-          <p:cNvSpPr/>
-          <p:nvPr/>
-        </p:nvSpPr>
-        <p:spPr>
-          <a:xfrm>
-            <a:off x="6400800" y="3383280"/>
-            <a:ext cx="5212080" cy="1371600"/>
-          </a:xfrm>
-          <a:prstGeom prst="roundRect">
-            <a:avLst/>
-          </a:prstGeom>
-          <a:solidFill>
-            <a:srgbClr val="15151E"/>
-          </a:solidFill>
-          <a:ln w="12700">
-            <a:solidFill>
-              <a:srgbClr val="2A2A36"/>
-            </a:solidFill>
-          </a:ln>
-          <a:effectLst/>
-        </p:spPr>
-        <p:style>
-          <a:lnRef idx="1">
-            <a:schemeClr val="accent1"/>
-          </a:lnRef>
-          <a:fillRef idx="3">
-            <a:schemeClr val="accent1"/>
-          </a:fillRef>
-          <a:effectRef idx="2">
-            <a:schemeClr val="accent1"/>
-          </a:effectRef>
-          <a:fontRef idx="minor">
-            <a:schemeClr val="lt1"/>
-          </a:fontRef>
-        </p:style>
-        <p:txBody>
-          <a:bodyPr rtlCol="0" anchor="ctr"/>
-          <a:lstStyle/>
-          <a:p>
-            <a:pPr algn="ctr"/>
-          </a:p>
-        </p:txBody>
-      </p:sp>
-      <p:sp>
-        <p:nvSpPr>
-          <p:cNvPr id="21" name="TextBox 20"/>
-          <p:cNvSpPr txBox="1"/>
-          <p:nvPr/>
-        </p:nvSpPr>
-        <p:spPr>
-          <a:xfrm>
-            <a:off x="6693408" y="3529584"/>
-            <a:ext cx="4663440" cy="274320"/>
-          </a:xfrm>
-          <a:prstGeom prst="rect">
-            <a:avLst/>
-          </a:prstGeom>
-          <a:noFill/>
-        </p:spPr>
-        <p:txBody>
-          <a:bodyPr wrap="square" anchor="t" lIns="0" rIns="0" tIns="0" bIns="0">
-            <a:spAutoFit/>
-          </a:bodyPr>
-          <a:lstStyle/>
-          <a:p>
-            <a:pPr algn="l">
-              <a:lnSpc>
-                <a:spcPct val="100000"/>
-              </a:lnSpc>
-            </a:pPr>
-            <a:r>
-              <a:rPr sz="1050" b="1">
-                <a:solidFill>
-                  <a:srgbClr val="A5B4FC"/>
-                </a:solidFill>
-                <a:latin typeface="Arial"/>
-              </a:rPr>
-              <a:t>Data &amp; AI CoE</a:t>
-            </a:r>
-          </a:p>
-        </p:txBody>
-      </p:sp>
-      <p:sp>
-        <p:nvSpPr>
-          <p:cNvPr id="22" name="TextBox 21"/>
-          <p:cNvSpPr txBox="1"/>
-          <p:nvPr/>
-        </p:nvSpPr>
-        <p:spPr>
-          <a:xfrm>
-            <a:off x="6693408" y="3785616"/>
-            <a:ext cx="4663440" cy="365760"/>
-          </a:xfrm>
-          <a:prstGeom prst="rect">
-            <a:avLst/>
-          </a:prstGeom>
-          <a:noFill/>
-        </p:spPr>
-        <p:txBody>
-          <a:bodyPr wrap="square" anchor="t" lIns="0" rIns="0" tIns="0" bIns="0">
-            <a:spAutoFit/>
-          </a:bodyPr>
-          <a:lstStyle/>
-          <a:p>
-            <a:pPr algn="l">
-              <a:lnSpc>
-                <a:spcPct val="100000"/>
-              </a:lnSpc>
-            </a:pPr>
-            <a:r>
-              <a:rPr sz="1600" b="1">
-                <a:solidFill>
-                  <a:srgbClr val="F3F3F6"/>
-                </a:solidFill>
-                <a:latin typeface="Arial"/>
-              </a:rPr>
-              <a:t>Campaign cycles: weeks to minutes</a:t>
-            </a:r>
-          </a:p>
-        </p:txBody>
-      </p:sp>
-      <p:sp>
-        <p:nvSpPr>
-          <p:cNvPr id="23" name="TextBox 22"/>
-          <p:cNvSpPr txBox="1"/>
-          <p:nvPr/>
-        </p:nvSpPr>
-        <p:spPr>
-          <a:xfrm>
-            <a:off x="6693408" y="4133088"/>
-            <a:ext cx="4663440" cy="274320"/>
-          </a:xfrm>
-          <a:prstGeom prst="rect">
-            <a:avLst/>
-          </a:prstGeom>
-          <a:noFill/>
-        </p:spPr>
-        <p:txBody>
-          <a:bodyPr wrap="square" anchor="t" lIns="0" rIns="0" tIns="0" bIns="0">
-            <a:spAutoFit/>
-          </a:bodyPr>
-          <a:lstStyle/>
-          <a:p>
-            <a:pPr algn="l">
-              <a:lnSpc>
-                <a:spcPct val="100000"/>
-              </a:lnSpc>
-            </a:pPr>
-            <a:r>
-              <a:rPr sz="1050" b="0">
-                <a:solidFill>
-                  <a:srgbClr val="6B6B77"/>
-                </a:solidFill>
-                <a:latin typeface="Arial"/>
-              </a:rPr>
-              <a:t>FPT x Salesforce ASEAN CoE</a:t>
-            </a:r>
-          </a:p>
-        </p:txBody>
-      </p:sp>
-      <p:sp>
-        <p:nvSpPr>
-          <p:cNvPr id="24" name="TextBox 23"/>
-          <p:cNvSpPr txBox="1"/>
-          <p:nvPr/>
-        </p:nvSpPr>
-        <p:spPr>
-          <a:xfrm>
-            <a:off x="6693408" y="4370832"/>
-            <a:ext cx="4663440" cy="320040"/>
-          </a:xfrm>
-          <a:prstGeom prst="rect">
-            <a:avLst/>
-          </a:prstGeom>
-          <a:noFill/>
-        </p:spPr>
-        <p:txBody>
-          <a:bodyPr wrap="square" anchor="t" lIns="0" rIns="0" tIns="0" bIns="0">
-            <a:spAutoFit/>
-          </a:bodyPr>
-          <a:lstStyle/>
-          <a:p>
-            <a:pPr algn="l">
-              <a:lnSpc>
-                <a:spcPct val="100000"/>
-              </a:lnSpc>
-            </a:pPr>
-            <a:r>
-              <a:rPr sz="1000" b="0">
-                <a:solidFill>
-                  <a:srgbClr val="9C9CAA"/>
-                </a:solidFill>
-                <a:latin typeface="Arial"/>
-              </a:rPr>
-              <a:t>First in ASEAN - weeks to minutes - ~100 Agentforce certs by 2026</a:t>
-            </a:r>
-          </a:p>
-        </p:txBody>
-      </p:sp>
-      <p:sp>
-        <p:nvSpPr>
-          <p:cNvPr id="25" name="TextBox 24"/>
-          <p:cNvSpPr txBox="1"/>
-          <p:nvPr/>
-        </p:nvSpPr>
-        <p:spPr>
-          <a:xfrm>
-            <a:off x="822960" y="4983480"/>
-            <a:ext cx="10424160" cy="274320"/>
-          </a:xfrm>
-          <a:prstGeom prst="rect">
-            <a:avLst/>
-          </a:prstGeom>
-          <a:noFill/>
-        </p:spPr>
-        <p:txBody>
-          <a:bodyPr wrap="square" anchor="t" lIns="0" rIns="0" tIns="0" bIns="0">
-            <a:spAutoFit/>
-          </a:bodyPr>
-          <a:lstStyle/>
-          <a:p>
-            <a:pPr algn="l">
-              <a:lnSpc>
-                <a:spcPct val="110000"/>
-              </a:lnSpc>
-            </a:pPr>
-            <a:r>
-              <a:rPr sz="1100" b="1">
-                <a:solidFill>
-                  <a:srgbClr val="A5B4FC"/>
-                </a:solidFill>
-                <a:latin typeface="Arial"/>
-              </a:rPr>
-              <a:t>FPT PARTNERS:  </a:t>
-            </a:r>
-            <a:r>
-              <a:rPr sz="1100" b="0">
-                <a:solidFill>
-                  <a:srgbClr val="9C9CAA"/>
-                </a:solidFill>
-                <a:latin typeface="Arial"/>
-              </a:rPr>
-              <a:t>Adobe (Specialized)  Sitecore (Platinum APAC)  Salesforce (First ASEAN Data &amp; AI CoE)  Liferay (Global Platinum)  Shopify (Plus)</a:t>
-            </a:r>
-          </a:p>
-        </p:txBody>
-      </p:sp>
-      <p:sp>
-        <p:nvSpPr>
-          <p:cNvPr id="26" name="TextBox 25"/>
-          <p:cNvSpPr txBox="1"/>
-          <p:nvPr/>
-        </p:nvSpPr>
-        <p:spPr>
-          <a:xfrm>
-            <a:off x="822960" y="5440680"/>
-            <a:ext cx="10424160" cy="365760"/>
-          </a:xfrm>
-          <a:prstGeom prst="rect">
-            <a:avLst/>
-          </a:prstGeom>
-          <a:noFill/>
-        </p:spPr>
-        <p:txBody>
-          <a:bodyPr wrap="square" anchor="t" lIns="0" rIns="0" tIns="0" bIns="0">
-            <a:spAutoFit/>
-          </a:bodyPr>
-          <a:lstStyle/>
-          <a:p>
-            <a:pPr algn="l">
-              <a:lnSpc>
-                <a:spcPct val="100000"/>
-              </a:lnSpc>
-            </a:pPr>
-            <a:r>
-              <a:rPr sz="1400" b="1">
-                <a:solidFill>
-                  <a:srgbClr val="F3F3F6"/>
-                </a:solidFill>
-                <a:latin typeface="Arial"/>
-              </a:rPr>
-              <a:t>1,000+ certified engineers      1,500+ platform certifications</a:t>
-            </a:r>
-            <a:r>
-              <a:rPr sz="1000" b="0">
-                <a:solidFill>
-                  <a:srgbClr val="6B6B77"/>
-                </a:solidFill>
-                <a:latin typeface="Arial"/>
-              </a:rPr>
-              <a:t>      FPT Corporation's public figures</a:t>
-            </a:r>
-          </a:p>
-        </p:txBody>
-      </p:sp>
-      <p:sp>
-        <p:nvSpPr>
-          <p:cNvPr id="27" name="TextBox 26"/>
           <p:cNvSpPr txBox="1"/>
           <p:nvPr/>
         </p:nvSpPr>
@@ -8171,7 +8572,7 @@
       </p:sp>
       <p:sp>
         <p:nvSpPr>
-          <p:cNvPr id="28" name="TextBox 27"/>
+          <p:cNvPr id="13" name="TextBox 12"/>
           <p:cNvSpPr txBox="1"/>
           <p:nvPr/>
         </p:nvSpPr>
@@ -8304,7 +8705,7 @@
                 </a:solidFill>
                 <a:latin typeface="Arial"/>
               </a:rPr>
-              <a:t>RUN THE DEMO</a:t>
+              <a:t>PROOF</a:t>
             </a:r>
           </a:p>
         </p:txBody>
@@ -8343,7 +8744,7 @@
                 </a:solidFill>
                 <a:latin typeface="Arial"/>
               </a:rPr>
-              <a:t>A 7-step walkthrough (~6-8 min).</a:t>
+              <a:t>Real FPT outcomes behind the demo.</a:t>
             </a:r>
           </a:p>
         </p:txBody>
@@ -8356,17 +8757,19 @@
         </p:nvSpPr>
         <p:spPr>
           <a:xfrm>
-            <a:off x="822960" y="1783080"/>
-            <a:ext cx="502920" cy="502920"/>
+            <a:off x="822960" y="1737360"/>
+            <a:ext cx="5212080" cy="1371600"/>
           </a:xfrm>
           <a:prstGeom prst="roundRect">
             <a:avLst/>
           </a:prstGeom>
           <a:solidFill>
-            <a:srgbClr val="6366F1"/>
+            <a:srgbClr val="15151E"/>
           </a:solidFill>
-          <a:ln>
-            <a:noFill/>
+          <a:ln w="12700">
+            <a:solidFill>
+              <a:srgbClr val="2A2A36"/>
+            </a:solidFill>
           </a:ln>
           <a:effectLst/>
         </p:spPr>
@@ -8400,72 +8803,72 @@
         </p:nvSpPr>
         <p:spPr>
           <a:xfrm>
-            <a:off x="822960" y="1764792"/>
-            <a:ext cx="502920" cy="502920"/>
-          </a:xfrm>
-          <a:prstGeom prst="rect">
-            <a:avLst/>
-          </a:prstGeom>
-          <a:noFill/>
-        </p:spPr>
-        <p:txBody>
-          <a:bodyPr wrap="square" anchor="ctr" lIns="0" rIns="0" tIns="0" bIns="0">
-            <a:spAutoFit/>
-          </a:bodyPr>
-          <a:lstStyle/>
-          <a:p>
-            <a:pPr algn="ctr">
-              <a:lnSpc>
-                <a:spcPct val="100000"/>
-              </a:lnSpc>
-            </a:pPr>
-            <a:r>
-              <a:rPr sz="1800" b="1">
+            <a:off x="1115568" y="1883664"/>
+            <a:ext cx="4663440" cy="274320"/>
+          </a:xfrm>
+          <a:prstGeom prst="rect">
+            <a:avLst/>
+          </a:prstGeom>
+          <a:noFill/>
+        </p:spPr>
+        <p:txBody>
+          <a:bodyPr wrap="square" anchor="t" lIns="0" rIns="0" tIns="0" bIns="0">
+            <a:spAutoFit/>
+          </a:bodyPr>
+          <a:lstStyle/>
+          <a:p>
+            <a:pPr algn="l">
+              <a:lnSpc>
+                <a:spcPct val="100000"/>
+              </a:lnSpc>
+            </a:pPr>
+            <a:r>
+              <a:rPr sz="1050" b="1">
+                <a:solidFill>
+                  <a:srgbClr val="A5B4FC"/>
+                </a:solidFill>
+                <a:latin typeface="Arial"/>
+              </a:rPr>
+              <a:t>Answer Engine Optimization</a:t>
+            </a:r>
+          </a:p>
+        </p:txBody>
+      </p:sp>
+      <p:sp>
+        <p:nvSpPr>
+          <p:cNvPr id="7" name="TextBox 6"/>
+          <p:cNvSpPr txBox="1"/>
+          <p:nvPr/>
+        </p:nvSpPr>
+        <p:spPr>
+          <a:xfrm>
+            <a:off x="1115568" y="2139696"/>
+            <a:ext cx="4663440" cy="365760"/>
+          </a:xfrm>
+          <a:prstGeom prst="rect">
+            <a:avLst/>
+          </a:prstGeom>
+          <a:noFill/>
+        </p:spPr>
+        <p:txBody>
+          <a:bodyPr wrap="square" anchor="t" lIns="0" rIns="0" tIns="0" bIns="0">
+            <a:spAutoFit/>
+          </a:bodyPr>
+          <a:lstStyle/>
+          <a:p>
+            <a:pPr algn="l">
+              <a:lnSpc>
+                <a:spcPct val="100000"/>
+              </a:lnSpc>
+            </a:pPr>
+            <a:r>
+              <a:rPr sz="1600" b="1">
                 <a:solidFill>
                   <a:srgbClr val="F3F3F6"/>
                 </a:solidFill>
                 <a:latin typeface="Arial"/>
               </a:rPr>
-              <a:t>1</a:t>
-            </a:r>
-          </a:p>
-        </p:txBody>
-      </p:sp>
-      <p:sp>
-        <p:nvSpPr>
-          <p:cNvPr id="7" name="TextBox 6"/>
-          <p:cNvSpPr txBox="1"/>
-          <p:nvPr/>
-        </p:nvSpPr>
-        <p:spPr>
-          <a:xfrm>
-            <a:off x="1508760" y="1764792"/>
-            <a:ext cx="4663440" cy="365760"/>
-          </a:xfrm>
-          <a:prstGeom prst="rect">
-            <a:avLst/>
-          </a:prstGeom>
-          <a:noFill/>
-        </p:spPr>
-        <p:txBody>
-          <a:bodyPr wrap="square" anchor="t" lIns="0" rIns="0" tIns="0" bIns="0">
-            <a:spAutoFit/>
-          </a:bodyPr>
-          <a:lstStyle/>
-          <a:p>
-            <a:pPr algn="l">
-              <a:lnSpc>
-                <a:spcPct val="100000"/>
-              </a:lnSpc>
-            </a:pPr>
-            <a:r>
-              <a:rPr sz="1450" b="1">
-                <a:solidFill>
-                  <a:srgbClr val="F3F3F6"/>
-                </a:solidFill>
-                <a:latin typeface="Arial"/>
-              </a:rPr>
-              <a:t>Agency overview</a:t>
+              <a:t>+200% click-through rate</a:t>
             </a:r>
           </a:p>
         </p:txBody>
@@ -8478,56 +8881,97 @@
         </p:nvSpPr>
         <p:spPr>
           <a:xfrm>
-            <a:off x="1508760" y="2093976"/>
-            <a:ext cx="4663440" cy="457200"/>
-          </a:xfrm>
-          <a:prstGeom prst="rect">
-            <a:avLst/>
-          </a:prstGeom>
-          <a:noFill/>
-        </p:spPr>
-        <p:txBody>
-          <a:bodyPr wrap="square" anchor="t" lIns="0" rIns="0" tIns="0" bIns="0">
-            <a:spAutoFit/>
-          </a:bodyPr>
-          <a:lstStyle/>
-          <a:p>
-            <a:pPr algn="l">
-              <a:lnSpc>
-                <a:spcPct val="100000"/>
-              </a:lnSpc>
-            </a:pPr>
-            <a:r>
-              <a:rPr sz="1150" b="0">
+            <a:off x="1115568" y="2487168"/>
+            <a:ext cx="4663440" cy="274320"/>
+          </a:xfrm>
+          <a:prstGeom prst="rect">
+            <a:avLst/>
+          </a:prstGeom>
+          <a:noFill/>
+        </p:spPr>
+        <p:txBody>
+          <a:bodyPr wrap="square" anchor="t" lIns="0" rIns="0" tIns="0" bIns="0">
+            <a:spAutoFit/>
+          </a:bodyPr>
+          <a:lstStyle/>
+          <a:p>
+            <a:pPr algn="l">
+              <a:lnSpc>
+                <a:spcPct val="100000"/>
+              </a:lnSpc>
+            </a:pPr>
+            <a:r>
+              <a:rPr sz="1050" b="0">
+                <a:solidFill>
+                  <a:srgbClr val="6B6B77"/>
+                </a:solidFill>
+                <a:latin typeface="Arial"/>
+              </a:rPr>
+              <a:t>Global technology leader</a:t>
+            </a:r>
+          </a:p>
+        </p:txBody>
+      </p:sp>
+      <p:sp>
+        <p:nvSpPr>
+          <p:cNvPr id="9" name="TextBox 8"/>
+          <p:cNvSpPr txBox="1"/>
+          <p:nvPr/>
+        </p:nvSpPr>
+        <p:spPr>
+          <a:xfrm>
+            <a:off x="1115568" y="2724912"/>
+            <a:ext cx="4663440" cy="320040"/>
+          </a:xfrm>
+          <a:prstGeom prst="rect">
+            <a:avLst/>
+          </a:prstGeom>
+          <a:noFill/>
+        </p:spPr>
+        <p:txBody>
+          <a:bodyPr wrap="square" anchor="t" lIns="0" rIns="0" tIns="0" bIns="0">
+            <a:spAutoFit/>
+          </a:bodyPr>
+          <a:lstStyle/>
+          <a:p>
+            <a:pPr algn="l">
+              <a:lnSpc>
+                <a:spcPct val="100000"/>
+              </a:lnSpc>
+            </a:pPr>
+            <a:r>
+              <a:rPr sz="1000" b="0">
                 <a:solidFill>
                   <a:srgbClr val="9C9CAA"/>
                 </a:solidFill>
                 <a:latin typeface="Arial"/>
               </a:rPr>
-              <a:t>Blended ROAI, revenue and margin across all clients.</a:t>
-            </a:r>
-          </a:p>
-        </p:txBody>
-      </p:sp>
-      <p:sp>
-        <p:nvSpPr>
-          <p:cNvPr id="9" name="Rounded Rectangle 8"/>
+              <a:t>Site ranking #6 (+18) - CTR 3.2% - featured snippets 30%</a:t>
+            </a:r>
+          </a:p>
+        </p:txBody>
+      </p:sp>
+      <p:sp>
+        <p:nvSpPr>
+          <p:cNvPr id="10" name="Rounded Rectangle 9"/>
           <p:cNvSpPr/>
           <p:nvPr/>
         </p:nvSpPr>
         <p:spPr>
           <a:xfrm>
-            <a:off x="6400800" y="1783080"/>
-            <a:ext cx="502920" cy="502920"/>
+            <a:off x="6400800" y="1737360"/>
+            <a:ext cx="5212080" cy="1371600"/>
           </a:xfrm>
           <a:prstGeom prst="roundRect">
             <a:avLst/>
           </a:prstGeom>
           <a:solidFill>
-            <a:srgbClr val="6366F1"/>
+            <a:srgbClr val="15151E"/>
           </a:solidFill>
-          <a:ln>
-            <a:noFill/>
+          <a:ln w="12700">
+            <a:solidFill>
+              <a:srgbClr val="2A2A36"/>
+            </a:solidFill>
           </a:ln>
           <a:effectLst/>
         </p:spPr>
@@ -8555,140 +8999,181 @@
       </p:sp>
       <p:sp>
         <p:nvSpPr>
-          <p:cNvPr id="10" name="TextBox 9"/>
-          <p:cNvSpPr txBox="1"/>
-          <p:nvPr/>
-        </p:nvSpPr>
-        <p:spPr>
-          <a:xfrm>
-            <a:off x="6400800" y="1764792"/>
-            <a:ext cx="502920" cy="502920"/>
-          </a:xfrm>
-          <a:prstGeom prst="rect">
-            <a:avLst/>
-          </a:prstGeom>
-          <a:noFill/>
-        </p:spPr>
-        <p:txBody>
-          <a:bodyPr wrap="square" anchor="ctr" lIns="0" rIns="0" tIns="0" bIns="0">
-            <a:spAutoFit/>
-          </a:bodyPr>
-          <a:lstStyle/>
-          <a:p>
-            <a:pPr algn="ctr">
-              <a:lnSpc>
-                <a:spcPct val="100000"/>
-              </a:lnSpc>
-            </a:pPr>
-            <a:r>
-              <a:rPr sz="1800" b="1">
+          <p:cNvPr id="11" name="TextBox 10"/>
+          <p:cNvSpPr txBox="1"/>
+          <p:nvPr/>
+        </p:nvSpPr>
+        <p:spPr>
+          <a:xfrm>
+            <a:off x="6693408" y="1883664"/>
+            <a:ext cx="4663440" cy="274320"/>
+          </a:xfrm>
+          <a:prstGeom prst="rect">
+            <a:avLst/>
+          </a:prstGeom>
+          <a:noFill/>
+        </p:spPr>
+        <p:txBody>
+          <a:bodyPr wrap="square" anchor="t" lIns="0" rIns="0" tIns="0" bIns="0">
+            <a:spAutoFit/>
+          </a:bodyPr>
+          <a:lstStyle/>
+          <a:p>
+            <a:pPr algn="l">
+              <a:lnSpc>
+                <a:spcPct val="100000"/>
+              </a:lnSpc>
+            </a:pPr>
+            <a:r>
+              <a:rPr sz="1050" b="1">
+                <a:solidFill>
+                  <a:srgbClr val="A5B4FC"/>
+                </a:solidFill>
+                <a:latin typeface="Arial"/>
+              </a:rPr>
+              <a:t>Answer Engine Optimization</a:t>
+            </a:r>
+          </a:p>
+        </p:txBody>
+      </p:sp>
+      <p:sp>
+        <p:nvSpPr>
+          <p:cNvPr id="12" name="TextBox 11"/>
+          <p:cNvSpPr txBox="1"/>
+          <p:nvPr/>
+        </p:nvSpPr>
+        <p:spPr>
+          <a:xfrm>
+            <a:off x="6693408" y="2139696"/>
+            <a:ext cx="4663440" cy="365760"/>
+          </a:xfrm>
+          <a:prstGeom prst="rect">
+            <a:avLst/>
+          </a:prstGeom>
+          <a:noFill/>
+        </p:spPr>
+        <p:txBody>
+          <a:bodyPr wrap="square" anchor="t" lIns="0" rIns="0" tIns="0" bIns="0">
+            <a:spAutoFit/>
+          </a:bodyPr>
+          <a:lstStyle/>
+          <a:p>
+            <a:pPr algn="l">
+              <a:lnSpc>
+                <a:spcPct val="100000"/>
+              </a:lnSpc>
+            </a:pPr>
+            <a:r>
+              <a:rPr sz="1600" b="1">
                 <a:solidFill>
                   <a:srgbClr val="F3F3F6"/>
                 </a:solidFill>
                 <a:latin typeface="Arial"/>
               </a:rPr>
-              <a:t>2</a:t>
-            </a:r>
-          </a:p>
-        </p:txBody>
-      </p:sp>
-      <p:sp>
-        <p:nvSpPr>
-          <p:cNvPr id="11" name="TextBox 10"/>
-          <p:cNvSpPr txBox="1"/>
-          <p:nvPr/>
-        </p:nvSpPr>
-        <p:spPr>
-          <a:xfrm>
-            <a:off x="7086600" y="1764792"/>
-            <a:ext cx="4663440" cy="365760"/>
-          </a:xfrm>
-          <a:prstGeom prst="rect">
-            <a:avLst/>
-          </a:prstGeom>
-          <a:noFill/>
-        </p:spPr>
-        <p:txBody>
-          <a:bodyPr wrap="square" anchor="t" lIns="0" rIns="0" tIns="0" bIns="0">
-            <a:spAutoFit/>
-          </a:bodyPr>
-          <a:lstStyle/>
-          <a:p>
-            <a:pPr algn="l">
-              <a:lnSpc>
-                <a:spcPct val="100000"/>
-              </a:lnSpc>
-            </a:pPr>
-            <a:r>
-              <a:rPr sz="1450" b="1">
-                <a:solidFill>
-                  <a:srgbClr val="F3F3F6"/>
-                </a:solidFill>
-                <a:latin typeface="Arial"/>
-              </a:rPr>
-              <a:t>ROAI analytics</a:t>
-            </a:r>
-          </a:p>
-        </p:txBody>
-      </p:sp>
-      <p:sp>
-        <p:nvSpPr>
-          <p:cNvPr id="12" name="TextBox 11"/>
-          <p:cNvSpPr txBox="1"/>
-          <p:nvPr/>
-        </p:nvSpPr>
-        <p:spPr>
-          <a:xfrm>
-            <a:off x="7086600" y="2093976"/>
-            <a:ext cx="4663440" cy="457200"/>
-          </a:xfrm>
-          <a:prstGeom prst="rect">
-            <a:avLst/>
-          </a:prstGeom>
-          <a:noFill/>
-        </p:spPr>
-        <p:txBody>
-          <a:bodyPr wrap="square" anchor="t" lIns="0" rIns="0" tIns="0" bIns="0">
-            <a:spAutoFit/>
-          </a:bodyPr>
-          <a:lstStyle/>
-          <a:p>
-            <a:pPr algn="l">
-              <a:lnSpc>
-                <a:spcPct val="100000"/>
-              </a:lnSpc>
-            </a:pPr>
-            <a:r>
-              <a:rPr sz="1150" b="0">
+              <a:t>Cited across 120+ markets</a:t>
+            </a:r>
+          </a:p>
+        </p:txBody>
+      </p:sp>
+      <p:sp>
+        <p:nvSpPr>
+          <p:cNvPr id="13" name="TextBox 12"/>
+          <p:cNvSpPr txBox="1"/>
+          <p:nvPr/>
+        </p:nvSpPr>
+        <p:spPr>
+          <a:xfrm>
+            <a:off x="6693408" y="2487168"/>
+            <a:ext cx="4663440" cy="274320"/>
+          </a:xfrm>
+          <a:prstGeom prst="rect">
+            <a:avLst/>
+          </a:prstGeom>
+          <a:noFill/>
+        </p:spPr>
+        <p:txBody>
+          <a:bodyPr wrap="square" anchor="t" lIns="0" rIns="0" tIns="0" bIns="0">
+            <a:spAutoFit/>
+          </a:bodyPr>
+          <a:lstStyle/>
+          <a:p>
+            <a:pPr algn="l">
+              <a:lnSpc>
+                <a:spcPct val="100000"/>
+              </a:lnSpc>
+            </a:pPr>
+            <a:r>
+              <a:rPr sz="1050" b="0">
+                <a:solidFill>
+                  <a:srgbClr val="6B6B77"/>
+                </a:solidFill>
+                <a:latin typeface="Arial"/>
+              </a:rPr>
+              <a:t>Global health F&amp;B leader</a:t>
+            </a:r>
+          </a:p>
+        </p:txBody>
+      </p:sp>
+      <p:sp>
+        <p:nvSpPr>
+          <p:cNvPr id="14" name="TextBox 13"/>
+          <p:cNvSpPr txBox="1"/>
+          <p:nvPr/>
+        </p:nvSpPr>
+        <p:spPr>
+          <a:xfrm>
+            <a:off x="6693408" y="2724912"/>
+            <a:ext cx="4663440" cy="320040"/>
+          </a:xfrm>
+          <a:prstGeom prst="rect">
+            <a:avLst/>
+          </a:prstGeom>
+          <a:noFill/>
+        </p:spPr>
+        <p:txBody>
+          <a:bodyPr wrap="square" anchor="t" lIns="0" rIns="0" tIns="0" bIns="0">
+            <a:spAutoFit/>
+          </a:bodyPr>
+          <a:lstStyle/>
+          <a:p>
+            <a:pPr algn="l">
+              <a:lnSpc>
+                <a:spcPct val="100000"/>
+              </a:lnSpc>
+            </a:pPr>
+            <a:r>
+              <a:rPr sz="1000" b="0">
                 <a:solidFill>
                   <a:srgbClr val="9C9CAA"/>
                 </a:solidFill>
                 <a:latin typeface="Arial"/>
               </a:rPr>
-              <a:t>The formula, the trend, the per-pillar breakdown.</a:t>
-            </a:r>
-          </a:p>
-        </p:txBody>
-      </p:sp>
-      <p:sp>
-        <p:nvSpPr>
-          <p:cNvPr id="13" name="Rounded Rectangle 12"/>
+              <a:t>120+ markets - consistent AI answer boxes - acquisition cost down</a:t>
+            </a:r>
+          </a:p>
+        </p:txBody>
+      </p:sp>
+      <p:sp>
+        <p:nvSpPr>
+          <p:cNvPr id="15" name="Rounded Rectangle 14"/>
           <p:cNvSpPr/>
           <p:nvPr/>
         </p:nvSpPr>
         <p:spPr>
           <a:xfrm>
-            <a:off x="822960" y="2715768"/>
-            <a:ext cx="502920" cy="502920"/>
+            <a:off x="822960" y="3383280"/>
+            <a:ext cx="5212080" cy="1371600"/>
           </a:xfrm>
           <a:prstGeom prst="roundRect">
             <a:avLst/>
           </a:prstGeom>
           <a:solidFill>
-            <a:srgbClr val="6366F1"/>
+            <a:srgbClr val="15151E"/>
           </a:solidFill>
-          <a:ln>
-            <a:noFill/>
+          <a:ln w="12700">
+            <a:solidFill>
+              <a:srgbClr val="2A2A36"/>
+            </a:solidFill>
           </a:ln>
           <a:effectLst/>
         </p:spPr>
@@ -8716,140 +9201,181 @@
       </p:sp>
       <p:sp>
         <p:nvSpPr>
-          <p:cNvPr id="14" name="TextBox 13"/>
-          <p:cNvSpPr txBox="1"/>
-          <p:nvPr/>
-        </p:nvSpPr>
-        <p:spPr>
-          <a:xfrm>
-            <a:off x="822960" y="2697479"/>
-            <a:ext cx="502920" cy="502920"/>
-          </a:xfrm>
-          <a:prstGeom prst="rect">
-            <a:avLst/>
-          </a:prstGeom>
-          <a:noFill/>
-        </p:spPr>
-        <p:txBody>
-          <a:bodyPr wrap="square" anchor="ctr" lIns="0" rIns="0" tIns="0" bIns="0">
-            <a:spAutoFit/>
-          </a:bodyPr>
-          <a:lstStyle/>
-          <a:p>
-            <a:pPr algn="ctr">
-              <a:lnSpc>
-                <a:spcPct val="100000"/>
-              </a:lnSpc>
-            </a:pPr>
-            <a:r>
-              <a:rPr sz="1800" b="1">
+          <p:cNvPr id="16" name="TextBox 15"/>
+          <p:cNvSpPr txBox="1"/>
+          <p:nvPr/>
+        </p:nvSpPr>
+        <p:spPr>
+          <a:xfrm>
+            <a:off x="1115568" y="3529584"/>
+            <a:ext cx="4663440" cy="274320"/>
+          </a:xfrm>
+          <a:prstGeom prst="rect">
+            <a:avLst/>
+          </a:prstGeom>
+          <a:noFill/>
+        </p:spPr>
+        <p:txBody>
+          <a:bodyPr wrap="square" anchor="t" lIns="0" rIns="0" tIns="0" bIns="0">
+            <a:spAutoFit/>
+          </a:bodyPr>
+          <a:lstStyle/>
+          <a:p>
+            <a:pPr algn="l">
+              <a:lnSpc>
+                <a:spcPct val="100000"/>
+              </a:lnSpc>
+            </a:pPr>
+            <a:r>
+              <a:rPr sz="1050" b="1">
+                <a:solidFill>
+                  <a:srgbClr val="A5B4FC"/>
+                </a:solidFill>
+                <a:latin typeface="Arial"/>
+              </a:rPr>
+              <a:t>Commerce</a:t>
+            </a:r>
+          </a:p>
+        </p:txBody>
+      </p:sp>
+      <p:sp>
+        <p:nvSpPr>
+          <p:cNvPr id="17" name="TextBox 16"/>
+          <p:cNvSpPr txBox="1"/>
+          <p:nvPr/>
+        </p:nvSpPr>
+        <p:spPr>
+          <a:xfrm>
+            <a:off x="1115568" y="3785616"/>
+            <a:ext cx="4663440" cy="365760"/>
+          </a:xfrm>
+          <a:prstGeom prst="rect">
+            <a:avLst/>
+          </a:prstGeom>
+          <a:noFill/>
+        </p:spPr>
+        <p:txBody>
+          <a:bodyPr wrap="square" anchor="t" lIns="0" rIns="0" tIns="0" bIns="0">
+            <a:spAutoFit/>
+          </a:bodyPr>
+          <a:lstStyle/>
+          <a:p>
+            <a:pPr algn="l">
+              <a:lnSpc>
+                <a:spcPct val="100000"/>
+              </a:lnSpc>
+            </a:pPr>
+            <a:r>
+              <a:rPr sz="1600" b="1">
                 <a:solidFill>
                   <a:srgbClr val="F3F3F6"/>
                 </a:solidFill>
                 <a:latin typeface="Arial"/>
               </a:rPr>
-              <a:t>3</a:t>
-            </a:r>
-          </a:p>
-        </p:txBody>
-      </p:sp>
-      <p:sp>
-        <p:nvSpPr>
-          <p:cNvPr id="15" name="TextBox 14"/>
-          <p:cNvSpPr txBox="1"/>
-          <p:nvPr/>
-        </p:nvSpPr>
-        <p:spPr>
-          <a:xfrm>
-            <a:off x="1508760" y="2697479"/>
-            <a:ext cx="4663440" cy="365760"/>
-          </a:xfrm>
-          <a:prstGeom prst="rect">
-            <a:avLst/>
-          </a:prstGeom>
-          <a:noFill/>
-        </p:spPr>
-        <p:txBody>
-          <a:bodyPr wrap="square" anchor="t" lIns="0" rIns="0" tIns="0" bIns="0">
-            <a:spAutoFit/>
-          </a:bodyPr>
-          <a:lstStyle/>
-          <a:p>
-            <a:pPr algn="l">
-              <a:lnSpc>
-                <a:spcPct val="100000"/>
-              </a:lnSpc>
-            </a:pPr>
-            <a:r>
-              <a:rPr sz="1450" b="1">
-                <a:solidFill>
-                  <a:srgbClr val="F3F3F6"/>
-                </a:solidFill>
-                <a:latin typeface="Arial"/>
-              </a:rPr>
-              <a:t>Client deep dive</a:t>
-            </a:r>
-          </a:p>
-        </p:txBody>
-      </p:sp>
-      <p:sp>
-        <p:nvSpPr>
-          <p:cNvPr id="16" name="TextBox 15"/>
-          <p:cNvSpPr txBox="1"/>
-          <p:nvPr/>
-        </p:nvSpPr>
-        <p:spPr>
-          <a:xfrm>
-            <a:off x="1508760" y="3026663"/>
-            <a:ext cx="4663440" cy="457200"/>
-          </a:xfrm>
-          <a:prstGeom prst="rect">
-            <a:avLst/>
-          </a:prstGeom>
-          <a:noFill/>
-        </p:spPr>
-        <p:txBody>
-          <a:bodyPr wrap="square" anchor="t" lIns="0" rIns="0" tIns="0" bIns="0">
-            <a:spAutoFit/>
-          </a:bodyPr>
-          <a:lstStyle/>
-          <a:p>
-            <a:pPr algn="l">
-              <a:lnSpc>
-                <a:spcPct val="100000"/>
-              </a:lnSpc>
-            </a:pPr>
-            <a:r>
-              <a:rPr sz="1150" b="0">
+              <a:t>MVP in 2 months, not 10</a:t>
+            </a:r>
+          </a:p>
+        </p:txBody>
+      </p:sp>
+      <p:sp>
+        <p:nvSpPr>
+          <p:cNvPr id="18" name="TextBox 17"/>
+          <p:cNvSpPr txBox="1"/>
+          <p:nvPr/>
+        </p:nvSpPr>
+        <p:spPr>
+          <a:xfrm>
+            <a:off x="1115568" y="4133088"/>
+            <a:ext cx="4663440" cy="274320"/>
+          </a:xfrm>
+          <a:prstGeom prst="rect">
+            <a:avLst/>
+          </a:prstGeom>
+          <a:noFill/>
+        </p:spPr>
+        <p:txBody>
+          <a:bodyPr wrap="square" anchor="t" lIns="0" rIns="0" tIns="0" bIns="0">
+            <a:spAutoFit/>
+          </a:bodyPr>
+          <a:lstStyle/>
+          <a:p>
+            <a:pPr algn="l">
+              <a:lnSpc>
+                <a:spcPct val="100000"/>
+              </a:lnSpc>
+            </a:pPr>
+            <a:r>
+              <a:rPr sz="1050" b="0">
+                <a:solidFill>
+                  <a:srgbClr val="6B6B77"/>
+                </a:solidFill>
+                <a:latin typeface="Arial"/>
+              </a:rPr>
+              <a:t>KSA megaproject (PIF)</a:t>
+            </a:r>
+          </a:p>
+        </p:txBody>
+      </p:sp>
+      <p:sp>
+        <p:nvSpPr>
+          <p:cNvPr id="19" name="TextBox 18"/>
+          <p:cNvSpPr txBox="1"/>
+          <p:nvPr/>
+        </p:nvSpPr>
+        <p:spPr>
+          <a:xfrm>
+            <a:off x="1115568" y="4370832"/>
+            <a:ext cx="4663440" cy="320040"/>
+          </a:xfrm>
+          <a:prstGeom prst="rect">
+            <a:avLst/>
+          </a:prstGeom>
+          <a:noFill/>
+        </p:spPr>
+        <p:txBody>
+          <a:bodyPr wrap="square" anchor="t" lIns="0" rIns="0" tIns="0" bIns="0">
+            <a:spAutoFit/>
+          </a:bodyPr>
+          <a:lstStyle/>
+          <a:p>
+            <a:pPr algn="l">
+              <a:lnSpc>
+                <a:spcPct val="100000"/>
+              </a:lnSpc>
+            </a:pPr>
+            <a:r>
+              <a:rPr sz="1000" b="0">
                 <a:solidFill>
                   <a:srgbClr val="9C9CAA"/>
                 </a:solidFill>
                 <a:latin typeface="Arial"/>
               </a:rPr>
-              <a:t>Drill into one account + its real case result.</a:t>
-            </a:r>
-          </a:p>
-        </p:txBody>
-      </p:sp>
-      <p:sp>
-        <p:nvSpPr>
-          <p:cNvPr id="17" name="Rounded Rectangle 16"/>
+              <a:t>Time to MVP 2 mo (vs 10) - build time -55% - requirements -40%</a:t>
+            </a:r>
+          </a:p>
+        </p:txBody>
+      </p:sp>
+      <p:sp>
+        <p:nvSpPr>
+          <p:cNvPr id="20" name="Rounded Rectangle 19"/>
           <p:cNvSpPr/>
           <p:nvPr/>
         </p:nvSpPr>
         <p:spPr>
           <a:xfrm>
-            <a:off x="6400800" y="2715768"/>
-            <a:ext cx="502920" cy="502920"/>
+            <a:off x="6400800" y="3383280"/>
+            <a:ext cx="5212080" cy="1371600"/>
           </a:xfrm>
           <a:prstGeom prst="roundRect">
             <a:avLst/>
           </a:prstGeom>
           <a:solidFill>
-            <a:srgbClr val="6366F1"/>
+            <a:srgbClr val="15151E"/>
           </a:solidFill>
-          <a:ln>
-            <a:noFill/>
+          <a:ln w="12700">
+            <a:solidFill>
+              <a:srgbClr val="2A2A36"/>
+            </a:solidFill>
           </a:ln>
           <a:effectLst/>
         </p:spPr>
@@ -8877,361 +9403,252 @@
       </p:sp>
       <p:sp>
         <p:nvSpPr>
-          <p:cNvPr id="18" name="TextBox 17"/>
-          <p:cNvSpPr txBox="1"/>
-          <p:nvPr/>
-        </p:nvSpPr>
-        <p:spPr>
-          <a:xfrm>
-            <a:off x="6400800" y="2697479"/>
-            <a:ext cx="502920" cy="502920"/>
-          </a:xfrm>
-          <a:prstGeom prst="rect">
-            <a:avLst/>
-          </a:prstGeom>
-          <a:noFill/>
-        </p:spPr>
-        <p:txBody>
-          <a:bodyPr wrap="square" anchor="ctr" lIns="0" rIns="0" tIns="0" bIns="0">
-            <a:spAutoFit/>
-          </a:bodyPr>
-          <a:lstStyle/>
-          <a:p>
-            <a:pPr algn="ctr">
-              <a:lnSpc>
-                <a:spcPct val="100000"/>
-              </a:lnSpc>
-            </a:pPr>
-            <a:r>
-              <a:rPr sz="1800" b="1">
+          <p:cNvPr id="21" name="TextBox 20"/>
+          <p:cNvSpPr txBox="1"/>
+          <p:nvPr/>
+        </p:nvSpPr>
+        <p:spPr>
+          <a:xfrm>
+            <a:off x="6693408" y="3529584"/>
+            <a:ext cx="4663440" cy="274320"/>
+          </a:xfrm>
+          <a:prstGeom prst="rect">
+            <a:avLst/>
+          </a:prstGeom>
+          <a:noFill/>
+        </p:spPr>
+        <p:txBody>
+          <a:bodyPr wrap="square" anchor="t" lIns="0" rIns="0" tIns="0" bIns="0">
+            <a:spAutoFit/>
+          </a:bodyPr>
+          <a:lstStyle/>
+          <a:p>
+            <a:pPr algn="l">
+              <a:lnSpc>
+                <a:spcPct val="100000"/>
+              </a:lnSpc>
+            </a:pPr>
+            <a:r>
+              <a:rPr sz="1050" b="1">
+                <a:solidFill>
+                  <a:srgbClr val="A5B4FC"/>
+                </a:solidFill>
+                <a:latin typeface="Arial"/>
+              </a:rPr>
+              <a:t>Data &amp; AI CoE</a:t>
+            </a:r>
+          </a:p>
+        </p:txBody>
+      </p:sp>
+      <p:sp>
+        <p:nvSpPr>
+          <p:cNvPr id="22" name="TextBox 21"/>
+          <p:cNvSpPr txBox="1"/>
+          <p:nvPr/>
+        </p:nvSpPr>
+        <p:spPr>
+          <a:xfrm>
+            <a:off x="6693408" y="3785616"/>
+            <a:ext cx="4663440" cy="365760"/>
+          </a:xfrm>
+          <a:prstGeom prst="rect">
+            <a:avLst/>
+          </a:prstGeom>
+          <a:noFill/>
+        </p:spPr>
+        <p:txBody>
+          <a:bodyPr wrap="square" anchor="t" lIns="0" rIns="0" tIns="0" bIns="0">
+            <a:spAutoFit/>
+          </a:bodyPr>
+          <a:lstStyle/>
+          <a:p>
+            <a:pPr algn="l">
+              <a:lnSpc>
+                <a:spcPct val="100000"/>
+              </a:lnSpc>
+            </a:pPr>
+            <a:r>
+              <a:rPr sz="1600" b="1">
                 <a:solidFill>
                   <a:srgbClr val="F3F3F6"/>
                 </a:solidFill>
                 <a:latin typeface="Arial"/>
               </a:rPr>
-              <a:t>4</a:t>
-            </a:r>
-          </a:p>
-        </p:txBody>
-      </p:sp>
-      <p:sp>
-        <p:nvSpPr>
-          <p:cNvPr id="19" name="TextBox 18"/>
-          <p:cNvSpPr txBox="1"/>
-          <p:nvPr/>
-        </p:nvSpPr>
-        <p:spPr>
-          <a:xfrm>
-            <a:off x="7086600" y="2697479"/>
-            <a:ext cx="4663440" cy="365760"/>
-          </a:xfrm>
-          <a:prstGeom prst="rect">
-            <a:avLst/>
-          </a:prstGeom>
-          <a:noFill/>
-        </p:spPr>
-        <p:txBody>
-          <a:bodyPr wrap="square" anchor="t" lIns="0" rIns="0" tIns="0" bIns="0">
-            <a:spAutoFit/>
-          </a:bodyPr>
-          <a:lstStyle/>
-          <a:p>
-            <a:pPr algn="l">
-              <a:lnSpc>
-                <a:spcPct val="100000"/>
-              </a:lnSpc>
-            </a:pPr>
-            <a:r>
-              <a:rPr sz="1450" b="1">
+              <a:t>Campaign cycles: weeks to minutes</a:t>
+            </a:r>
+          </a:p>
+        </p:txBody>
+      </p:sp>
+      <p:sp>
+        <p:nvSpPr>
+          <p:cNvPr id="23" name="TextBox 22"/>
+          <p:cNvSpPr txBox="1"/>
+          <p:nvPr/>
+        </p:nvSpPr>
+        <p:spPr>
+          <a:xfrm>
+            <a:off x="6693408" y="4133088"/>
+            <a:ext cx="4663440" cy="274320"/>
+          </a:xfrm>
+          <a:prstGeom prst="rect">
+            <a:avLst/>
+          </a:prstGeom>
+          <a:noFill/>
+        </p:spPr>
+        <p:txBody>
+          <a:bodyPr wrap="square" anchor="t" lIns="0" rIns="0" tIns="0" bIns="0">
+            <a:spAutoFit/>
+          </a:bodyPr>
+          <a:lstStyle/>
+          <a:p>
+            <a:pPr algn="l">
+              <a:lnSpc>
+                <a:spcPct val="100000"/>
+              </a:lnSpc>
+            </a:pPr>
+            <a:r>
+              <a:rPr sz="1050" b="0">
+                <a:solidFill>
+                  <a:srgbClr val="6B6B77"/>
+                </a:solidFill>
+                <a:latin typeface="Arial"/>
+              </a:rPr>
+              <a:t>FPT x Salesforce ASEAN CoE</a:t>
+            </a:r>
+          </a:p>
+        </p:txBody>
+      </p:sp>
+      <p:sp>
+        <p:nvSpPr>
+          <p:cNvPr id="24" name="TextBox 23"/>
+          <p:cNvSpPr txBox="1"/>
+          <p:nvPr/>
+        </p:nvSpPr>
+        <p:spPr>
+          <a:xfrm>
+            <a:off x="6693408" y="4370832"/>
+            <a:ext cx="4663440" cy="320040"/>
+          </a:xfrm>
+          <a:prstGeom prst="rect">
+            <a:avLst/>
+          </a:prstGeom>
+          <a:noFill/>
+        </p:spPr>
+        <p:txBody>
+          <a:bodyPr wrap="square" anchor="t" lIns="0" rIns="0" tIns="0" bIns="0">
+            <a:spAutoFit/>
+          </a:bodyPr>
+          <a:lstStyle/>
+          <a:p>
+            <a:pPr algn="l">
+              <a:lnSpc>
+                <a:spcPct val="100000"/>
+              </a:lnSpc>
+            </a:pPr>
+            <a:r>
+              <a:rPr sz="1000" b="0">
+                <a:solidFill>
+                  <a:srgbClr val="9C9CAA"/>
+                </a:solidFill>
+                <a:latin typeface="Arial"/>
+              </a:rPr>
+              <a:t>First in ASEAN - weeks to minutes - ~100 Agentforce certs by 2026</a:t>
+            </a:r>
+          </a:p>
+        </p:txBody>
+      </p:sp>
+      <p:sp>
+        <p:nvSpPr>
+          <p:cNvPr id="25" name="TextBox 24"/>
+          <p:cNvSpPr txBox="1"/>
+          <p:nvPr/>
+        </p:nvSpPr>
+        <p:spPr>
+          <a:xfrm>
+            <a:off x="822960" y="4983480"/>
+            <a:ext cx="10424160" cy="274320"/>
+          </a:xfrm>
+          <a:prstGeom prst="rect">
+            <a:avLst/>
+          </a:prstGeom>
+          <a:noFill/>
+        </p:spPr>
+        <p:txBody>
+          <a:bodyPr wrap="square" anchor="t" lIns="0" rIns="0" tIns="0" bIns="0">
+            <a:spAutoFit/>
+          </a:bodyPr>
+          <a:lstStyle/>
+          <a:p>
+            <a:pPr algn="l">
+              <a:lnSpc>
+                <a:spcPct val="110000"/>
+              </a:lnSpc>
+            </a:pPr>
+            <a:r>
+              <a:rPr sz="1100" b="1">
+                <a:solidFill>
+                  <a:srgbClr val="A5B4FC"/>
+                </a:solidFill>
+                <a:latin typeface="Arial"/>
+              </a:rPr>
+              <a:t>FPT PARTNERS:  </a:t>
+            </a:r>
+            <a:r>
+              <a:rPr sz="1100" b="0">
+                <a:solidFill>
+                  <a:srgbClr val="9C9CAA"/>
+                </a:solidFill>
+                <a:latin typeface="Arial"/>
+              </a:rPr>
+              <a:t>Adobe (Specialized)  Sitecore (Platinum APAC)  Salesforce (First ASEAN Data &amp; AI CoE)  Liferay (Global Platinum)  Shopify (Plus)</a:t>
+            </a:r>
+          </a:p>
+        </p:txBody>
+      </p:sp>
+      <p:sp>
+        <p:nvSpPr>
+          <p:cNvPr id="26" name="TextBox 25"/>
+          <p:cNvSpPr txBox="1"/>
+          <p:nvPr/>
+        </p:nvSpPr>
+        <p:spPr>
+          <a:xfrm>
+            <a:off x="822960" y="5440680"/>
+            <a:ext cx="10424160" cy="365760"/>
+          </a:xfrm>
+          <a:prstGeom prst="rect">
+            <a:avLst/>
+          </a:prstGeom>
+          <a:noFill/>
+        </p:spPr>
+        <p:txBody>
+          <a:bodyPr wrap="square" anchor="t" lIns="0" rIns="0" tIns="0" bIns="0">
+            <a:spAutoFit/>
+          </a:bodyPr>
+          <a:lstStyle/>
+          <a:p>
+            <a:pPr algn="l">
+              <a:lnSpc>
+                <a:spcPct val="100000"/>
+              </a:lnSpc>
+            </a:pPr>
+            <a:r>
+              <a:rPr sz="1400" b="1">
                 <a:solidFill>
                   <a:srgbClr val="F3F3F6"/>
                 </a:solidFill>
                 <a:latin typeface="Arial"/>
               </a:rPr>
-              <a:t>Billing -&gt; Live</a:t>
-            </a:r>
-          </a:p>
-        </p:txBody>
-      </p:sp>
-      <p:sp>
-        <p:nvSpPr>
-          <p:cNvPr id="20" name="TextBox 19"/>
-          <p:cNvSpPr txBox="1"/>
-          <p:nvPr/>
-        </p:nvSpPr>
-        <p:spPr>
-          <a:xfrm>
-            <a:off x="7086600" y="3026663"/>
-            <a:ext cx="4663440" cy="457200"/>
-          </a:xfrm>
-          <a:prstGeom prst="rect">
-            <a:avLst/>
-          </a:prstGeom>
-          <a:noFill/>
-        </p:spPr>
-        <p:txBody>
-          <a:bodyPr wrap="square" anchor="t" lIns="0" rIns="0" tIns="0" bIns="0">
-            <a:spAutoFit/>
-          </a:bodyPr>
-          <a:lstStyle/>
-          <a:p>
-            <a:pPr algn="l">
-              <a:lnSpc>
-                <a:spcPct val="100000"/>
-              </a:lnSpc>
-            </a:pPr>
-            <a:r>
-              <a:rPr sz="1150" b="0">
-                <a:solidFill>
-                  <a:srgbClr val="9C9CAA"/>
-                </a:solidFill>
-                <a:latin typeface="Arial"/>
-              </a:rPr>
-              <a:t>Real Metronome invoices and commit drawdown.</a:t>
-            </a:r>
-          </a:p>
-        </p:txBody>
-      </p:sp>
-      <p:sp>
-        <p:nvSpPr>
-          <p:cNvPr id="21" name="Rounded Rectangle 20"/>
-          <p:cNvSpPr/>
-          <p:nvPr/>
-        </p:nvSpPr>
-        <p:spPr>
-          <a:xfrm>
-            <a:off x="822960" y="3648456"/>
-            <a:ext cx="502920" cy="502920"/>
-          </a:xfrm>
-          <a:prstGeom prst="roundRect">
-            <a:avLst/>
-          </a:prstGeom>
-          <a:solidFill>
-            <a:srgbClr val="6366F1"/>
-          </a:solidFill>
-          <a:ln>
-            <a:noFill/>
-          </a:ln>
-          <a:effectLst/>
-        </p:spPr>
-        <p:style>
-          <a:lnRef idx="1">
-            <a:schemeClr val="accent1"/>
-          </a:lnRef>
-          <a:fillRef idx="3">
-            <a:schemeClr val="accent1"/>
-          </a:fillRef>
-          <a:effectRef idx="2">
-            <a:schemeClr val="accent1"/>
-          </a:effectRef>
-          <a:fontRef idx="minor">
-            <a:schemeClr val="lt1"/>
-          </a:fontRef>
-        </p:style>
-        <p:txBody>
-          <a:bodyPr rtlCol="0" anchor="ctr"/>
-          <a:lstStyle/>
-          <a:p>
-            <a:pPr algn="ctr"/>
-          </a:p>
-        </p:txBody>
-      </p:sp>
-      <p:sp>
-        <p:nvSpPr>
-          <p:cNvPr id="22" name="TextBox 21"/>
-          <p:cNvSpPr txBox="1"/>
-          <p:nvPr/>
-        </p:nvSpPr>
-        <p:spPr>
-          <a:xfrm>
-            <a:off x="822960" y="3630168"/>
-            <a:ext cx="502920" cy="502920"/>
-          </a:xfrm>
-          <a:prstGeom prst="rect">
-            <a:avLst/>
-          </a:prstGeom>
-          <a:noFill/>
-        </p:spPr>
-        <p:txBody>
-          <a:bodyPr wrap="square" anchor="ctr" lIns="0" rIns="0" tIns="0" bIns="0">
-            <a:spAutoFit/>
-          </a:bodyPr>
-          <a:lstStyle/>
-          <a:p>
-            <a:pPr algn="ctr">
-              <a:lnSpc>
-                <a:spcPct val="100000"/>
-              </a:lnSpc>
-            </a:pPr>
-            <a:r>
-              <a:rPr sz="1800" b="1">
-                <a:solidFill>
-                  <a:srgbClr val="F3F3F6"/>
-                </a:solidFill>
-                <a:latin typeface="Arial"/>
-              </a:rPr>
-              <a:t>5</a:t>
-            </a:r>
-          </a:p>
-        </p:txBody>
-      </p:sp>
-      <p:sp>
-        <p:nvSpPr>
-          <p:cNvPr id="23" name="TextBox 22"/>
-          <p:cNvSpPr txBox="1"/>
-          <p:nvPr/>
-        </p:nvSpPr>
-        <p:spPr>
-          <a:xfrm>
-            <a:off x="1508760" y="3630168"/>
-            <a:ext cx="4663440" cy="365760"/>
-          </a:xfrm>
-          <a:prstGeom prst="rect">
-            <a:avLst/>
-          </a:prstGeom>
-          <a:noFill/>
-        </p:spPr>
-        <p:txBody>
-          <a:bodyPr wrap="square" anchor="t" lIns="0" rIns="0" tIns="0" bIns="0">
-            <a:spAutoFit/>
-          </a:bodyPr>
-          <a:lstStyle/>
-          <a:p>
-            <a:pPr algn="l">
-              <a:lnSpc>
-                <a:spcPct val="100000"/>
-              </a:lnSpc>
-            </a:pPr>
-            <a:r>
-              <a:rPr sz="1450" b="1">
-                <a:solidFill>
-                  <a:srgbClr val="F3F3F6"/>
-                </a:solidFill>
-                <a:latin typeface="Arial"/>
-              </a:rPr>
-              <a:t>Customer portal</a:t>
-            </a:r>
-          </a:p>
-        </p:txBody>
-      </p:sp>
-      <p:sp>
-        <p:nvSpPr>
-          <p:cNvPr id="24" name="TextBox 23"/>
-          <p:cNvSpPr txBox="1"/>
-          <p:nvPr/>
-        </p:nvSpPr>
-        <p:spPr>
-          <a:xfrm>
-            <a:off x="1508760" y="3959352"/>
-            <a:ext cx="4663440" cy="457200"/>
-          </a:xfrm>
-          <a:prstGeom prst="rect">
-            <a:avLst/>
-          </a:prstGeom>
-          <a:noFill/>
-        </p:spPr>
-        <p:txBody>
-          <a:bodyPr wrap="square" anchor="t" lIns="0" rIns="0" tIns="0" bIns="0">
-            <a:spAutoFit/>
-          </a:bodyPr>
-          <a:lstStyle/>
-          <a:p>
-            <a:pPr algn="l">
-              <a:lnSpc>
-                <a:spcPct val="100000"/>
-              </a:lnSpc>
-            </a:pPr>
-            <a:r>
-              <a:rPr sz="1150" b="0">
-                <a:solidFill>
-                  <a:srgbClr val="9C9CAA"/>
-                </a:solidFill>
-                <a:latin typeface="Arial"/>
-              </a:rPr>
-              <a:t>The same engagement, the client's own view.</a:t>
-            </a:r>
-          </a:p>
-        </p:txBody>
-      </p:sp>
-      <p:sp>
-        <p:nvSpPr>
-          <p:cNvPr id="25" name="Rounded Rectangle 24"/>
-          <p:cNvSpPr/>
-          <p:nvPr/>
-        </p:nvSpPr>
-        <p:spPr>
-          <a:xfrm>
-            <a:off x="6400800" y="3648456"/>
-            <a:ext cx="502920" cy="502920"/>
-          </a:xfrm>
-          <a:prstGeom prst="roundRect">
-            <a:avLst/>
-          </a:prstGeom>
-          <a:solidFill>
-            <a:srgbClr val="6366F1"/>
-          </a:solidFill>
-          <a:ln>
-            <a:noFill/>
-          </a:ln>
-          <a:effectLst/>
-        </p:spPr>
-        <p:style>
-          <a:lnRef idx="1">
-            <a:schemeClr val="accent1"/>
-          </a:lnRef>
-          <a:fillRef idx="3">
-            <a:schemeClr val="accent1"/>
-          </a:fillRef>
-          <a:effectRef idx="2">
-            <a:schemeClr val="accent1"/>
-          </a:effectRef>
-          <a:fontRef idx="minor">
-            <a:schemeClr val="lt1"/>
-          </a:fontRef>
-        </p:style>
-        <p:txBody>
-          <a:bodyPr rtlCol="0" anchor="ctr"/>
-          <a:lstStyle/>
-          <a:p>
-            <a:pPr algn="ctr"/>
-          </a:p>
-        </p:txBody>
-      </p:sp>
-      <p:sp>
-        <p:nvSpPr>
-          <p:cNvPr id="26" name="TextBox 25"/>
-          <p:cNvSpPr txBox="1"/>
-          <p:nvPr/>
-        </p:nvSpPr>
-        <p:spPr>
-          <a:xfrm>
-            <a:off x="6400800" y="3630168"/>
-            <a:ext cx="502920" cy="502920"/>
-          </a:xfrm>
-          <a:prstGeom prst="rect">
-            <a:avLst/>
-          </a:prstGeom>
-          <a:noFill/>
-        </p:spPr>
-        <p:txBody>
-          <a:bodyPr wrap="square" anchor="ctr" lIns="0" rIns="0" tIns="0" bIns="0">
-            <a:spAutoFit/>
-          </a:bodyPr>
-          <a:lstStyle/>
-          <a:p>
-            <a:pPr algn="ctr">
-              <a:lnSpc>
-                <a:spcPct val="100000"/>
-              </a:lnSpc>
-            </a:pPr>
-            <a:r>
-              <a:rPr sz="1800" b="1">
-                <a:solidFill>
-                  <a:srgbClr val="F3F3F6"/>
-                </a:solidFill>
-                <a:latin typeface="Arial"/>
-              </a:rPr>
-              <a:t>6</a:t>
+              <a:t>1,000+ certified engineers      1,500+ platform certifications</a:t>
+            </a:r>
+            <a:r>
+              <a:rPr sz="1000" b="0">
+                <a:solidFill>
+                  <a:srgbClr val="6B6B77"/>
+                </a:solidFill>
+                <a:latin typeface="Arial"/>
+              </a:rPr>
+              <a:t>      FPT Corporation's public figures</a:t>
             </a:r>
           </a:p>
         </p:txBody>
@@ -9239,293 +9656,6 @@
       <p:sp>
         <p:nvSpPr>
           <p:cNvPr id="27" name="TextBox 26"/>
-          <p:cNvSpPr txBox="1"/>
-          <p:nvPr/>
-        </p:nvSpPr>
-        <p:spPr>
-          <a:xfrm>
-            <a:off x="7086600" y="3630168"/>
-            <a:ext cx="4663440" cy="365760"/>
-          </a:xfrm>
-          <a:prstGeom prst="rect">
-            <a:avLst/>
-          </a:prstGeom>
-          <a:noFill/>
-        </p:spPr>
-        <p:txBody>
-          <a:bodyPr wrap="square" anchor="t" lIns="0" rIns="0" tIns="0" bIns="0">
-            <a:spAutoFit/>
-          </a:bodyPr>
-          <a:lstStyle/>
-          <a:p>
-            <a:pPr algn="l">
-              <a:lnSpc>
-                <a:spcPct val="100000"/>
-              </a:lnSpc>
-            </a:pPr>
-            <a:r>
-              <a:rPr sz="1450" b="1">
-                <a:solidFill>
-                  <a:srgbClr val="F3F3F6"/>
-                </a:solidFill>
-                <a:latin typeface="Arial"/>
-              </a:rPr>
-              <a:t>AI marketplace</a:t>
-            </a:r>
-          </a:p>
-        </p:txBody>
-      </p:sp>
-      <p:sp>
-        <p:nvSpPr>
-          <p:cNvPr id="28" name="TextBox 27"/>
-          <p:cNvSpPr txBox="1"/>
-          <p:nvPr/>
-        </p:nvSpPr>
-        <p:spPr>
-          <a:xfrm>
-            <a:off x="7086600" y="3959352"/>
-            <a:ext cx="4663440" cy="457200"/>
-          </a:xfrm>
-          <a:prstGeom prst="rect">
-            <a:avLst/>
-          </a:prstGeom>
-          <a:noFill/>
-        </p:spPr>
-        <p:txBody>
-          <a:bodyPr wrap="square" anchor="t" lIns="0" rIns="0" tIns="0" bIns="0">
-            <a:spAutoFit/>
-          </a:bodyPr>
-          <a:lstStyle/>
-          <a:p>
-            <a:pPr algn="l">
-              <a:lnSpc>
-                <a:spcPct val="100000"/>
-              </a:lnSpc>
-            </a:pPr>
-            <a:r>
-              <a:rPr sz="1150" b="0">
-                <a:solidFill>
-                  <a:srgbClr val="9C9CAA"/>
-                </a:solidFill>
-                <a:latin typeface="Arial"/>
-              </a:rPr>
-              <a:t>Launch a new Vela agent in a click.</a:t>
-            </a:r>
-          </a:p>
-        </p:txBody>
-      </p:sp>
-      <p:sp>
-        <p:nvSpPr>
-          <p:cNvPr id="29" name="Rounded Rectangle 28"/>
-          <p:cNvSpPr/>
-          <p:nvPr/>
-        </p:nvSpPr>
-        <p:spPr>
-          <a:xfrm>
-            <a:off x="822960" y="4581144"/>
-            <a:ext cx="502920" cy="502920"/>
-          </a:xfrm>
-          <a:prstGeom prst="roundRect">
-            <a:avLst/>
-          </a:prstGeom>
-          <a:solidFill>
-            <a:srgbClr val="6366F1"/>
-          </a:solidFill>
-          <a:ln>
-            <a:noFill/>
-          </a:ln>
-          <a:effectLst/>
-        </p:spPr>
-        <p:style>
-          <a:lnRef idx="1">
-            <a:schemeClr val="accent1"/>
-          </a:lnRef>
-          <a:fillRef idx="3">
-            <a:schemeClr val="accent1"/>
-          </a:fillRef>
-          <a:effectRef idx="2">
-            <a:schemeClr val="accent1"/>
-          </a:effectRef>
-          <a:fontRef idx="minor">
-            <a:schemeClr val="lt1"/>
-          </a:fontRef>
-        </p:style>
-        <p:txBody>
-          <a:bodyPr rtlCol="0" anchor="ctr"/>
-          <a:lstStyle/>
-          <a:p>
-            <a:pPr algn="ctr"/>
-          </a:p>
-        </p:txBody>
-      </p:sp>
-      <p:sp>
-        <p:nvSpPr>
-          <p:cNvPr id="30" name="TextBox 29"/>
-          <p:cNvSpPr txBox="1"/>
-          <p:nvPr/>
-        </p:nvSpPr>
-        <p:spPr>
-          <a:xfrm>
-            <a:off x="822960" y="4562856"/>
-            <a:ext cx="502920" cy="502920"/>
-          </a:xfrm>
-          <a:prstGeom prst="rect">
-            <a:avLst/>
-          </a:prstGeom>
-          <a:noFill/>
-        </p:spPr>
-        <p:txBody>
-          <a:bodyPr wrap="square" anchor="ctr" lIns="0" rIns="0" tIns="0" bIns="0">
-            <a:spAutoFit/>
-          </a:bodyPr>
-          <a:lstStyle/>
-          <a:p>
-            <a:pPr algn="ctr">
-              <a:lnSpc>
-                <a:spcPct val="100000"/>
-              </a:lnSpc>
-            </a:pPr>
-            <a:r>
-              <a:rPr sz="1800" b="1">
-                <a:solidFill>
-                  <a:srgbClr val="F3F3F6"/>
-                </a:solidFill>
-                <a:latin typeface="Arial"/>
-              </a:rPr>
-              <a:t>7</a:t>
-            </a:r>
-          </a:p>
-        </p:txBody>
-      </p:sp>
-      <p:sp>
-        <p:nvSpPr>
-          <p:cNvPr id="31" name="TextBox 30"/>
-          <p:cNvSpPr txBox="1"/>
-          <p:nvPr/>
-        </p:nvSpPr>
-        <p:spPr>
-          <a:xfrm>
-            <a:off x="1508760" y="4562856"/>
-            <a:ext cx="4663440" cy="365760"/>
-          </a:xfrm>
-          <a:prstGeom prst="rect">
-            <a:avLst/>
-          </a:prstGeom>
-          <a:noFill/>
-        </p:spPr>
-        <p:txBody>
-          <a:bodyPr wrap="square" anchor="t" lIns="0" rIns="0" tIns="0" bIns="0">
-            <a:spAutoFit/>
-          </a:bodyPr>
-          <a:lstStyle/>
-          <a:p>
-            <a:pPr algn="l">
-              <a:lnSpc>
-                <a:spcPct val="100000"/>
-              </a:lnSpc>
-            </a:pPr>
-            <a:r>
-              <a:rPr sz="1450" b="1">
-                <a:solidFill>
-                  <a:srgbClr val="F3F3F6"/>
-                </a:solidFill>
-                <a:latin typeface="Arial"/>
-              </a:rPr>
-              <a:t>Customer billing &amp; usage</a:t>
-            </a:r>
-          </a:p>
-        </p:txBody>
-      </p:sp>
-      <p:sp>
-        <p:nvSpPr>
-          <p:cNvPr id="32" name="TextBox 31"/>
-          <p:cNvSpPr txBox="1"/>
-          <p:nvPr/>
-        </p:nvSpPr>
-        <p:spPr>
-          <a:xfrm>
-            <a:off x="1508760" y="4892040"/>
-            <a:ext cx="4663440" cy="457200"/>
-          </a:xfrm>
-          <a:prstGeom prst="rect">
-            <a:avLst/>
-          </a:prstGeom>
-          <a:noFill/>
-        </p:spPr>
-        <p:txBody>
-          <a:bodyPr wrap="square" anchor="t" lIns="0" rIns="0" tIns="0" bIns="0">
-            <a:spAutoFit/>
-          </a:bodyPr>
-          <a:lstStyle/>
-          <a:p>
-            <a:pPr algn="l">
-              <a:lnSpc>
-                <a:spcPct val="100000"/>
-              </a:lnSpc>
-            </a:pPr>
-            <a:r>
-              <a:rPr sz="1150" b="0">
-                <a:solidFill>
-                  <a:srgbClr val="9C9CAA"/>
-                </a:solidFill>
-                <a:latin typeface="Arial"/>
-              </a:rPr>
-              <a:t>Credits, usage drawdown and top-up.</a:t>
-            </a:r>
-          </a:p>
-        </p:txBody>
-      </p:sp>
-      <p:sp>
-        <p:nvSpPr>
-          <p:cNvPr id="33" name="TextBox 32"/>
-          <p:cNvSpPr txBox="1"/>
-          <p:nvPr/>
-        </p:nvSpPr>
-        <p:spPr>
-          <a:xfrm>
-            <a:off x="822960" y="5943600"/>
-            <a:ext cx="10424160" cy="365760"/>
-          </a:xfrm>
-          <a:prstGeom prst="rect">
-            <a:avLst/>
-          </a:prstGeom>
-          <a:noFill/>
-        </p:spPr>
-        <p:txBody>
-          <a:bodyPr wrap="square" anchor="t" lIns="0" rIns="0" tIns="0" bIns="0">
-            <a:spAutoFit/>
-          </a:bodyPr>
-          <a:lstStyle/>
-          <a:p>
-            <a:pPr algn="l">
-              <a:lnSpc>
-                <a:spcPct val="100000"/>
-              </a:lnSpc>
-            </a:pPr>
-            <a:r>
-              <a:rPr sz="1200" b="0">
-                <a:solidFill>
-                  <a:srgbClr val="9C9CAA"/>
-                </a:solidFill>
-                <a:latin typeface="Arial"/>
-              </a:rPr>
-              <a:t>Step-by-step with deep links + talk track:  </a:t>
-            </a:r>
-            <a:r>
-              <a:rPr sz="1200" b="1">
-                <a:solidFill>
-                  <a:srgbClr val="A5B4FC"/>
-                </a:solidFill>
-                <a:latin typeface="Arial"/>
-              </a:rPr>
-              <a:t>https://roai.emergedigital.ae/guide</a:t>
-            </a:r>
-          </a:p>
-        </p:txBody>
-      </p:sp>
-      <p:sp>
-        <p:nvSpPr>
-          <p:cNvPr id="34" name="TextBox 33"/>
           <p:cNvSpPr txBox="1"/>
           <p:nvPr/>
         </p:nvSpPr>
@@ -9573,7 +9703,7 @@
       </p:sp>
       <p:sp>
         <p:nvSpPr>
-          <p:cNvPr id="35" name="TextBox 34"/>
+          <p:cNvPr id="28" name="TextBox 27"/>
           <p:cNvSpPr txBox="1"/>
           <p:nvPr/>
         </p:nvSpPr>
@@ -9674,14 +9804,131 @@
       </p:sp>
       <p:sp>
         <p:nvSpPr>
-          <p:cNvPr id="3" name="Rounded Rectangle 2"/>
+          <p:cNvPr id="3" name="TextBox 2"/>
+          <p:cNvSpPr txBox="1"/>
+          <p:nvPr/>
+        </p:nvSpPr>
+        <p:spPr>
+          <a:xfrm>
+            <a:off x="822960" y="566928"/>
+            <a:ext cx="10058400" cy="365760"/>
+          </a:xfrm>
+          <a:prstGeom prst="rect">
+            <a:avLst/>
+          </a:prstGeom>
+          <a:noFill/>
+        </p:spPr>
+        <p:txBody>
+          <a:bodyPr wrap="square" anchor="t" lIns="0" rIns="0" tIns="0" bIns="0">
+            <a:spAutoFit/>
+          </a:bodyPr>
+          <a:lstStyle/>
+          <a:p>
+            <a:pPr algn="l">
+              <a:lnSpc>
+                <a:spcPct val="100000"/>
+              </a:lnSpc>
+            </a:pPr>
+            <a:r>
+              <a:rPr sz="1200" b="1">
+                <a:solidFill>
+                  <a:srgbClr val="A5B4FC"/>
+                </a:solidFill>
+                <a:latin typeface="Arial"/>
+              </a:rPr>
+              <a:t>RUN THE DEMO</a:t>
+            </a:r>
+          </a:p>
+        </p:txBody>
+      </p:sp>
+      <p:sp>
+        <p:nvSpPr>
+          <p:cNvPr id="4" name="TextBox 3"/>
+          <p:cNvSpPr txBox="1"/>
+          <p:nvPr/>
+        </p:nvSpPr>
+        <p:spPr>
+          <a:xfrm>
+            <a:off x="822960" y="914400"/>
+            <a:ext cx="10515600" cy="1097280"/>
+          </a:xfrm>
+          <a:prstGeom prst="rect">
+            <a:avLst/>
+          </a:prstGeom>
+          <a:noFill/>
+        </p:spPr>
+        <p:txBody>
+          <a:bodyPr wrap="square" anchor="t" lIns="0" rIns="0" tIns="0" bIns="0">
+            <a:spAutoFit/>
+          </a:bodyPr>
+          <a:lstStyle/>
+          <a:p>
+            <a:pPr algn="l">
+              <a:lnSpc>
+                <a:spcPct val="100000"/>
+              </a:lnSpc>
+            </a:pPr>
+            <a:r>
+              <a:rPr sz="3300" b="1">
+                <a:solidFill>
+                  <a:srgbClr val="F3F3F6"/>
+                </a:solidFill>
+                <a:latin typeface="Arial"/>
+              </a:rPr>
+              <a:t>A 7-step walkthrough (~6-8 min).</a:t>
+            </a:r>
+          </a:p>
+        </p:txBody>
+      </p:sp>
+      <p:sp>
+        <p:nvSpPr>
+          <p:cNvPr id="5" name="TextBox 4"/>
+          <p:cNvSpPr txBox="1"/>
+          <p:nvPr/>
+        </p:nvSpPr>
+        <p:spPr>
+          <a:xfrm>
+            <a:off x="822960" y="5440680"/>
+            <a:ext cx="10515600" cy="411480"/>
+          </a:xfrm>
+          <a:prstGeom prst="rect">
+            <a:avLst/>
+          </a:prstGeom>
+          <a:noFill/>
+        </p:spPr>
+        <p:txBody>
+          <a:bodyPr wrap="square" anchor="t" lIns="0" rIns="0" tIns="0" bIns="0">
+            <a:spAutoFit/>
+          </a:bodyPr>
+          <a:lstStyle/>
+          <a:p>
+            <a:pPr algn="l">
+              <a:lnSpc>
+                <a:spcPct val="120000"/>
+              </a:lnSpc>
+            </a:pPr>
+            <a:r>
+              <a:rPr sz="1050" b="0">
+                <a:solidFill>
+                  <a:srgbClr val="6B6B77"/>
+                </a:solidFill>
+                <a:latin typeface="Arial"/>
+              </a:rPr>
+              <a:t>Six films on the guide: a 53-second tour of the whole line, plus one short per product (0:40-0:53). Every figure on screen is read from a live API response - nothing is illustrative.</a:t>
+            </a:r>
+          </a:p>
+        </p:txBody>
+      </p:sp>
+      <p:sp>
+        <p:nvSpPr>
+          <p:cNvPr id="6" name="Rounded Rectangle 5"/>
           <p:cNvSpPr/>
           <p:nvPr/>
         </p:nvSpPr>
         <p:spPr>
           <a:xfrm>
-            <a:off x="822960" y="2194560"/>
-            <a:ext cx="640080" cy="640080"/>
+            <a:off x="822960" y="1783080"/>
+            <a:ext cx="502920" cy="502920"/>
           </a:xfrm>
           <a:prstGeom prst="roundRect">
             <a:avLst/>
@@ -9718,14 +9965,14 @@
       </p:sp>
       <p:sp>
         <p:nvSpPr>
-          <p:cNvPr id="4" name="TextBox 3"/>
-          <p:cNvSpPr txBox="1"/>
-          <p:nvPr/>
-        </p:nvSpPr>
-        <p:spPr>
-          <a:xfrm>
-            <a:off x="822960" y="2176272"/>
-            <a:ext cx="640080" cy="640080"/>
+          <p:cNvPr id="7" name="TextBox 6"/>
+          <p:cNvSpPr txBox="1"/>
+          <p:nvPr/>
+        </p:nvSpPr>
+        <p:spPr>
+          <a:xfrm>
+            <a:off x="822960" y="1764792"/>
+            <a:ext cx="502920" cy="502920"/>
           </a:xfrm>
           <a:prstGeom prst="rect">
             <a:avLst/>
@@ -9744,116 +9991,114 @@
               </a:lnSpc>
             </a:pPr>
             <a:r>
-              <a:rPr sz="2800" b="1">
+              <a:rPr sz="1800" b="1">
                 <a:solidFill>
                   <a:srgbClr val="F3F3F6"/>
                 </a:solidFill>
                 <a:latin typeface="Arial"/>
               </a:rPr>
-              <a:t>V</a:t>
-            </a:r>
-          </a:p>
-        </p:txBody>
-      </p:sp>
-      <p:sp>
-        <p:nvSpPr>
-          <p:cNvPr id="5" name="TextBox 4"/>
-          <p:cNvSpPr txBox="1"/>
-          <p:nvPr/>
-        </p:nvSpPr>
-        <p:spPr>
-          <a:xfrm>
-            <a:off x="822960" y="3063240"/>
-            <a:ext cx="10515600" cy="914400"/>
-          </a:xfrm>
-          <a:prstGeom prst="rect">
-            <a:avLst/>
-          </a:prstGeom>
-          <a:noFill/>
-        </p:spPr>
-        <p:txBody>
-          <a:bodyPr wrap="square" anchor="t" lIns="0" rIns="0" tIns="0" bIns="0">
-            <a:spAutoFit/>
-          </a:bodyPr>
-          <a:lstStyle/>
-          <a:p>
-            <a:pPr algn="l">
-              <a:lnSpc>
-                <a:spcPct val="100000"/>
-              </a:lnSpc>
-            </a:pPr>
-            <a:r>
-              <a:rPr sz="4400" b="1">
+              <a:t>1</a:t>
+            </a:r>
+          </a:p>
+        </p:txBody>
+      </p:sp>
+      <p:sp>
+        <p:nvSpPr>
+          <p:cNvPr id="8" name="TextBox 7"/>
+          <p:cNvSpPr txBox="1"/>
+          <p:nvPr/>
+        </p:nvSpPr>
+        <p:spPr>
+          <a:xfrm>
+            <a:off x="1508760" y="1764792"/>
+            <a:ext cx="4663440" cy="365760"/>
+          </a:xfrm>
+          <a:prstGeom prst="rect">
+            <a:avLst/>
+          </a:prstGeom>
+          <a:noFill/>
+        </p:spPr>
+        <p:txBody>
+          <a:bodyPr wrap="square" anchor="t" lIns="0" rIns="0" tIns="0" bIns="0">
+            <a:spAutoFit/>
+          </a:bodyPr>
+          <a:lstStyle/>
+          <a:p>
+            <a:pPr algn="l">
+              <a:lnSpc>
+                <a:spcPct val="100000"/>
+              </a:lnSpc>
+            </a:pPr>
+            <a:r>
+              <a:rPr sz="1450" b="1">
                 <a:solidFill>
                   <a:srgbClr val="F3F3F6"/>
                 </a:solidFill>
                 <a:latin typeface="Arial"/>
               </a:rPr>
-              <a:t>See it live.</a:t>
-            </a:r>
-          </a:p>
-        </p:txBody>
-      </p:sp>
-      <p:sp>
-        <p:nvSpPr>
-          <p:cNvPr id="6" name="TextBox 5"/>
-          <p:cNvSpPr txBox="1"/>
-          <p:nvPr/>
-        </p:nvSpPr>
-        <p:spPr>
-          <a:xfrm>
-            <a:off x="822960" y="3977639"/>
-            <a:ext cx="10515600" cy="457200"/>
-          </a:xfrm>
-          <a:prstGeom prst="rect">
-            <a:avLst/>
-          </a:prstGeom>
-          <a:noFill/>
-        </p:spPr>
-        <p:txBody>
-          <a:bodyPr wrap="square" anchor="t" lIns="0" rIns="0" tIns="0" bIns="0">
-            <a:spAutoFit/>
-          </a:bodyPr>
-          <a:lstStyle/>
-          <a:p>
-            <a:pPr algn="l">
-              <a:lnSpc>
-                <a:spcPct val="100000"/>
-              </a:lnSpc>
-            </a:pPr>
-            <a:r>
-              <a:rPr sz="1600" b="0">
+              <a:t>Agency overview</a:t>
+            </a:r>
+          </a:p>
+        </p:txBody>
+      </p:sp>
+      <p:sp>
+        <p:nvSpPr>
+          <p:cNvPr id="9" name="TextBox 8"/>
+          <p:cNvSpPr txBox="1"/>
+          <p:nvPr/>
+        </p:nvSpPr>
+        <p:spPr>
+          <a:xfrm>
+            <a:off x="1508760" y="2093976"/>
+            <a:ext cx="4663440" cy="457200"/>
+          </a:xfrm>
+          <a:prstGeom prst="rect">
+            <a:avLst/>
+          </a:prstGeom>
+          <a:noFill/>
+        </p:spPr>
+        <p:txBody>
+          <a:bodyPr wrap="square" anchor="t" lIns="0" rIns="0" tIns="0" bIns="0">
+            <a:spAutoFit/>
+          </a:bodyPr>
+          <a:lstStyle/>
+          <a:p>
+            <a:pPr algn="l">
+              <a:lnSpc>
+                <a:spcPct val="100000"/>
+              </a:lnSpc>
+            </a:pPr>
+            <a:r>
+              <a:rPr sz="1150" b="0">
                 <a:solidFill>
                   <a:srgbClr val="9C9CAA"/>
                 </a:solidFill>
                 <a:latin typeface="Arial"/>
               </a:rPr>
-              <a:t>Interactive demo + customer portal, with live billing data.</a:t>
-            </a:r>
-          </a:p>
-        </p:txBody>
-      </p:sp>
-      <p:sp>
-        <p:nvSpPr>
-          <p:cNvPr id="7" name="Rounded Rectangle 6"/>
+              <a:t>Blended ROAI, revenue and margin across all clients.</a:t>
+            </a:r>
+          </a:p>
+        </p:txBody>
+      </p:sp>
+      <p:sp>
+        <p:nvSpPr>
+          <p:cNvPr id="10" name="Rounded Rectangle 9"/>
           <p:cNvSpPr/>
           <p:nvPr/>
         </p:nvSpPr>
         <p:spPr>
           <a:xfrm>
-            <a:off x="822960" y="4663440"/>
-            <a:ext cx="5486400" cy="640080"/>
+            <a:off x="6400800" y="1783080"/>
+            <a:ext cx="502920" cy="502920"/>
           </a:xfrm>
           <a:prstGeom prst="roundRect">
             <a:avLst/>
           </a:prstGeom>
           <a:solidFill>
-            <a:srgbClr val="15151E"/>
+            <a:srgbClr val="6366F1"/>
           </a:solidFill>
-          <a:ln w="12700">
-            <a:solidFill>
-              <a:srgbClr val="333344"/>
-            </a:solidFill>
+          <a:ln>
+            <a:noFill/>
           </a:ln>
           <a:effectLst/>
         </p:spPr>
@@ -9881,73 +10126,140 @@
       </p:sp>
       <p:sp>
         <p:nvSpPr>
-          <p:cNvPr id="8" name="TextBox 7"/>
-          <p:cNvSpPr txBox="1"/>
-          <p:nvPr/>
-        </p:nvSpPr>
-        <p:spPr>
-          <a:xfrm>
-            <a:off x="1051560" y="4818888"/>
-            <a:ext cx="5120640" cy="365760"/>
-          </a:xfrm>
-          <a:prstGeom prst="rect">
-            <a:avLst/>
-          </a:prstGeom>
-          <a:noFill/>
-        </p:spPr>
-        <p:txBody>
-          <a:bodyPr wrap="square" anchor="t" lIns="0" rIns="0" tIns="0" bIns="0">
-            <a:spAutoFit/>
-          </a:bodyPr>
-          <a:lstStyle/>
-          <a:p>
-            <a:pPr algn="l">
-              <a:lnSpc>
-                <a:spcPct val="100000"/>
-              </a:lnSpc>
-            </a:pPr>
-            <a:r>
-              <a:rPr sz="1300" b="0">
-                <a:solidFill>
-                  <a:srgbClr val="6B6B77"/>
-                </a:solidFill>
-                <a:latin typeface="Arial"/>
-              </a:rPr>
-              <a:t>Demo:  </a:t>
-            </a:r>
-            <a:r>
-              <a:rPr sz="1300" b="1">
-                <a:solidFill>
-                  <a:srgbClr val="A5B4FC"/>
-                </a:solidFill>
-                <a:latin typeface="Arial"/>
-              </a:rPr>
-              <a:t>roai.emergedigital.ae</a:t>
-            </a:r>
-          </a:p>
-        </p:txBody>
-      </p:sp>
-      <p:sp>
-        <p:nvSpPr>
-          <p:cNvPr id="9" name="Rounded Rectangle 8"/>
+          <p:cNvPr id="11" name="TextBox 10"/>
+          <p:cNvSpPr txBox="1"/>
+          <p:nvPr/>
+        </p:nvSpPr>
+        <p:spPr>
+          <a:xfrm>
+            <a:off x="6400800" y="1764792"/>
+            <a:ext cx="502920" cy="502920"/>
+          </a:xfrm>
+          <a:prstGeom prst="rect">
+            <a:avLst/>
+          </a:prstGeom>
+          <a:noFill/>
+        </p:spPr>
+        <p:txBody>
+          <a:bodyPr wrap="square" anchor="ctr" lIns="0" rIns="0" tIns="0" bIns="0">
+            <a:spAutoFit/>
+          </a:bodyPr>
+          <a:lstStyle/>
+          <a:p>
+            <a:pPr algn="ctr">
+              <a:lnSpc>
+                <a:spcPct val="100000"/>
+              </a:lnSpc>
+            </a:pPr>
+            <a:r>
+              <a:rPr sz="1800" b="1">
+                <a:solidFill>
+                  <a:srgbClr val="F3F3F6"/>
+                </a:solidFill>
+                <a:latin typeface="Arial"/>
+              </a:rPr>
+              <a:t>2</a:t>
+            </a:r>
+          </a:p>
+        </p:txBody>
+      </p:sp>
+      <p:sp>
+        <p:nvSpPr>
+          <p:cNvPr id="12" name="TextBox 11"/>
+          <p:cNvSpPr txBox="1"/>
+          <p:nvPr/>
+        </p:nvSpPr>
+        <p:spPr>
+          <a:xfrm>
+            <a:off x="7086600" y="1764792"/>
+            <a:ext cx="4663440" cy="365760"/>
+          </a:xfrm>
+          <a:prstGeom prst="rect">
+            <a:avLst/>
+          </a:prstGeom>
+          <a:noFill/>
+        </p:spPr>
+        <p:txBody>
+          <a:bodyPr wrap="square" anchor="t" lIns="0" rIns="0" tIns="0" bIns="0">
+            <a:spAutoFit/>
+          </a:bodyPr>
+          <a:lstStyle/>
+          <a:p>
+            <a:pPr algn="l">
+              <a:lnSpc>
+                <a:spcPct val="100000"/>
+              </a:lnSpc>
+            </a:pPr>
+            <a:r>
+              <a:rPr sz="1450" b="1">
+                <a:solidFill>
+                  <a:srgbClr val="F3F3F6"/>
+                </a:solidFill>
+                <a:latin typeface="Arial"/>
+              </a:rPr>
+              <a:t>ROAI analytics</a:t>
+            </a:r>
+          </a:p>
+        </p:txBody>
+      </p:sp>
+      <p:sp>
+        <p:nvSpPr>
+          <p:cNvPr id="13" name="TextBox 12"/>
+          <p:cNvSpPr txBox="1"/>
+          <p:nvPr/>
+        </p:nvSpPr>
+        <p:spPr>
+          <a:xfrm>
+            <a:off x="7086600" y="2093976"/>
+            <a:ext cx="4663440" cy="457200"/>
+          </a:xfrm>
+          <a:prstGeom prst="rect">
+            <a:avLst/>
+          </a:prstGeom>
+          <a:noFill/>
+        </p:spPr>
+        <p:txBody>
+          <a:bodyPr wrap="square" anchor="t" lIns="0" rIns="0" tIns="0" bIns="0">
+            <a:spAutoFit/>
+          </a:bodyPr>
+          <a:lstStyle/>
+          <a:p>
+            <a:pPr algn="l">
+              <a:lnSpc>
+                <a:spcPct val="100000"/>
+              </a:lnSpc>
+            </a:pPr>
+            <a:r>
+              <a:rPr sz="1150" b="0">
+                <a:solidFill>
+                  <a:srgbClr val="9C9CAA"/>
+                </a:solidFill>
+                <a:latin typeface="Arial"/>
+              </a:rPr>
+              <a:t>The formula, the trend, the per-pillar breakdown.</a:t>
+            </a:r>
+          </a:p>
+        </p:txBody>
+      </p:sp>
+      <p:sp>
+        <p:nvSpPr>
+          <p:cNvPr id="14" name="Rounded Rectangle 13"/>
           <p:cNvSpPr/>
           <p:nvPr/>
         </p:nvSpPr>
         <p:spPr>
           <a:xfrm>
-            <a:off x="822960" y="5440680"/>
-            <a:ext cx="5486400" cy="640080"/>
+            <a:off x="822960" y="2715768"/>
+            <a:ext cx="502920" cy="502920"/>
           </a:xfrm>
           <a:prstGeom prst="roundRect">
             <a:avLst/>
           </a:prstGeom>
           <a:solidFill>
-            <a:srgbClr val="15151E"/>
+            <a:srgbClr val="6366F1"/>
           </a:solidFill>
-          <a:ln w="12700">
-            <a:solidFill>
-              <a:srgbClr val="333344"/>
-            </a:solidFill>
+          <a:ln>
+            <a:noFill/>
           </a:ln>
           <a:effectLst/>
         </p:spPr>
@@ -9975,87 +10287,896 @@
       </p:sp>
       <p:sp>
         <p:nvSpPr>
-          <p:cNvPr id="10" name="TextBox 9"/>
-          <p:cNvSpPr txBox="1"/>
-          <p:nvPr/>
-        </p:nvSpPr>
-        <p:spPr>
-          <a:xfrm>
-            <a:off x="1051560" y="5596128"/>
-            <a:ext cx="5120640" cy="365760"/>
-          </a:xfrm>
-          <a:prstGeom prst="rect">
-            <a:avLst/>
-          </a:prstGeom>
-          <a:noFill/>
-        </p:spPr>
-        <p:txBody>
-          <a:bodyPr wrap="square" anchor="t" lIns="0" rIns="0" tIns="0" bIns="0">
-            <a:spAutoFit/>
-          </a:bodyPr>
-          <a:lstStyle/>
-          <a:p>
-            <a:pPr algn="l">
-              <a:lnSpc>
-                <a:spcPct val="100000"/>
-              </a:lnSpc>
-            </a:pPr>
-            <a:r>
-              <a:rPr sz="1300" b="0">
+          <p:cNvPr id="15" name="TextBox 14"/>
+          <p:cNvSpPr txBox="1"/>
+          <p:nvPr/>
+        </p:nvSpPr>
+        <p:spPr>
+          <a:xfrm>
+            <a:off x="822960" y="2697479"/>
+            <a:ext cx="502920" cy="502920"/>
+          </a:xfrm>
+          <a:prstGeom prst="rect">
+            <a:avLst/>
+          </a:prstGeom>
+          <a:noFill/>
+        </p:spPr>
+        <p:txBody>
+          <a:bodyPr wrap="square" anchor="ctr" lIns="0" rIns="0" tIns="0" bIns="0">
+            <a:spAutoFit/>
+          </a:bodyPr>
+          <a:lstStyle/>
+          <a:p>
+            <a:pPr algn="ctr">
+              <a:lnSpc>
+                <a:spcPct val="100000"/>
+              </a:lnSpc>
+            </a:pPr>
+            <a:r>
+              <a:rPr sz="1800" b="1">
+                <a:solidFill>
+                  <a:srgbClr val="F3F3F6"/>
+                </a:solidFill>
+                <a:latin typeface="Arial"/>
+              </a:rPr>
+              <a:t>3</a:t>
+            </a:r>
+          </a:p>
+        </p:txBody>
+      </p:sp>
+      <p:sp>
+        <p:nvSpPr>
+          <p:cNvPr id="16" name="TextBox 15"/>
+          <p:cNvSpPr txBox="1"/>
+          <p:nvPr/>
+        </p:nvSpPr>
+        <p:spPr>
+          <a:xfrm>
+            <a:off x="1508760" y="2697479"/>
+            <a:ext cx="4663440" cy="365760"/>
+          </a:xfrm>
+          <a:prstGeom prst="rect">
+            <a:avLst/>
+          </a:prstGeom>
+          <a:noFill/>
+        </p:spPr>
+        <p:txBody>
+          <a:bodyPr wrap="square" anchor="t" lIns="0" rIns="0" tIns="0" bIns="0">
+            <a:spAutoFit/>
+          </a:bodyPr>
+          <a:lstStyle/>
+          <a:p>
+            <a:pPr algn="l">
+              <a:lnSpc>
+                <a:spcPct val="100000"/>
+              </a:lnSpc>
+            </a:pPr>
+            <a:r>
+              <a:rPr sz="1450" b="1">
+                <a:solidFill>
+                  <a:srgbClr val="F3F3F6"/>
+                </a:solidFill>
+                <a:latin typeface="Arial"/>
+              </a:rPr>
+              <a:t>Client deep dive</a:t>
+            </a:r>
+          </a:p>
+        </p:txBody>
+      </p:sp>
+      <p:sp>
+        <p:nvSpPr>
+          <p:cNvPr id="17" name="TextBox 16"/>
+          <p:cNvSpPr txBox="1"/>
+          <p:nvPr/>
+        </p:nvSpPr>
+        <p:spPr>
+          <a:xfrm>
+            <a:off x="1508760" y="3026663"/>
+            <a:ext cx="4663440" cy="457200"/>
+          </a:xfrm>
+          <a:prstGeom prst="rect">
+            <a:avLst/>
+          </a:prstGeom>
+          <a:noFill/>
+        </p:spPr>
+        <p:txBody>
+          <a:bodyPr wrap="square" anchor="t" lIns="0" rIns="0" tIns="0" bIns="0">
+            <a:spAutoFit/>
+          </a:bodyPr>
+          <a:lstStyle/>
+          <a:p>
+            <a:pPr algn="l">
+              <a:lnSpc>
+                <a:spcPct val="100000"/>
+              </a:lnSpc>
+            </a:pPr>
+            <a:r>
+              <a:rPr sz="1150" b="0">
+                <a:solidFill>
+                  <a:srgbClr val="9C9CAA"/>
+                </a:solidFill>
+                <a:latin typeface="Arial"/>
+              </a:rPr>
+              <a:t>Drill into one account + its real case result.</a:t>
+            </a:r>
+          </a:p>
+        </p:txBody>
+      </p:sp>
+      <p:sp>
+        <p:nvSpPr>
+          <p:cNvPr id="18" name="Rounded Rectangle 17"/>
+          <p:cNvSpPr/>
+          <p:nvPr/>
+        </p:nvSpPr>
+        <p:spPr>
+          <a:xfrm>
+            <a:off x="6400800" y="2715768"/>
+            <a:ext cx="502920" cy="502920"/>
+          </a:xfrm>
+          <a:prstGeom prst="roundRect">
+            <a:avLst/>
+          </a:prstGeom>
+          <a:solidFill>
+            <a:srgbClr val="6366F1"/>
+          </a:solidFill>
+          <a:ln>
+            <a:noFill/>
+          </a:ln>
+          <a:effectLst/>
+        </p:spPr>
+        <p:style>
+          <a:lnRef idx="1">
+            <a:schemeClr val="accent1"/>
+          </a:lnRef>
+          <a:fillRef idx="3">
+            <a:schemeClr val="accent1"/>
+          </a:fillRef>
+          <a:effectRef idx="2">
+            <a:schemeClr val="accent1"/>
+          </a:effectRef>
+          <a:fontRef idx="minor">
+            <a:schemeClr val="lt1"/>
+          </a:fontRef>
+        </p:style>
+        <p:txBody>
+          <a:bodyPr rtlCol="0" anchor="ctr"/>
+          <a:lstStyle/>
+          <a:p>
+            <a:pPr algn="ctr"/>
+          </a:p>
+        </p:txBody>
+      </p:sp>
+      <p:sp>
+        <p:nvSpPr>
+          <p:cNvPr id="19" name="TextBox 18"/>
+          <p:cNvSpPr txBox="1"/>
+          <p:nvPr/>
+        </p:nvSpPr>
+        <p:spPr>
+          <a:xfrm>
+            <a:off x="6400800" y="2697479"/>
+            <a:ext cx="502920" cy="502920"/>
+          </a:xfrm>
+          <a:prstGeom prst="rect">
+            <a:avLst/>
+          </a:prstGeom>
+          <a:noFill/>
+        </p:spPr>
+        <p:txBody>
+          <a:bodyPr wrap="square" anchor="ctr" lIns="0" rIns="0" tIns="0" bIns="0">
+            <a:spAutoFit/>
+          </a:bodyPr>
+          <a:lstStyle/>
+          <a:p>
+            <a:pPr algn="ctr">
+              <a:lnSpc>
+                <a:spcPct val="100000"/>
+              </a:lnSpc>
+            </a:pPr>
+            <a:r>
+              <a:rPr sz="1800" b="1">
+                <a:solidFill>
+                  <a:srgbClr val="F3F3F6"/>
+                </a:solidFill>
+                <a:latin typeface="Arial"/>
+              </a:rPr>
+              <a:t>4</a:t>
+            </a:r>
+          </a:p>
+        </p:txBody>
+      </p:sp>
+      <p:sp>
+        <p:nvSpPr>
+          <p:cNvPr id="20" name="TextBox 19"/>
+          <p:cNvSpPr txBox="1"/>
+          <p:nvPr/>
+        </p:nvSpPr>
+        <p:spPr>
+          <a:xfrm>
+            <a:off x="7086600" y="2697479"/>
+            <a:ext cx="4663440" cy="365760"/>
+          </a:xfrm>
+          <a:prstGeom prst="rect">
+            <a:avLst/>
+          </a:prstGeom>
+          <a:noFill/>
+        </p:spPr>
+        <p:txBody>
+          <a:bodyPr wrap="square" anchor="t" lIns="0" rIns="0" tIns="0" bIns="0">
+            <a:spAutoFit/>
+          </a:bodyPr>
+          <a:lstStyle/>
+          <a:p>
+            <a:pPr algn="l">
+              <a:lnSpc>
+                <a:spcPct val="100000"/>
+              </a:lnSpc>
+            </a:pPr>
+            <a:r>
+              <a:rPr sz="1450" b="1">
+                <a:solidFill>
+                  <a:srgbClr val="F3F3F6"/>
+                </a:solidFill>
+                <a:latin typeface="Arial"/>
+              </a:rPr>
+              <a:t>Billing -&gt; Live</a:t>
+            </a:r>
+          </a:p>
+        </p:txBody>
+      </p:sp>
+      <p:sp>
+        <p:nvSpPr>
+          <p:cNvPr id="21" name="TextBox 20"/>
+          <p:cNvSpPr txBox="1"/>
+          <p:nvPr/>
+        </p:nvSpPr>
+        <p:spPr>
+          <a:xfrm>
+            <a:off x="7086600" y="3026663"/>
+            <a:ext cx="4663440" cy="457200"/>
+          </a:xfrm>
+          <a:prstGeom prst="rect">
+            <a:avLst/>
+          </a:prstGeom>
+          <a:noFill/>
+        </p:spPr>
+        <p:txBody>
+          <a:bodyPr wrap="square" anchor="t" lIns="0" rIns="0" tIns="0" bIns="0">
+            <a:spAutoFit/>
+          </a:bodyPr>
+          <a:lstStyle/>
+          <a:p>
+            <a:pPr algn="l">
+              <a:lnSpc>
+                <a:spcPct val="100000"/>
+              </a:lnSpc>
+            </a:pPr>
+            <a:r>
+              <a:rPr sz="1150" b="0">
+                <a:solidFill>
+                  <a:srgbClr val="9C9CAA"/>
+                </a:solidFill>
+                <a:latin typeface="Arial"/>
+              </a:rPr>
+              <a:t>Real Metronome invoices and commit drawdown.</a:t>
+            </a:r>
+          </a:p>
+        </p:txBody>
+      </p:sp>
+      <p:sp>
+        <p:nvSpPr>
+          <p:cNvPr id="22" name="Rounded Rectangle 21"/>
+          <p:cNvSpPr/>
+          <p:nvPr/>
+        </p:nvSpPr>
+        <p:spPr>
+          <a:xfrm>
+            <a:off x="822960" y="3648456"/>
+            <a:ext cx="502920" cy="502920"/>
+          </a:xfrm>
+          <a:prstGeom prst="roundRect">
+            <a:avLst/>
+          </a:prstGeom>
+          <a:solidFill>
+            <a:srgbClr val="6366F1"/>
+          </a:solidFill>
+          <a:ln>
+            <a:noFill/>
+          </a:ln>
+          <a:effectLst/>
+        </p:spPr>
+        <p:style>
+          <a:lnRef idx="1">
+            <a:schemeClr val="accent1"/>
+          </a:lnRef>
+          <a:fillRef idx="3">
+            <a:schemeClr val="accent1"/>
+          </a:fillRef>
+          <a:effectRef idx="2">
+            <a:schemeClr val="accent1"/>
+          </a:effectRef>
+          <a:fontRef idx="minor">
+            <a:schemeClr val="lt1"/>
+          </a:fontRef>
+        </p:style>
+        <p:txBody>
+          <a:bodyPr rtlCol="0" anchor="ctr"/>
+          <a:lstStyle/>
+          <a:p>
+            <a:pPr algn="ctr"/>
+          </a:p>
+        </p:txBody>
+      </p:sp>
+      <p:sp>
+        <p:nvSpPr>
+          <p:cNvPr id="23" name="TextBox 22"/>
+          <p:cNvSpPr txBox="1"/>
+          <p:nvPr/>
+        </p:nvSpPr>
+        <p:spPr>
+          <a:xfrm>
+            <a:off x="822960" y="3630168"/>
+            <a:ext cx="502920" cy="502920"/>
+          </a:xfrm>
+          <a:prstGeom prst="rect">
+            <a:avLst/>
+          </a:prstGeom>
+          <a:noFill/>
+        </p:spPr>
+        <p:txBody>
+          <a:bodyPr wrap="square" anchor="ctr" lIns="0" rIns="0" tIns="0" bIns="0">
+            <a:spAutoFit/>
+          </a:bodyPr>
+          <a:lstStyle/>
+          <a:p>
+            <a:pPr algn="ctr">
+              <a:lnSpc>
+                <a:spcPct val="100000"/>
+              </a:lnSpc>
+            </a:pPr>
+            <a:r>
+              <a:rPr sz="1800" b="1">
+                <a:solidFill>
+                  <a:srgbClr val="F3F3F6"/>
+                </a:solidFill>
+                <a:latin typeface="Arial"/>
+              </a:rPr>
+              <a:t>5</a:t>
+            </a:r>
+          </a:p>
+        </p:txBody>
+      </p:sp>
+      <p:sp>
+        <p:nvSpPr>
+          <p:cNvPr id="24" name="TextBox 23"/>
+          <p:cNvSpPr txBox="1"/>
+          <p:nvPr/>
+        </p:nvSpPr>
+        <p:spPr>
+          <a:xfrm>
+            <a:off x="1508760" y="3630168"/>
+            <a:ext cx="4663440" cy="365760"/>
+          </a:xfrm>
+          <a:prstGeom prst="rect">
+            <a:avLst/>
+          </a:prstGeom>
+          <a:noFill/>
+        </p:spPr>
+        <p:txBody>
+          <a:bodyPr wrap="square" anchor="t" lIns="0" rIns="0" tIns="0" bIns="0">
+            <a:spAutoFit/>
+          </a:bodyPr>
+          <a:lstStyle/>
+          <a:p>
+            <a:pPr algn="l">
+              <a:lnSpc>
+                <a:spcPct val="100000"/>
+              </a:lnSpc>
+            </a:pPr>
+            <a:r>
+              <a:rPr sz="1450" b="1">
+                <a:solidFill>
+                  <a:srgbClr val="F3F3F6"/>
+                </a:solidFill>
+                <a:latin typeface="Arial"/>
+              </a:rPr>
+              <a:t>Customer portal</a:t>
+            </a:r>
+          </a:p>
+        </p:txBody>
+      </p:sp>
+      <p:sp>
+        <p:nvSpPr>
+          <p:cNvPr id="25" name="TextBox 24"/>
+          <p:cNvSpPr txBox="1"/>
+          <p:nvPr/>
+        </p:nvSpPr>
+        <p:spPr>
+          <a:xfrm>
+            <a:off x="1508760" y="3959352"/>
+            <a:ext cx="4663440" cy="457200"/>
+          </a:xfrm>
+          <a:prstGeom prst="rect">
+            <a:avLst/>
+          </a:prstGeom>
+          <a:noFill/>
+        </p:spPr>
+        <p:txBody>
+          <a:bodyPr wrap="square" anchor="t" lIns="0" rIns="0" tIns="0" bIns="0">
+            <a:spAutoFit/>
+          </a:bodyPr>
+          <a:lstStyle/>
+          <a:p>
+            <a:pPr algn="l">
+              <a:lnSpc>
+                <a:spcPct val="100000"/>
+              </a:lnSpc>
+            </a:pPr>
+            <a:r>
+              <a:rPr sz="1150" b="0">
+                <a:solidFill>
+                  <a:srgbClr val="9C9CAA"/>
+                </a:solidFill>
+                <a:latin typeface="Arial"/>
+              </a:rPr>
+              <a:t>The same engagement, the client's own view.</a:t>
+            </a:r>
+          </a:p>
+        </p:txBody>
+      </p:sp>
+      <p:sp>
+        <p:nvSpPr>
+          <p:cNvPr id="26" name="Rounded Rectangle 25"/>
+          <p:cNvSpPr/>
+          <p:nvPr/>
+        </p:nvSpPr>
+        <p:spPr>
+          <a:xfrm>
+            <a:off x="6400800" y="3648456"/>
+            <a:ext cx="502920" cy="502920"/>
+          </a:xfrm>
+          <a:prstGeom prst="roundRect">
+            <a:avLst/>
+          </a:prstGeom>
+          <a:solidFill>
+            <a:srgbClr val="6366F1"/>
+          </a:solidFill>
+          <a:ln>
+            <a:noFill/>
+          </a:ln>
+          <a:effectLst/>
+        </p:spPr>
+        <p:style>
+          <a:lnRef idx="1">
+            <a:schemeClr val="accent1"/>
+          </a:lnRef>
+          <a:fillRef idx="3">
+            <a:schemeClr val="accent1"/>
+          </a:fillRef>
+          <a:effectRef idx="2">
+            <a:schemeClr val="accent1"/>
+          </a:effectRef>
+          <a:fontRef idx="minor">
+            <a:schemeClr val="lt1"/>
+          </a:fontRef>
+        </p:style>
+        <p:txBody>
+          <a:bodyPr rtlCol="0" anchor="ctr"/>
+          <a:lstStyle/>
+          <a:p>
+            <a:pPr algn="ctr"/>
+          </a:p>
+        </p:txBody>
+      </p:sp>
+      <p:sp>
+        <p:nvSpPr>
+          <p:cNvPr id="27" name="TextBox 26"/>
+          <p:cNvSpPr txBox="1"/>
+          <p:nvPr/>
+        </p:nvSpPr>
+        <p:spPr>
+          <a:xfrm>
+            <a:off x="6400800" y="3630168"/>
+            <a:ext cx="502920" cy="502920"/>
+          </a:xfrm>
+          <a:prstGeom prst="rect">
+            <a:avLst/>
+          </a:prstGeom>
+          <a:noFill/>
+        </p:spPr>
+        <p:txBody>
+          <a:bodyPr wrap="square" anchor="ctr" lIns="0" rIns="0" tIns="0" bIns="0">
+            <a:spAutoFit/>
+          </a:bodyPr>
+          <a:lstStyle/>
+          <a:p>
+            <a:pPr algn="ctr">
+              <a:lnSpc>
+                <a:spcPct val="100000"/>
+              </a:lnSpc>
+            </a:pPr>
+            <a:r>
+              <a:rPr sz="1800" b="1">
+                <a:solidFill>
+                  <a:srgbClr val="F3F3F6"/>
+                </a:solidFill>
+                <a:latin typeface="Arial"/>
+              </a:rPr>
+              <a:t>6</a:t>
+            </a:r>
+          </a:p>
+        </p:txBody>
+      </p:sp>
+      <p:sp>
+        <p:nvSpPr>
+          <p:cNvPr id="28" name="TextBox 27"/>
+          <p:cNvSpPr txBox="1"/>
+          <p:nvPr/>
+        </p:nvSpPr>
+        <p:spPr>
+          <a:xfrm>
+            <a:off x="7086600" y="3630168"/>
+            <a:ext cx="4663440" cy="365760"/>
+          </a:xfrm>
+          <a:prstGeom prst="rect">
+            <a:avLst/>
+          </a:prstGeom>
+          <a:noFill/>
+        </p:spPr>
+        <p:txBody>
+          <a:bodyPr wrap="square" anchor="t" lIns="0" rIns="0" tIns="0" bIns="0">
+            <a:spAutoFit/>
+          </a:bodyPr>
+          <a:lstStyle/>
+          <a:p>
+            <a:pPr algn="l">
+              <a:lnSpc>
+                <a:spcPct val="100000"/>
+              </a:lnSpc>
+            </a:pPr>
+            <a:r>
+              <a:rPr sz="1450" b="1">
+                <a:solidFill>
+                  <a:srgbClr val="F3F3F6"/>
+                </a:solidFill>
+                <a:latin typeface="Arial"/>
+              </a:rPr>
+              <a:t>AI marketplace</a:t>
+            </a:r>
+          </a:p>
+        </p:txBody>
+      </p:sp>
+      <p:sp>
+        <p:nvSpPr>
+          <p:cNvPr id="29" name="TextBox 28"/>
+          <p:cNvSpPr txBox="1"/>
+          <p:nvPr/>
+        </p:nvSpPr>
+        <p:spPr>
+          <a:xfrm>
+            <a:off x="7086600" y="3959352"/>
+            <a:ext cx="4663440" cy="457200"/>
+          </a:xfrm>
+          <a:prstGeom prst="rect">
+            <a:avLst/>
+          </a:prstGeom>
+          <a:noFill/>
+        </p:spPr>
+        <p:txBody>
+          <a:bodyPr wrap="square" anchor="t" lIns="0" rIns="0" tIns="0" bIns="0">
+            <a:spAutoFit/>
+          </a:bodyPr>
+          <a:lstStyle/>
+          <a:p>
+            <a:pPr algn="l">
+              <a:lnSpc>
+                <a:spcPct val="100000"/>
+              </a:lnSpc>
+            </a:pPr>
+            <a:r>
+              <a:rPr sz="1150" b="0">
+                <a:solidFill>
+                  <a:srgbClr val="9C9CAA"/>
+                </a:solidFill>
+                <a:latin typeface="Arial"/>
+              </a:rPr>
+              <a:t>Launch a new Vela agent in a click.</a:t>
+            </a:r>
+          </a:p>
+        </p:txBody>
+      </p:sp>
+      <p:sp>
+        <p:nvSpPr>
+          <p:cNvPr id="30" name="Rounded Rectangle 29"/>
+          <p:cNvSpPr/>
+          <p:nvPr/>
+        </p:nvSpPr>
+        <p:spPr>
+          <a:xfrm>
+            <a:off x="822960" y="4581144"/>
+            <a:ext cx="502920" cy="502920"/>
+          </a:xfrm>
+          <a:prstGeom prst="roundRect">
+            <a:avLst/>
+          </a:prstGeom>
+          <a:solidFill>
+            <a:srgbClr val="6366F1"/>
+          </a:solidFill>
+          <a:ln>
+            <a:noFill/>
+          </a:ln>
+          <a:effectLst/>
+        </p:spPr>
+        <p:style>
+          <a:lnRef idx="1">
+            <a:schemeClr val="accent1"/>
+          </a:lnRef>
+          <a:fillRef idx="3">
+            <a:schemeClr val="accent1"/>
+          </a:fillRef>
+          <a:effectRef idx="2">
+            <a:schemeClr val="accent1"/>
+          </a:effectRef>
+          <a:fontRef idx="minor">
+            <a:schemeClr val="lt1"/>
+          </a:fontRef>
+        </p:style>
+        <p:txBody>
+          <a:bodyPr rtlCol="0" anchor="ctr"/>
+          <a:lstStyle/>
+          <a:p>
+            <a:pPr algn="ctr"/>
+          </a:p>
+        </p:txBody>
+      </p:sp>
+      <p:sp>
+        <p:nvSpPr>
+          <p:cNvPr id="31" name="TextBox 30"/>
+          <p:cNvSpPr txBox="1"/>
+          <p:nvPr/>
+        </p:nvSpPr>
+        <p:spPr>
+          <a:xfrm>
+            <a:off x="822960" y="4562856"/>
+            <a:ext cx="502920" cy="502920"/>
+          </a:xfrm>
+          <a:prstGeom prst="rect">
+            <a:avLst/>
+          </a:prstGeom>
+          <a:noFill/>
+        </p:spPr>
+        <p:txBody>
+          <a:bodyPr wrap="square" anchor="ctr" lIns="0" rIns="0" tIns="0" bIns="0">
+            <a:spAutoFit/>
+          </a:bodyPr>
+          <a:lstStyle/>
+          <a:p>
+            <a:pPr algn="ctr">
+              <a:lnSpc>
+                <a:spcPct val="100000"/>
+              </a:lnSpc>
+            </a:pPr>
+            <a:r>
+              <a:rPr sz="1800" b="1">
+                <a:solidFill>
+                  <a:srgbClr val="F3F3F6"/>
+                </a:solidFill>
+                <a:latin typeface="Arial"/>
+              </a:rPr>
+              <a:t>7</a:t>
+            </a:r>
+          </a:p>
+        </p:txBody>
+      </p:sp>
+      <p:sp>
+        <p:nvSpPr>
+          <p:cNvPr id="32" name="TextBox 31"/>
+          <p:cNvSpPr txBox="1"/>
+          <p:nvPr/>
+        </p:nvSpPr>
+        <p:spPr>
+          <a:xfrm>
+            <a:off x="1508760" y="4562856"/>
+            <a:ext cx="4663440" cy="365760"/>
+          </a:xfrm>
+          <a:prstGeom prst="rect">
+            <a:avLst/>
+          </a:prstGeom>
+          <a:noFill/>
+        </p:spPr>
+        <p:txBody>
+          <a:bodyPr wrap="square" anchor="t" lIns="0" rIns="0" tIns="0" bIns="0">
+            <a:spAutoFit/>
+          </a:bodyPr>
+          <a:lstStyle/>
+          <a:p>
+            <a:pPr algn="l">
+              <a:lnSpc>
+                <a:spcPct val="100000"/>
+              </a:lnSpc>
+            </a:pPr>
+            <a:r>
+              <a:rPr sz="1450" b="1">
+                <a:solidFill>
+                  <a:srgbClr val="F3F3F6"/>
+                </a:solidFill>
+                <a:latin typeface="Arial"/>
+              </a:rPr>
+              <a:t>Customer billing &amp; usage</a:t>
+            </a:r>
+          </a:p>
+        </p:txBody>
+      </p:sp>
+      <p:sp>
+        <p:nvSpPr>
+          <p:cNvPr id="33" name="TextBox 32"/>
+          <p:cNvSpPr txBox="1"/>
+          <p:nvPr/>
+        </p:nvSpPr>
+        <p:spPr>
+          <a:xfrm>
+            <a:off x="1508760" y="4892040"/>
+            <a:ext cx="4663440" cy="457200"/>
+          </a:xfrm>
+          <a:prstGeom prst="rect">
+            <a:avLst/>
+          </a:prstGeom>
+          <a:noFill/>
+        </p:spPr>
+        <p:txBody>
+          <a:bodyPr wrap="square" anchor="t" lIns="0" rIns="0" tIns="0" bIns="0">
+            <a:spAutoFit/>
+          </a:bodyPr>
+          <a:lstStyle/>
+          <a:p>
+            <a:pPr algn="l">
+              <a:lnSpc>
+                <a:spcPct val="100000"/>
+              </a:lnSpc>
+            </a:pPr>
+            <a:r>
+              <a:rPr sz="1150" b="0">
+                <a:solidFill>
+                  <a:srgbClr val="9C9CAA"/>
+                </a:solidFill>
+                <a:latin typeface="Arial"/>
+              </a:rPr>
+              <a:t>Credits, usage drawdown and top-up.</a:t>
+            </a:r>
+          </a:p>
+        </p:txBody>
+      </p:sp>
+      <p:sp>
+        <p:nvSpPr>
+          <p:cNvPr id="34" name="TextBox 33"/>
+          <p:cNvSpPr txBox="1"/>
+          <p:nvPr/>
+        </p:nvSpPr>
+        <p:spPr>
+          <a:xfrm>
+            <a:off x="822960" y="5943600"/>
+            <a:ext cx="10424160" cy="365760"/>
+          </a:xfrm>
+          <a:prstGeom prst="rect">
+            <a:avLst/>
+          </a:prstGeom>
+          <a:noFill/>
+        </p:spPr>
+        <p:txBody>
+          <a:bodyPr wrap="square" anchor="t" lIns="0" rIns="0" tIns="0" bIns="0">
+            <a:spAutoFit/>
+          </a:bodyPr>
+          <a:lstStyle/>
+          <a:p>
+            <a:pPr algn="l">
+              <a:lnSpc>
+                <a:spcPct val="100000"/>
+              </a:lnSpc>
+            </a:pPr>
+            <a:r>
+              <a:rPr sz="1200" b="0">
+                <a:solidFill>
+                  <a:srgbClr val="9C9CAA"/>
+                </a:solidFill>
+                <a:latin typeface="Arial"/>
+              </a:rPr>
+              <a:t>Step-by-step with deep links + talk track:  </a:t>
+            </a:r>
+            <a:r>
+              <a:rPr sz="1200" b="1">
+                <a:solidFill>
+                  <a:srgbClr val="A5B4FC"/>
+                </a:solidFill>
+                <a:latin typeface="Arial"/>
+              </a:rPr>
+              <a:t>https://roai.emergedigital.ae/guide</a:t>
+            </a:r>
+          </a:p>
+        </p:txBody>
+      </p:sp>
+      <p:sp>
+        <p:nvSpPr>
+          <p:cNvPr id="35" name="TextBox 34"/>
+          <p:cNvSpPr txBox="1"/>
+          <p:nvPr/>
+        </p:nvSpPr>
+        <p:spPr>
+          <a:xfrm>
+            <a:off x="822960" y="6419088"/>
+            <a:ext cx="8229600" cy="274320"/>
+          </a:xfrm>
+          <a:prstGeom prst="rect">
+            <a:avLst/>
+          </a:prstGeom>
+          <a:noFill/>
+        </p:spPr>
+        <p:txBody>
+          <a:bodyPr wrap="square" anchor="t" lIns="0" rIns="0" tIns="0" bIns="0">
+            <a:spAutoFit/>
+          </a:bodyPr>
+          <a:lstStyle/>
+          <a:p>
+            <a:pPr algn="l">
+              <a:lnSpc>
+                <a:spcPct val="100000"/>
+              </a:lnSpc>
+            </a:pPr>
+            <a:r>
+              <a:rPr sz="900" b="1">
+                <a:solidFill>
+                  <a:srgbClr val="9C9CAA"/>
+                </a:solidFill>
+                <a:latin typeface="Arial"/>
+              </a:rPr>
+              <a:t>Vela OS  </a:t>
+            </a:r>
+            <a:r>
+              <a:rPr sz="900" b="0">
                 <a:solidFill>
                   <a:srgbClr val="6B6B77"/>
                 </a:solidFill>
                 <a:latin typeface="Arial"/>
               </a:rPr>
-              <a:t>Guide: </a:t>
-            </a:r>
-            <a:r>
-              <a:rPr sz="1300" b="1">
-                <a:solidFill>
-                  <a:srgbClr val="A5B4FC"/>
-                </a:solidFill>
-                <a:latin typeface="Arial"/>
-              </a:rPr>
-              <a:t>roai.emergedigital.ae/guide</a:t>
-            </a:r>
-          </a:p>
-        </p:txBody>
-      </p:sp>
-      <p:sp>
-        <p:nvSpPr>
-          <p:cNvPr id="11" name="TextBox 10"/>
-          <p:cNvSpPr txBox="1"/>
-          <p:nvPr/>
-        </p:nvSpPr>
-        <p:spPr>
-          <a:xfrm>
-            <a:off x="822960" y="6419088"/>
-            <a:ext cx="10515600" cy="274320"/>
-          </a:xfrm>
-          <a:prstGeom prst="rect">
-            <a:avLst/>
-          </a:prstGeom>
-          <a:noFill/>
-        </p:spPr>
-        <p:txBody>
-          <a:bodyPr wrap="square" anchor="t" lIns="0" rIns="0" tIns="0" bIns="0">
-            <a:spAutoFit/>
-          </a:bodyPr>
-          <a:lstStyle/>
-          <a:p>
-            <a:pPr algn="l">
-              <a:lnSpc>
-                <a:spcPct val="100000"/>
-              </a:lnSpc>
-            </a:pPr>
-            <a:r>
-              <a:rPr sz="1000" b="0">
+              <a:t>ROAI Analytics  -  Emerge Digital</a:t>
+            </a:r>
+          </a:p>
+        </p:txBody>
+      </p:sp>
+      <p:sp>
+        <p:nvSpPr>
+          <p:cNvPr id="36" name="TextBox 35"/>
+          <p:cNvSpPr txBox="1"/>
+          <p:nvPr/>
+        </p:nvSpPr>
+        <p:spPr>
+          <a:xfrm>
+            <a:off x="8686800" y="6419088"/>
+            <a:ext cx="2679192" cy="274320"/>
+          </a:xfrm>
+          <a:prstGeom prst="rect">
+            <a:avLst/>
+          </a:prstGeom>
+          <a:noFill/>
+        </p:spPr>
+        <p:txBody>
+          <a:bodyPr wrap="square" anchor="t" lIns="0" rIns="0" tIns="0" bIns="0">
+            <a:spAutoFit/>
+          </a:bodyPr>
+          <a:lstStyle/>
+          <a:p>
+            <a:pPr algn="r">
+              <a:lnSpc>
+                <a:spcPct val="100000"/>
+              </a:lnSpc>
+            </a:pPr>
+            <a:r>
+              <a:rPr sz="900" b="0">
                 <a:solidFill>
                   <a:srgbClr val="6B6B77"/>
                 </a:solidFill>
                 <a:latin typeface="Arial"/>
               </a:rPr>
-              <a:t>Built by Emerge Digital for an AI-native enterprise CX practice</a:t>
+              <a:t>roai.emergedigital.ae</a:t>
             </a:r>
           </a:p>
         </p:txBody>

--- a/public/downloads/Vela-OS-Demo-Deck.pptx
+++ b/public/downloads/Vela-OS-Demo-Deck.pptx
@@ -3899,7 +3899,7 @@
                 </a:solidFill>
                 <a:latin typeface="Arial"/>
               </a:rPr>
-              <a:t>roai.emergedigital.ae</a:t>
+              <a:t>vela.emergedigital.com</a:t>
             </a:r>
           </a:p>
         </p:txBody>
@@ -3993,7 +3993,7 @@
                 </a:solidFill>
                 <a:latin typeface="Arial"/>
               </a:rPr>
-              <a:t>roai.emergedigital.ae/guide</a:t>
+              <a:t>vela.emergedigital.com/guide</a:t>
             </a:r>
           </a:p>
         </p:txBody>
@@ -4670,7 +4670,7 @@
                 </a:solidFill>
                 <a:latin typeface="Arial"/>
               </a:rPr>
-              <a:t>roai.emergedigital.ae</a:t>
+              <a:t>vela.emergedigital.com</a:t>
             </a:r>
           </a:p>
         </p:txBody>
@@ -5319,7 +5319,7 @@
                 </a:solidFill>
                 <a:latin typeface="Arial"/>
               </a:rPr>
-              <a:t>roai.emergedigital.ae</a:t>
+              <a:t>vela.emergedigital.com</a:t>
             </a:r>
           </a:p>
         </p:txBody>
@@ -6406,7 +6406,7 @@
                 </a:solidFill>
                 <a:latin typeface="Arial"/>
               </a:rPr>
-              <a:t>roai.emergedigital.ae</a:t>
+              <a:t>vela.emergedigital.com</a:t>
             </a:r>
           </a:p>
         </p:txBody>
@@ -7487,7 +7487,7 @@
                 </a:solidFill>
                 <a:latin typeface="Arial"/>
               </a:rPr>
-              <a:t>roai.emergedigital.ae</a:t>
+              <a:t>vela.emergedigital.com</a:t>
             </a:r>
           </a:p>
         </p:txBody>
@@ -7994,7 +7994,7 @@
                 </a:solidFill>
                 <a:latin typeface="Arial"/>
               </a:rPr>
-              <a:t>roai.emergedigital.ae</a:t>
+              <a:t>vela.emergedigital.com</a:t>
             </a:r>
           </a:p>
         </p:txBody>
@@ -8604,7 +8604,7 @@
                 </a:solidFill>
                 <a:latin typeface="Arial"/>
               </a:rPr>
-              <a:t>roai.emergedigital.ae</a:t>
+              <a:t>vela.emergedigital.com</a:t>
             </a:r>
           </a:p>
         </p:txBody>
@@ -9735,7 +9735,7 @@
                 </a:solidFill>
                 <a:latin typeface="Arial"/>
               </a:rPr>
-              <a:t>roai.emergedigital.ae</a:t>
+              <a:t>vela.emergedigital.com</a:t>
             </a:r>
           </a:p>
         </p:txBody>
@@ -11089,7 +11089,7 @@
                 </a:solidFill>
                 <a:latin typeface="Arial"/>
               </a:rPr>
-              <a:t>https://roai.emergedigital.ae/guide</a:t>
+              <a:t>https://vela.emergedigital.com/guide</a:t>
             </a:r>
           </a:p>
         </p:txBody>
@@ -11176,7 +11176,7 @@
                 </a:solidFill>
                 <a:latin typeface="Arial"/>
               </a:rPr>
-              <a:t>roai.emergedigital.ae</a:t>
+              <a:t>vela.emergedigital.com</a:t>
             </a:r>
           </a:p>
         </p:txBody>
